--- a/slides/pptx/week04.pptx
+++ b/slides/pptx/week04.pptx
@@ -29,9 +29,13 @@
     <p:sldId id="277" r:id="rId23"/>
     <p:sldId id="278" r:id="rId24"/>
     <p:sldId id="279" r:id="rId25"/>
+    <p:sldId id="280" r:id="rId26"/>
+    <p:sldId id="281" r:id="rId27"/>
+    <p:sldId id="282" r:id="rId28"/>
+    <p:sldId id="283" r:id="rId29"/>
   </p:sldIdLst>
   <p:notesMasterIdLst>
-    <p:notesMasterId r:id="rId26"/>
+    <p:notesMasterId r:id="rId30"/>
   </p:notesMasterIdLst>
   <p:sldSz cx="9144000" cy="5143500"/>
   <p:notesSz cx="5143500" cy="9144000"/>
@@ -613,7 +617,7 @@
           <a:p>
             <a:r>
               <a:rPr lang="en-US" dirty="0"/>
-              <a:t>Key principle that recurs all term. Block-lists always lose (attackers invent new payloads); allow-lists define what's acceptable. Emphasize: validation is defense-in-depth, NOT the primary SQLi fix (that's parameterization — next). ~4 min.</a:t>
+              <a:t>The consolidation slide — leave it up while students work Task 1. It shows all three states at once (normal / injected / parameterised) with the token colours: blue = value/data, orange = attacker chars that became code, struck-through grey = the check that no longer runs. Point at the orange ' in row 2 — 'that one character is the whole bug' — then the ? in row 3 — 'the value can't reach the grammar'. Same picture the sqli-parse sim animates live. ~3 min.</a:t>
             </a:r>
             <a:endParaRPr lang="en-US" dirty="0"/>
           </a:p>
@@ -701,7 +705,7 @@
           <a:p>
             <a:r>
               <a:rPr lang="en-US" dirty="0"/>
-              <a:t>Point out injection isn't just login boxes — any input reaching an interpreter. Note verbose DB errors are a gift to attackers (schema leakage). Be clear Burp/sqlmap are industry-awareness, not something this week's worksheet has them install — every task here is a plain URL/curl payload. ~3 min.</a:t>
+              <a:t>Make it real — these are careers ended and companies fined. Equifax = a single unpatched input parser. Tie back: every breach here started as "untrusted data interpreted as code". ~4 min.</a:t>
             </a:r>
             <a:endParaRPr lang="en-US" dirty="0"/>
           </a:p>
@@ -789,7 +793,7 @@
           <a:p>
             <a:r>
               <a:rPr lang="en-US" dirty="0"/>
-              <a:t>Same pattern, deadlier outcome (RCE = own the server, not just the DB). Walk the metacharacters: `;` chains a second command. Ask: "what does `8.8.8.8; cat /etc/passwd` run?" ~5 min.</a:t>
+              <a:t>Key principle that recurs all term. Block-lists always lose (attackers invent new payloads); allow-lists define what's acceptable. Emphasize: validation is defense-in-depth, NOT the primary SQLi fix (that's parameterization — next). ~4 min.</a:t>
             </a:r>
             <a:endParaRPr lang="en-US" dirty="0"/>
           </a:p>
@@ -877,7 +881,7 @@
           <a:p>
             <a:r>
               <a:rPr lang="en-US" dirty="0"/>
-              <a:t>Connects to W1's /upload threat model. Be precise: this app does NOT give you a working webshell today — Task 4 is a documentation exercise ("what's missing, and why does that stop RCE?"), not a live exploit. Don't imply students will pop a shell; they'll reason about the one control standing between this bug and that outcome. ~5 min.</a:t>
+              <a:t>Point out injection isn't just login boxes — any input reaching an interpreter. Note verbose DB errors are a gift to attackers (schema leakage). Be clear Burp/sqlmap are industry-awareness, not something this week's worksheet has them install — every task here is a plain URL/curl payload. ~3 min.</a:t>
             </a:r>
             <a:endParaRPr lang="en-US" dirty="0"/>
           </a:p>
@@ -965,7 +969,7 @@
           <a:p>
             <a:r>
               <a:rPr lang="en-US" dirty="0"/>
-              <a:t>Connects to W1's /upload threat model. Be precise: this app does NOT give you a working webshell today — Task 4 is a documentation exercise ("what's missing, and why does that stop RCE?"), not a live exploit. Don't imply students will pop a shell; they'll reason about the one control standing between this bug and that outcome. ~5 min.</a:t>
+              <a:t>Same pattern, deadlier outcome (RCE = own the server, not just the DB). Walk the metacharacters: `;` chains a second command. Ask: "what does `8.8.8.8; cat /etc/passwd` run?" ~5 min.</a:t>
             </a:r>
             <a:endParaRPr lang="en-US" dirty="0"/>
           </a:p>
@@ -1053,7 +1057,7 @@
           <a:p>
             <a:r>
               <a:rPr lang="en-US" dirty="0"/>
-              <a:t>They map every lab finding to a CWE id — these three are what this week's worksheet actually grades. CWE-434 is a quarter of the exploitation score; don't drop it from this list. ~1 min.</a:t>
+              <a:t>Same shape as the SQLi fix — separate command from data. shell=True actually spawns `/bin/sh -c "ping -c 1 &lt;yourstring&gt;"`, so sh does the parsing and every metacharacter (; | &amp; $() backtick &gt; &lt;) is live -&gt; command injection. With an argv list there is NO shell in the picture: execve runs the ping binary with argv = ["ping","-c","1",host], the kernel hands ping exactly four arguments, and host is a single opaque string -&gt; ping tries to resolve "8.8.8.8;cat /flag.txt" as a hostname, fails, done. Nothing ever parses the ;. Exact parallel to parameterized queries: the structure (command + fixed flags) is fixed in code, the data (host) rides in a separate slot no interpreter re-parses. Add an allow-list on host as defense in depth. Punch line: you don't sanitize the metacharacters — you remove the shell that would interpret them. ~6 min.</a:t>
             </a:r>
             <a:endParaRPr lang="en-US" dirty="0"/>
           </a:p>
@@ -1141,7 +1145,7 @@
           <a:p>
             <a:r>
               <a:rPr lang="en-US" dirty="0"/>
-              <a:t>The payoff. #1 message: parameterization makes data STAY data — the DB never parses it as SQL. For shells, pass an argv array, not a string. Least-privilege limits blast radius if they still get in. ~5 min.</a:t>
+              <a:t>Connects to W1's /upload threat model. Be precise: this app does NOT give you a working webshell today — Task 4 is a documentation exercise ("what's missing, and why does that stop RCE?"), not a live exploit. Don't imply students will pop a shell; they'll reason about the one control standing between this bug and that outcome. ~5 min.</a:t>
             </a:r>
             <a:endParaRPr lang="en-US" dirty="0"/>
           </a:p>
@@ -1229,7 +1233,7 @@
           <a:p>
             <a:r>
               <a:rPr lang="en-US" dirty="0"/>
-              <a:t>Synthesis slide — the SAME untrusted value from request.args/request.files is what feeds all three attacks just covered. Land on the closing line: escaping quotes does nothing to a semicolon in a shell, and a safe filename does nothing to SQL. Sets up "Defenses" as three separate fixes, not one. ~4 min.</a:t>
+              <a:t>Connects to W1's /upload threat model. Be precise: this app does NOT give you a working webshell today — Task 4 is a documentation exercise ("what's missing, and why does that stop RCE?"), not a live exploit. Don't imply students will pop a shell; they'll reason about the one control standing between this bug and that outcome. ~5 min.</a:t>
             </a:r>
             <a:endParaRPr lang="en-US" dirty="0"/>
           </a:p>
@@ -1317,7 +1321,7 @@
           <a:p>
             <a:r>
               <a:rPr lang="en-US" dirty="0"/>
-              <a:t>Explain before lab: this is NOT a tiered WAF-bypass ladder — it's 4 fixed attacks against app.py, then proving solution_app.py blocks all 4 ("boss defeated" = Task 5). No filter exists in the vulnerable app to bypass; don't set that expectation. DVWA/Juice Shop remain available as optional secondary targets, not the graded game. ~3 min.</a:t>
+              <a:t>They map every lab finding to a CWE id — these three are what this week's worksheet actually grades. CWE-434 is a quarter of the exploitation score; don't drop it from this list. ~1 min.</a:t>
             </a:r>
             <a:endParaRPr lang="en-US" dirty="0"/>
           </a:p>
@@ -1405,7 +1409,7 @@
           <a:p>
             <a:r>
               <a:rPr lang="en-US" dirty="0"/>
-              <a:t>Explain before lab: this is NOT a tiered WAF-bypass ladder — it's 4 fixed attacks against app.py, then proving solution_app.py blocks all 4 ("boss defeated" = Task 5). No filter exists in the vulnerable app to bypass; don't set that expectation. DVWA/Juice Shop remain available as optional secondary targets, not the graded game. ~3 min.</a:t>
+              <a:t>The payoff. #1 message: parameterization makes data STAY data — the DB never parses it as SQL. For shells, pass an argv array, not a string. Least-privilege limits blast radius if they still get in. ~5 min.</a:t>
             </a:r>
             <a:endParaRPr lang="en-US" dirty="0"/>
           </a:p>
@@ -1581,7 +1585,7 @@
           <a:p>
             <a:r>
               <a:rPr lang="en-US" dirty="0"/>
-              <a:t>Logistics. Circulate with TAs. Remind: step 4 (rewrite + prove the payload now fails) is graded, not just the exploit. Also kick off the NoteVault project injection task (worksheet).</a:t>
+              <a:t>Synthesis slide — the SAME untrusted value from request.args/request.files is what feeds all three attacks just covered. Land on the closing line: escaping quotes does nothing to a semicolon in a shell, and a safe filename does nothing to SQL. Sets up "Defenses" as three separate fixes, not one. ~4 min.</a:t>
             </a:r>
             <a:endParaRPr lang="en-US" dirty="0"/>
           </a:p>
@@ -1669,7 +1673,7 @@
           <a:p>
             <a:r>
               <a:rPr lang="en-US" dirty="0"/>
-              <a:t>Logistics. Circulate with TAs. Remind: step 4 (rewrite + prove the payload now fails) is graded, not just the exploit. Also kick off the NoteVault project injection task (worksheet).</a:t>
+              <a:t>Synthesis slide — the SAME untrusted value from request.args/request.files is what feeds all three attacks just covered. Land on the closing line: escaping quotes does nothing to a semicolon in a shell, and a safe filename does nothing to SQL. Sets up "Defenses" as three separate fixes, not one. ~4 min.</a:t>
             </a:r>
             <a:endParaRPr lang="en-US" dirty="0"/>
           </a:p>
@@ -1757,7 +1761,7 @@
           <a:p>
             <a:r>
               <a:rPr lang="en-US" dirty="0"/>
-              <a:t>Set expectations: before AND after code + proof. The AI-resilient tasks are part of the grade. Q6 of this week's quiz asks for their own payload — confirm the current worksheet's exact wording before promising a "personal flag" on stage; check with the team if that's still accurate.</a:t>
+              <a:t>Explain before lab: this is NOT a tiered WAF-bypass ladder — it's 4 fixed attacks against app.py, then proving solution_app.py blocks all 4 ("warm-up cleared" = Task 5). No filter exists in the vulnerable app to bypass; don't set that expectation. DVWA/Juice Shop remain available as optional secondary targets, not the graded game. This is deliberately separate from the arena's own "SQLi Boss Fight" container challenge later in the session — same technique, different target, don't conflate the two names. ~3 min.</a:t>
             </a:r>
             <a:endParaRPr lang="en-US" dirty="0"/>
           </a:p>
@@ -1845,7 +1849,7 @@
           <a:p>
             <a:r>
               <a:rPr lang="en-US" dirty="0"/>
-              <a:t>Recap in 3 lines. Cold-call: "what's the ONE fix for SQLi?" (parameterized queries). ~2 min.</a:t>
+              <a:t>Explain before lab: this is NOT a tiered WAF-bypass ladder — it's 4 fixed attacks against app.py, then proving solution_app.py blocks all 4 ("warm-up cleared" = Task 5). No filter exists in the vulnerable app to bypass; don't set that expectation. DVWA/Juice Shop remain available as optional secondary targets, not the graded game. This is deliberately separate from the arena's own "SQLi Boss Fight" container challenge later in the session — same technique, different target, don't conflate the two names. ~3 min.</a:t>
             </a:r>
             <a:endParaRPr lang="en-US" dirty="0"/>
           </a:p>
@@ -1933,7 +1937,7 @@
           <a:p>
             <a:r>
               <a:rPr lang="en-US" dirty="0"/>
-              <a:t>Cliffhanger: "Next week the same trick runs in the victim's browser — and skims credit cards." Remind DVWA/Juice Shop ready in their VM.</a:t>
+              <a:t>Logistics. Circulate with TAs. Remind: step 4 (rewrite + prove the payload now fails) is graded, not just the exploit. Also kick off the NoteVault project injection task (worksheet).</a:t>
             </a:r>
             <a:endParaRPr lang="en-US" dirty="0"/>
           </a:p>
@@ -1957,6 +1961,358 @@
             <a:fld id="{F7021451-1387-4CA6-816F-3879F97B5CBC}" type="slidenum">
               <a:rPr lang="en-US"/>
               <a:t>24</a:t>
+            </a:fld>
+            <a:endParaRPr lang="en-US"/>
+          </a:p>
+        </p:txBody>
+      </p:sp>
+    </p:spTree>
+    <p:extLst>
+      <p:ext uri="{BB962C8B-B14F-4D97-AF65-F5344CB8AC3E}">
+        <p14:creationId xmlns:p14="http://schemas.microsoft.com/office/powerpoint/2010/main" val="1024086991"/>
+      </p:ext>
+    </p:extLst>
+  </p:cSld>
+  <p:clrMapOvr>
+    <a:masterClrMapping/>
+  </p:clrMapOvr>
+</p:notes>
+</file>
+
+<file path=ppt/notesSlides/notesSlide25.xml><?xml version="1.0" encoding="utf-8"?>
+<p:notes xmlns:a="http://schemas.openxmlformats.org/drawingml/2006/main" xmlns:r="http://schemas.openxmlformats.org/officeDocument/2006/relationships" xmlns:p="http://schemas.openxmlformats.org/presentationml/2006/main">
+  <p:cSld>
+    <p:spTree>
+      <p:nvGrpSpPr>
+        <p:cNvPr id="1" name=""/>
+        <p:cNvGrpSpPr/>
+        <p:nvPr/>
+      </p:nvGrpSpPr>
+      <p:grpSpPr>
+        <a:xfrm>
+          <a:off x="0" y="0"/>
+          <a:ext cx="0" cy="0"/>
+          <a:chOff x="0" y="0"/>
+          <a:chExt cx="0" cy="0"/>
+        </a:xfrm>
+      </p:grpSpPr>
+      <p:sp>
+        <p:nvSpPr>
+          <p:cNvPr id="2" name="Slide Image Placeholder 1"/>
+          <p:cNvSpPr>
+            <a:spLocks noGrp="1" noRot="1" noChangeAspect="1"/>
+          </p:cNvSpPr>
+          <p:nvPr>
+            <p:ph type="sldImg"/>
+          </p:nvPr>
+        </p:nvSpPr>
+        <p:spPr/>
+      </p:sp>
+      <p:sp>
+        <p:nvSpPr>
+          <p:cNvPr id="3" name="Notes Placeholder 2"/>
+          <p:cNvSpPr>
+            <a:spLocks noGrp="1"/>
+          </p:cNvSpPr>
+          <p:nvPr>
+            <p:ph type="body" idx="1"/>
+          </p:nvPr>
+        </p:nvSpPr>
+        <p:spPr/>
+        <p:txBody>
+          <a:bodyPr/>
+          <a:lstStyle/>
+          <a:p>
+            <a:r>
+              <a:rPr lang="en-US" dirty="0"/>
+              <a:t>Logistics. Circulate with TAs. Remind: step 4 (rewrite + prove the payload now fails) is graded, not just the exploit. Also kick off the NoteVault project injection task (worksheet).</a:t>
+            </a:r>
+            <a:endParaRPr lang="en-US" dirty="0"/>
+          </a:p>
+        </p:txBody>
+      </p:sp>
+      <p:sp>
+        <p:nvSpPr>
+          <p:cNvPr id="4" name="Slide Number Placeholder 3"/>
+          <p:cNvSpPr>
+            <a:spLocks noGrp="1"/>
+          </p:cNvSpPr>
+          <p:nvPr>
+            <p:ph type="sldNum" sz="quarter" idx="10"/>
+          </p:nvPr>
+        </p:nvSpPr>
+        <p:spPr/>
+        <p:txBody>
+          <a:bodyPr/>
+          <a:lstStyle/>
+          <a:p>
+            <a:fld id="{F7021451-1387-4CA6-816F-3879F97B5CBC}" type="slidenum">
+              <a:rPr lang="en-US"/>
+              <a:t>25</a:t>
+            </a:fld>
+            <a:endParaRPr lang="en-US"/>
+          </a:p>
+        </p:txBody>
+      </p:sp>
+    </p:spTree>
+    <p:extLst>
+      <p:ext uri="{BB962C8B-B14F-4D97-AF65-F5344CB8AC3E}">
+        <p14:creationId xmlns:p14="http://schemas.microsoft.com/office/powerpoint/2010/main" val="1024086991"/>
+      </p:ext>
+    </p:extLst>
+  </p:cSld>
+  <p:clrMapOvr>
+    <a:masterClrMapping/>
+  </p:clrMapOvr>
+</p:notes>
+</file>
+
+<file path=ppt/notesSlides/notesSlide26.xml><?xml version="1.0" encoding="utf-8"?>
+<p:notes xmlns:a="http://schemas.openxmlformats.org/drawingml/2006/main" xmlns:r="http://schemas.openxmlformats.org/officeDocument/2006/relationships" xmlns:p="http://schemas.openxmlformats.org/presentationml/2006/main">
+  <p:cSld>
+    <p:spTree>
+      <p:nvGrpSpPr>
+        <p:cNvPr id="1" name=""/>
+        <p:cNvGrpSpPr/>
+        <p:nvPr/>
+      </p:nvGrpSpPr>
+      <p:grpSpPr>
+        <a:xfrm>
+          <a:off x="0" y="0"/>
+          <a:ext cx="0" cy="0"/>
+          <a:chOff x="0" y="0"/>
+          <a:chExt cx="0" cy="0"/>
+        </a:xfrm>
+      </p:grpSpPr>
+      <p:sp>
+        <p:nvSpPr>
+          <p:cNvPr id="2" name="Slide Image Placeholder 1"/>
+          <p:cNvSpPr>
+            <a:spLocks noGrp="1" noRot="1" noChangeAspect="1"/>
+          </p:cNvSpPr>
+          <p:nvPr>
+            <p:ph type="sldImg"/>
+          </p:nvPr>
+        </p:nvSpPr>
+        <p:spPr/>
+      </p:sp>
+      <p:sp>
+        <p:nvSpPr>
+          <p:cNvPr id="3" name="Notes Placeholder 2"/>
+          <p:cNvSpPr>
+            <a:spLocks noGrp="1"/>
+          </p:cNvSpPr>
+          <p:nvPr>
+            <p:ph type="body" idx="1"/>
+          </p:nvPr>
+        </p:nvSpPr>
+        <p:spPr/>
+        <p:txBody>
+          <a:bodyPr/>
+          <a:lstStyle/>
+          <a:p>
+            <a:r>
+              <a:rPr lang="en-US" dirty="0"/>
+              <a:t>Set expectations: before AND after code + proof. The AI-resilient tasks are part of the grade. The weekly quiz no longer asks for their payload/flag (that question was dropped — quiz runs before the lab, so it couldn't be answered) — the payload + flag are required in the worksheet's Task 1 and Evidence &amp; Integrity section instead.</a:t>
+            </a:r>
+            <a:endParaRPr lang="en-US" dirty="0"/>
+          </a:p>
+        </p:txBody>
+      </p:sp>
+      <p:sp>
+        <p:nvSpPr>
+          <p:cNvPr id="4" name="Slide Number Placeholder 3"/>
+          <p:cNvSpPr>
+            <a:spLocks noGrp="1"/>
+          </p:cNvSpPr>
+          <p:nvPr>
+            <p:ph type="sldNum" sz="quarter" idx="10"/>
+          </p:nvPr>
+        </p:nvSpPr>
+        <p:spPr/>
+        <p:txBody>
+          <a:bodyPr/>
+          <a:lstStyle/>
+          <a:p>
+            <a:fld id="{F7021451-1387-4CA6-816F-3879F97B5CBC}" type="slidenum">
+              <a:rPr lang="en-US"/>
+              <a:t>26</a:t>
+            </a:fld>
+            <a:endParaRPr lang="en-US"/>
+          </a:p>
+        </p:txBody>
+      </p:sp>
+    </p:spTree>
+    <p:extLst>
+      <p:ext uri="{BB962C8B-B14F-4D97-AF65-F5344CB8AC3E}">
+        <p14:creationId xmlns:p14="http://schemas.microsoft.com/office/powerpoint/2010/main" val="1024086991"/>
+      </p:ext>
+    </p:extLst>
+  </p:cSld>
+  <p:clrMapOvr>
+    <a:masterClrMapping/>
+  </p:clrMapOvr>
+</p:notes>
+</file>
+
+<file path=ppt/notesSlides/notesSlide27.xml><?xml version="1.0" encoding="utf-8"?>
+<p:notes xmlns:a="http://schemas.openxmlformats.org/drawingml/2006/main" xmlns:r="http://schemas.openxmlformats.org/officeDocument/2006/relationships" xmlns:p="http://schemas.openxmlformats.org/presentationml/2006/main">
+  <p:cSld>
+    <p:spTree>
+      <p:nvGrpSpPr>
+        <p:cNvPr id="1" name=""/>
+        <p:cNvGrpSpPr/>
+        <p:nvPr/>
+      </p:nvGrpSpPr>
+      <p:grpSpPr>
+        <a:xfrm>
+          <a:off x="0" y="0"/>
+          <a:ext cx="0" cy="0"/>
+          <a:chOff x="0" y="0"/>
+          <a:chExt cx="0" cy="0"/>
+        </a:xfrm>
+      </p:grpSpPr>
+      <p:sp>
+        <p:nvSpPr>
+          <p:cNvPr id="2" name="Slide Image Placeholder 1"/>
+          <p:cNvSpPr>
+            <a:spLocks noGrp="1" noRot="1" noChangeAspect="1"/>
+          </p:cNvSpPr>
+          <p:nvPr>
+            <p:ph type="sldImg"/>
+          </p:nvPr>
+        </p:nvSpPr>
+        <p:spPr/>
+      </p:sp>
+      <p:sp>
+        <p:nvSpPr>
+          <p:cNvPr id="3" name="Notes Placeholder 2"/>
+          <p:cNvSpPr>
+            <a:spLocks noGrp="1"/>
+          </p:cNvSpPr>
+          <p:nvPr>
+            <p:ph type="body" idx="1"/>
+          </p:nvPr>
+        </p:nvSpPr>
+        <p:spPr/>
+        <p:txBody>
+          <a:bodyPr/>
+          <a:lstStyle/>
+          <a:p>
+            <a:r>
+              <a:rPr lang="en-US" dirty="0"/>
+              <a:t>Recap in 3 lines. Cold-call: "what's the ONE fix for SQLi?" (parameterized queries). ~2 min.</a:t>
+            </a:r>
+            <a:endParaRPr lang="en-US" dirty="0"/>
+          </a:p>
+        </p:txBody>
+      </p:sp>
+      <p:sp>
+        <p:nvSpPr>
+          <p:cNvPr id="4" name="Slide Number Placeholder 3"/>
+          <p:cNvSpPr>
+            <a:spLocks noGrp="1"/>
+          </p:cNvSpPr>
+          <p:nvPr>
+            <p:ph type="sldNum" sz="quarter" idx="10"/>
+          </p:nvPr>
+        </p:nvSpPr>
+        <p:spPr/>
+        <p:txBody>
+          <a:bodyPr/>
+          <a:lstStyle/>
+          <a:p>
+            <a:fld id="{F7021451-1387-4CA6-816F-3879F97B5CBC}" type="slidenum">
+              <a:rPr lang="en-US"/>
+              <a:t>27</a:t>
+            </a:fld>
+            <a:endParaRPr lang="en-US"/>
+          </a:p>
+        </p:txBody>
+      </p:sp>
+    </p:spTree>
+    <p:extLst>
+      <p:ext uri="{BB962C8B-B14F-4D97-AF65-F5344CB8AC3E}">
+        <p14:creationId xmlns:p14="http://schemas.microsoft.com/office/powerpoint/2010/main" val="1024086991"/>
+      </p:ext>
+    </p:extLst>
+  </p:cSld>
+  <p:clrMapOvr>
+    <a:masterClrMapping/>
+  </p:clrMapOvr>
+</p:notes>
+</file>
+
+<file path=ppt/notesSlides/notesSlide28.xml><?xml version="1.0" encoding="utf-8"?>
+<p:notes xmlns:a="http://schemas.openxmlformats.org/drawingml/2006/main" xmlns:r="http://schemas.openxmlformats.org/officeDocument/2006/relationships" xmlns:p="http://schemas.openxmlformats.org/presentationml/2006/main">
+  <p:cSld>
+    <p:spTree>
+      <p:nvGrpSpPr>
+        <p:cNvPr id="1" name=""/>
+        <p:cNvGrpSpPr/>
+        <p:nvPr/>
+      </p:nvGrpSpPr>
+      <p:grpSpPr>
+        <a:xfrm>
+          <a:off x="0" y="0"/>
+          <a:ext cx="0" cy="0"/>
+          <a:chOff x="0" y="0"/>
+          <a:chExt cx="0" cy="0"/>
+        </a:xfrm>
+      </p:grpSpPr>
+      <p:sp>
+        <p:nvSpPr>
+          <p:cNvPr id="2" name="Slide Image Placeholder 1"/>
+          <p:cNvSpPr>
+            <a:spLocks noGrp="1" noRot="1" noChangeAspect="1"/>
+          </p:cNvSpPr>
+          <p:nvPr>
+            <p:ph type="sldImg"/>
+          </p:nvPr>
+        </p:nvSpPr>
+        <p:spPr/>
+      </p:sp>
+      <p:sp>
+        <p:nvSpPr>
+          <p:cNvPr id="3" name="Notes Placeholder 2"/>
+          <p:cNvSpPr>
+            <a:spLocks noGrp="1"/>
+          </p:cNvSpPr>
+          <p:nvPr>
+            <p:ph type="body" idx="1"/>
+          </p:nvPr>
+        </p:nvSpPr>
+        <p:spPr/>
+        <p:txBody>
+          <a:bodyPr/>
+          <a:lstStyle/>
+          <a:p>
+            <a:r>
+              <a:rPr lang="en-US" dirty="0"/>
+              <a:t>Cliffhanger: "Next week the same trick runs in the victim's browser — and skims credit cards." Remind DVWA/Juice Shop ready in their VM.</a:t>
+            </a:r>
+            <a:endParaRPr lang="en-US" dirty="0"/>
+          </a:p>
+        </p:txBody>
+      </p:sp>
+      <p:sp>
+        <p:nvSpPr>
+          <p:cNvPr id="4" name="Slide Number Placeholder 3"/>
+          <p:cNvSpPr>
+            <a:spLocks noGrp="1"/>
+          </p:cNvSpPr>
+          <p:nvPr>
+            <p:ph type="sldNum" sz="quarter" idx="10"/>
+          </p:nvPr>
+        </p:nvSpPr>
+        <p:spPr/>
+        <p:txBody>
+          <a:bodyPr/>
+          <a:lstStyle/>
+          <a:p>
+            <a:fld id="{F7021451-1387-4CA6-816F-3879F97B5CBC}" type="slidenum">
+              <a:rPr lang="en-US"/>
+              <a:t>28</a:t>
             </a:fld>
             <a:endParaRPr lang="en-US"/>
           </a:p>
@@ -2373,7 +2729,7 @@
           <a:p>
             <a:r>
               <a:rPr lang="en-US" dirty="0"/>
-              <a:t>The worked example — slow down here. Decompose the payload token by token; this is exactly the SQLi Boss Fight's auth-bypass hit. A common wrong instinct is to add `OR 1=1` and a `LIMIT` clause copied from a MySQL tutorial — walk through why neither is needed against this SQLite app, and why the bare `'--` is what the worksheet actually uses. ~8 min.</a:t>
+              <a:t>The worked example — slow down here. Decompose the payload token by token; this is exactly the SQLi Warm-up's auth-bypass hit. A common wrong instinct is to add `OR 1=1` and a `LIMIT` clause copied from a MySQL tutorial — walk through why neither is needed against this SQLite app, and why the bare `'--` is what the worksheet actually uses. ~8 min.</a:t>
             </a:r>
             <a:endParaRPr lang="en-US" dirty="0"/>
           </a:p>
@@ -2461,7 +2817,7 @@
           <a:p>
             <a:r>
               <a:rPr lang="en-US" dirty="0"/>
-              <a:t>The worked example — slow down here. Decompose the payload token by token; this is exactly the SQLi Boss Fight's auth-bypass hit. A common wrong instinct is to add `OR 1=1` and a `LIMIT` clause copied from a MySQL tutorial — walk through why neither is needed against this SQLite app, and why the bare `'--` is what the worksheet actually uses. ~8 min.</a:t>
+              <a:t>The worked example — slow down here. Decompose the payload token by token; this is exactly the SQLi Warm-up's auth-bypass hit. A common wrong instinct is to add `OR 1=1` and a `LIMIT` clause copied from a MySQL tutorial — walk through why neither is needed against this SQLite app, and why the bare `'--` is what the worksheet actually uses. ~8 min.</a:t>
             </a:r>
             <a:endParaRPr lang="en-US" dirty="0"/>
           </a:p>
@@ -2549,7 +2905,7 @@
           <a:p>
             <a:r>
               <a:rPr lang="en-US" dirty="0"/>
-              <a:t>Make it real — these are careers ended and companies fined. Equifax = a single unpatched input parser. Tie back: every breach here started as "untrusted data interpreted as code". ~4 min.</a:t>
+              <a:t>THE slide that makes SQLi click — spend time here, it's the one students miss. Draw both on the board. Concatenation: the DB receives one already-joined string and only THEN parses which characters are grammar vs. value, so the user's ' can retroactively become a string-terminator (the break-out they saw in the sim). Parameterized: the driver sends the template WITH the ?-placeholders to the DB and the DB parses+plans the structure FIRST — 'there are exactly two values here' is decided before any user byte is seen — then the values are shipped separately and slotted in as pure data. Because parsing already finished, alice'-- is just a 9-char username that matches no row; the ' and -- are inert. Punch line: parameterization doesn't *clean* the input, it *removes the input's power to change the grammar*. That's why it beats escaping/block-lists, which only try to spot bad characters. ~7 min.</a:t>
             </a:r>
             <a:endParaRPr lang="en-US" dirty="0"/>
           </a:p>
@@ -2924,7 +3280,7 @@
       </p:grpSpPr>
       <p:pic>
         <p:nvPicPr>
-          <p:cNvPr id="2" name="Image 0" descr="/Users/pop7/Library/CloudStorage/OneDrive-MonsterConnectCo.,Ltd/Lecture/KOSEN69 - software-security/slides/pptx/assets/logo-small.png">    </p:cNvPr>
+          <p:cNvPr id="2" name="Image 0" descr="/private/tmp/claude-501/-Users-pop7-Library-CloudStorage-OneDrive-MonsterConnectCo--Ltd-Lecture-KOSEN69---software-security/e6d6556f-17de-403d-a9a0-cf2f846149b4/scratchpad/pptx2/src/slides/pptx/assets/logo-small.png">    </p:cNvPr>
           <p:cNvPicPr>
             <a:picLocks noChangeAspect="1"/>
           </p:cNvPicPr>
@@ -3182,7 +3538,7 @@
                 <a:ea typeface="Arial" pitchFamily="34" charset="-122"/>
                 <a:cs typeface="Arial" pitchFamily="34" charset="-120"/>
               </a:rPr>
-              <a:t>Validate: allow-list, not block-list</a:t>
+              <a:t>SQLi in one picture — break-out vs. bound value</a:t>
             </a:r>
             <a:endParaRPr lang="en-US" sz="2600" dirty="0"/>
           </a:p>
@@ -3190,43 +3546,14 @@
       </p:sp>
       <p:sp>
         <p:nvSpPr>
-          <p:cNvPr id="5" name="Shape 2"/>
-          <p:cNvSpPr/>
-          <p:nvPr/>
-        </p:nvSpPr>
-        <p:spPr>
-          <a:xfrm>
-            <a:off x="457200" y="1325880"/>
-            <a:ext cx="8229600" cy="1517904"/>
-          </a:xfrm>
-          <a:prstGeom prst="roundRect">
-            <a:avLst>
-              <a:gd name="adj" fmla="val 4819"/>
-            </a:avLst>
-          </a:prstGeom>
-          <a:solidFill>
-            <a:srgbClr val="F1F5F9"/>
-          </a:solidFill>
-          <a:ln/>
-          <a:effectLst>
-            <a:outerShdw sx="100000" sy="100000" kx="0" ky="0" algn="bl" rotWithShape="0" blurRad="76200" dist="25400" dir="5400000">
-              <a:srgbClr val="000000">
-                <a:alpha val="12000"/>
-              </a:srgbClr>
-            </a:outerShdw>
-          </a:effectLst>
-        </p:spPr>
-      </p:sp>
-      <p:sp>
-        <p:nvSpPr>
-          <p:cNvPr id="6" name="Text 3"/>
-          <p:cNvSpPr/>
-          <p:nvPr/>
-        </p:nvSpPr>
-        <p:spPr>
-          <a:xfrm>
-            <a:off x="731520" y="1435608"/>
-            <a:ext cx="7680960" cy="1298448"/>
+          <p:cNvPr id="5" name="Text 2"/>
+          <p:cNvSpPr/>
+          <p:nvPr/>
+        </p:nvSpPr>
+        <p:spPr>
+          <a:xfrm>
+            <a:off x="548640" y="1325880"/>
+            <a:ext cx="8046720" cy="1645920"/>
           </a:xfrm>
           <a:prstGeom prst="rect">
             <a:avLst/>
@@ -3240,12 +3567,8 @@
           </a:bodyPr>
           <a:lstStyle/>
           <a:p>
-            <a:pPr marL="342900" indent="-342900">
-              <a:spcAft>
-                <a:spcPts val="600"/>
-              </a:spcAft>
-              <a:buSzPct val="100000"/>
-              <a:buChar char="•"/>
+            <a:pPr indent="0" marL="0">
+              <a:buNone/>
             </a:pPr>
             <a:r>
               <a:rPr lang="en-US" sz="1400" dirty="0">
@@ -3256,108 +3579,45 @@
                 <a:ea typeface="Calibri" pitchFamily="34" charset="-122"/>
                 <a:cs typeface="Calibri" pitchFamily="34" charset="-120"/>
               </a:rPr>
-              <a:t>Allow-list (preferred): accept only known-good (e.g. 0–9 for a phone)</a:t>
+              <a:t>See diagram: Three SQL login queries stacked: normal input sits inside the string as data; the injected username alice'-- makes the user's quote close the string and -- comment out the password check so it logs in with no password; and the parameterised version binds alice'-- into a ? placeholder as pure data so the quote and dashes are inert and login fails. (web only)</a:t>
             </a:r>
             <a:endParaRPr lang="en-US" sz="1400" dirty="0"/>
           </a:p>
-          <a:p>
-            <a:pPr marL="342900" indent="-342900">
-              <a:spcAft>
-                <a:spcPts val="600"/>
-              </a:spcAft>
-              <a:buSzPct val="100000"/>
-              <a:buChar char="•"/>
-            </a:pPr>
-            <a:r>
-              <a:rPr lang="en-US" sz="1400" dirty="0">
-                <a:solidFill>
-                  <a:srgbClr val="1F2937"/>
+        </p:txBody>
+      </p:sp>
+      <p:sp>
+        <p:nvSpPr>
+          <p:cNvPr id="6" name="Text 3"/>
+          <p:cNvSpPr/>
+          <p:nvPr/>
+        </p:nvSpPr>
+        <p:spPr>
+          <a:xfrm>
+            <a:off x="457200" y="4800600"/>
+            <a:ext cx="6949440" cy="274320"/>
+          </a:xfrm>
+          <a:prstGeom prst="rect">
+            <a:avLst/>
+          </a:prstGeom>
+          <a:noFill/>
+          <a:ln/>
+        </p:spPr>
+        <p:txBody>
+          <a:bodyPr wrap="square" lIns="0" tIns="0" rIns="0" bIns="0" rtlCol="0" anchor="ctr"/>
+          <a:lstStyle/>
+          <a:p>
+            <a:pPr indent="0" marL="0">
+              <a:buNone/>
+            </a:pPr>
+            <a:r>
+              <a:rPr lang="en-US" sz="900" dirty="0">
+                <a:solidFill>
+                  <a:srgbClr val="64748B"/>
                 </a:solidFill>
                 <a:latin typeface="Calibri" pitchFamily="34" charset="0"/>
                 <a:ea typeface="Calibri" pitchFamily="34" charset="-122"/>
                 <a:cs typeface="Calibri" pitchFamily="34" charset="-120"/>
               </a:rPr>
-              <a:t>Block-list: ban known-bad → bypassed by new payloads</a:t>
-            </a:r>
-            <a:endParaRPr lang="en-US" sz="1400" dirty="0"/>
-          </a:p>
-          <a:p>
-            <a:pPr marL="342900" indent="-342900">
-              <a:spcAft>
-                <a:spcPts val="600"/>
-              </a:spcAft>
-              <a:buSzPct val="100000"/>
-              <a:buChar char="•"/>
-            </a:pPr>
-            <a:r>
-              <a:rPr lang="en-US" sz="1400" dirty="0">
-                <a:solidFill>
-                  <a:srgbClr val="1F2937"/>
-                </a:solidFill>
-                <a:latin typeface="Calibri" pitchFamily="34" charset="0"/>
-                <a:ea typeface="Calibri" pitchFamily="34" charset="-122"/>
-                <a:cs typeface="Calibri" pitchFamily="34" charset="-120"/>
-              </a:rPr>
-              <a:t>Validate type · length · range · format</a:t>
-            </a:r>
-            <a:endParaRPr lang="en-US" sz="1400" dirty="0"/>
-          </a:p>
-          <a:p>
-            <a:pPr marL="342900" indent="-342900">
-              <a:spcAft>
-                <a:spcPts val="600"/>
-              </a:spcAft>
-              <a:buSzPct val="100000"/>
-              <a:buChar char="•"/>
-            </a:pPr>
-            <a:r>
-              <a:rPr lang="en-US" sz="1400" dirty="0">
-                <a:solidFill>
-                  <a:srgbClr val="1F2937"/>
-                </a:solidFill>
-                <a:latin typeface="Calibri" pitchFamily="34" charset="0"/>
-                <a:ea typeface="Calibri" pitchFamily="34" charset="-122"/>
-                <a:cs typeface="Calibri" pitchFamily="34" charset="-120"/>
-              </a:rPr>
-              <a:t>Client-side for UX, server-side for security</a:t>
-            </a:r>
-            <a:endParaRPr lang="en-US" sz="1400" dirty="0"/>
-          </a:p>
-        </p:txBody>
-      </p:sp>
-      <p:sp>
-        <p:nvSpPr>
-          <p:cNvPr id="7" name="Text 4"/>
-          <p:cNvSpPr/>
-          <p:nvPr/>
-        </p:nvSpPr>
-        <p:spPr>
-          <a:xfrm>
-            <a:off x="457200" y="4800600"/>
-            <a:ext cx="6949440" cy="274320"/>
-          </a:xfrm>
-          <a:prstGeom prst="rect">
-            <a:avLst/>
-          </a:prstGeom>
-          <a:noFill/>
-          <a:ln/>
-        </p:spPr>
-        <p:txBody>
-          <a:bodyPr wrap="square" lIns="0" tIns="0" rIns="0" bIns="0" rtlCol="0" anchor="ctr"/>
-          <a:lstStyle/>
-          <a:p>
-            <a:pPr indent="0" marL="0">
-              <a:buNone/>
-            </a:pPr>
-            <a:r>
-              <a:rPr lang="en-US" sz="900" dirty="0">
-                <a:solidFill>
-                  <a:srgbClr val="64748B"/>
-                </a:solidFill>
-                <a:latin typeface="Calibri" pitchFamily="34" charset="0"/>
-                <a:ea typeface="Calibri" pitchFamily="34" charset="-122"/>
-                <a:cs typeface="Calibri" pitchFamily="34" charset="-120"/>
-              </a:rPr>
               <a:t>Software Security · Week 4</a:t>
             </a:r>
             <a:endParaRPr lang="en-US" sz="900" dirty="0"/>
@@ -3366,7 +3626,7 @@
       </p:sp>
       <p:pic>
         <p:nvPicPr>
-          <p:cNvPr id="8" name="Image 1" descr="/Users/pop7/Library/CloudStorage/OneDrive-MonsterConnectCo.,Ltd/Lecture/KOSEN69 - software-security/slides/pptx/assets/logo-small.png">    </p:cNvPr>
+          <p:cNvPr id="7" name="Image 1" descr="/private/tmp/claude-501/-Users-pop7-Library-CloudStorage-OneDrive-MonsterConnectCo--Ltd-Lecture-KOSEN69---software-security/e6d6556f-17de-403d-a9a0-cf2f846149b4/scratchpad/pptx2/src/slides/pptx/assets/logo-small.png">    </p:cNvPr>
           <p:cNvPicPr>
             <a:picLocks noChangeAspect="1"/>
           </p:cNvPicPr>
@@ -3504,7 +3764,7 @@
                 <a:ea typeface="Arial" pitchFamily="34" charset="-122"/>
                 <a:cs typeface="Arial" pitchFamily="34" charset="-120"/>
               </a:rPr>
-              <a:t>Demo / attack surface</a:t>
+              <a:t>Real-world impact</a:t>
             </a:r>
             <a:endParaRPr lang="en-US" sz="2600" dirty="0"/>
           </a:p>
@@ -3519,11 +3779,11 @@
         <p:spPr>
           <a:xfrm>
             <a:off x="457200" y="1325880"/>
-            <a:ext cx="8229600" cy="1920240"/>
+            <a:ext cx="8229600" cy="1719072"/>
           </a:xfrm>
           <a:prstGeom prst="roundRect">
             <a:avLst>
-              <a:gd name="adj" fmla="val 3810"/>
+              <a:gd name="adj" fmla="val 4255"/>
             </a:avLst>
           </a:prstGeom>
           <a:solidFill>
@@ -3548,7 +3808,7 @@
         <p:spPr>
           <a:xfrm>
             <a:off x="731520" y="1435608"/>
-            <a:ext cx="7680960" cy="1700784"/>
+            <a:ext cx="7680960" cy="1499616"/>
           </a:xfrm>
           <a:prstGeom prst="rect">
             <a:avLst/>
@@ -3578,7 +3838,7 @@
                 <a:ea typeface="Calibri" pitchFamily="34" charset="-122"/>
                 <a:cs typeface="Calibri" pitchFamily="34" charset="-120"/>
               </a:rPr>
-              <a:t>Login forms, search boxes, URL params, JSON fields, headers</a:t>
+              <a:t>Equifax (2017): unvalidated HTTP header → Struts RCE (CVE-2017-5638); 147M people, ~$700M settlement</a:t>
             </a:r>
             <a:endParaRPr lang="en-US" sz="1400" dirty="0"/>
           </a:p>
@@ -3599,7 +3859,7 @@
                 <a:ea typeface="Calibri" pitchFamily="34" charset="-122"/>
                 <a:cs typeface="Calibri" pitchFamily="34" charset="-120"/>
               </a:rPr>
-              <a:t>Error messages leak schema → enumeration</a:t>
+              <a:t>Heartland (2008): SQLi into payment systems → 130M+ cards</a:t>
             </a:r>
             <a:endParaRPr lang="en-US" sz="1400" dirty="0"/>
           </a:p>
@@ -3620,7 +3880,7 @@
                 <a:ea typeface="Calibri" pitchFamily="34" charset="-122"/>
                 <a:cs typeface="Calibri" pitchFamily="34" charset="-120"/>
               </a:rPr>
-              <a:t>Today's lab: raw payloads via browser/curl against app.py — no scanner needed to see the mechanism</a:t>
+              <a:t>Bulgaria: data on almost all adults leaked via SQLi</a:t>
             </a:r>
             <a:endParaRPr lang="en-US" sz="1400" dirty="0"/>
           </a:p>
@@ -3641,7 +3901,7 @@
                 <a:ea typeface="Calibri" pitchFamily="34" charset="-122"/>
                 <a:cs typeface="Calibri" pitchFamily="34" charset="-120"/>
               </a:rPr>
-              <a:t>Burp Suite / sqlmap are real-world tools worth knowing (sandbox-only, ethically) — not required for this week's tasks</a:t>
+              <a:t>Impact: data leak/modification, full DB control, DoS, reputation</a:t>
             </a:r>
             <a:endParaRPr lang="en-US" sz="1400" dirty="0"/>
           </a:p>
@@ -3688,7 +3948,7 @@
       </p:sp>
       <p:pic>
         <p:nvPicPr>
-          <p:cNvPr id="8" name="Image 1" descr="/Users/pop7/Library/CloudStorage/OneDrive-MonsterConnectCo.,Ltd/Lecture/KOSEN69 - software-security/slides/pptx/assets/logo-small.png">    </p:cNvPr>
+          <p:cNvPr id="8" name="Image 1" descr="/private/tmp/claude-501/-Users-pop7-Library-CloudStorage-OneDrive-MonsterConnectCo--Ltd-Lecture-KOSEN69---software-security/e6d6556f-17de-403d-a9a0-cf2f846149b4/scratchpad/pptx2/src/slides/pptx/assets/logo-small.png">    </p:cNvPr>
           <p:cNvPicPr>
             <a:picLocks noChangeAspect="1"/>
           </p:cNvPicPr>
@@ -3826,7 +4086,7 @@
                 <a:ea typeface="Arial" pitchFamily="34" charset="-122"/>
                 <a:cs typeface="Arial" pitchFamily="34" charset="-120"/>
               </a:rPr>
-              <a:t>Command injection</a:t>
+              <a:t>Validate: allow-list, not block-list</a:t>
             </a:r>
             <a:endParaRPr lang="en-US" sz="2600" dirty="0"/>
           </a:p>
@@ -3841,96 +4101,11 @@
         <p:spPr>
           <a:xfrm>
             <a:off x="457200" y="1325880"/>
-            <a:ext cx="8229600" cy="713232"/>
+            <a:ext cx="8229600" cy="1517904"/>
           </a:xfrm>
           <a:prstGeom prst="roundRect">
             <a:avLst>
-              <a:gd name="adj" fmla="val 7692"/>
-            </a:avLst>
-          </a:prstGeom>
-          <a:solidFill>
-            <a:srgbClr val="0A1020"/>
-          </a:solidFill>
-          <a:ln w="12700">
-            <a:solidFill>
-              <a:srgbClr val="E8EDF3"/>
-            </a:solidFill>
-            <a:prstDash val="solid"/>
-          </a:ln>
-        </p:spPr>
-      </p:sp>
-      <p:sp>
-        <p:nvSpPr>
-          <p:cNvPr id="6" name="Text 3"/>
-          <p:cNvSpPr/>
-          <p:nvPr/>
-        </p:nvSpPr>
-        <p:spPr>
-          <a:xfrm>
-            <a:off x="640080" y="1399032"/>
-            <a:ext cx="7863840" cy="566928"/>
-          </a:xfrm>
-          <a:prstGeom prst="rect">
-            <a:avLst/>
-          </a:prstGeom>
-          <a:noFill/>
-          <a:ln/>
-        </p:spPr>
-        <p:txBody>
-          <a:bodyPr wrap="square" lIns="0" tIns="0" rIns="0" bIns="0" rtlCol="0" anchor="t">
-            <a:normAutofit/>
-          </a:bodyPr>
-          <a:lstStyle/>
-          <a:p>
-            <a:pPr indent="0" marL="0">
-              <a:buNone/>
-            </a:pPr>
-            <a:r>
-              <a:rPr lang="en-US" sz="1150" dirty="0">
-                <a:solidFill>
-                  <a:srgbClr val="9FE7D6"/>
-                </a:solidFill>
-                <a:latin typeface="Courier New" pitchFamily="34" charset="0"/>
-                <a:ea typeface="Courier New" pitchFamily="34" charset="-122"/>
-                <a:cs typeface="Courier New" pitchFamily="34" charset="-120"/>
-              </a:rPr>
-              <a:t>system("ping -c 1 " . $_GET['host']);   // vulnerable</a:t>
-            </a:r>
-            <a:endParaRPr lang="en-US" sz="1150" dirty="0"/>
-          </a:p>
-          <a:p>
-            <a:pPr indent="0" marL="0">
-              <a:buNone/>
-            </a:pPr>
-            <a:r>
-              <a:rPr lang="en-US" sz="1150" dirty="0">
-                <a:solidFill>
-                  <a:srgbClr val="9FE7D6"/>
-                </a:solidFill>
-                <a:latin typeface="Courier New" pitchFamily="34" charset="0"/>
-                <a:ea typeface="Courier New" pitchFamily="34" charset="-122"/>
-                <a:cs typeface="Courier New" pitchFamily="34" charset="-120"/>
-              </a:rPr>
-              <a:t>// host = 8.8.8.8; cat /etc/passwd</a:t>
-            </a:r>
-            <a:endParaRPr lang="en-US" sz="1150" dirty="0"/>
-          </a:p>
-        </p:txBody>
-      </p:sp>
-      <p:sp>
-        <p:nvSpPr>
-          <p:cNvPr id="7" name="Shape 4"/>
-          <p:cNvSpPr/>
-          <p:nvPr/>
-        </p:nvSpPr>
-        <p:spPr>
-          <a:xfrm>
-            <a:off x="457200" y="2203704"/>
-            <a:ext cx="8229600" cy="896112"/>
-          </a:xfrm>
-          <a:prstGeom prst="roundRect">
-            <a:avLst>
-              <a:gd name="adj" fmla="val 8163"/>
+              <a:gd name="adj" fmla="val 4819"/>
             </a:avLst>
           </a:prstGeom>
           <a:solidFill>
@@ -3948,14 +4123,14 @@
       </p:sp>
       <p:sp>
         <p:nvSpPr>
-          <p:cNvPr id="8" name="Text 5"/>
-          <p:cNvSpPr/>
-          <p:nvPr/>
-        </p:nvSpPr>
-        <p:spPr>
-          <a:xfrm>
-            <a:off x="731520" y="2313432"/>
-            <a:ext cx="7680960" cy="676656"/>
+          <p:cNvPr id="6" name="Text 3"/>
+          <p:cNvSpPr/>
+          <p:nvPr/>
+        </p:nvSpPr>
+        <p:spPr>
+          <a:xfrm>
+            <a:off x="731520" y="1435608"/>
+            <a:ext cx="7680960" cy="1298448"/>
           </a:xfrm>
           <a:prstGeom prst="rect">
             <a:avLst/>
@@ -3985,7 +4160,7 @@
                 <a:ea typeface="Calibri" pitchFamily="34" charset="-122"/>
                 <a:cs typeface="Calibri" pitchFamily="34" charset="-120"/>
               </a:rPr>
-              <a:t>Shell metacharacters: ; | &amp; $() \ &gt;`</a:t>
+              <a:t>Allow-list (preferred): accept only known-good (e.g. 0–9 for a phone)</a:t>
             </a:r>
             <a:endParaRPr lang="en-US" sz="1400" dirty="0"/>
           </a:p>
@@ -4006,45 +4181,87 @@
                 <a:ea typeface="Calibri" pitchFamily="34" charset="-122"/>
                 <a:cs typeface="Calibri" pitchFamily="34" charset="-120"/>
               </a:rPr>
-              <a:t>Leads to RCE — full server compromise</a:t>
+              <a:t>Block-list: ban known-bad → bypassed by new payloads</a:t>
             </a:r>
             <a:endParaRPr lang="en-US" sz="1400" dirty="0"/>
           </a:p>
-        </p:txBody>
-      </p:sp>
-      <p:sp>
-        <p:nvSpPr>
-          <p:cNvPr id="9" name="Text 6"/>
-          <p:cNvSpPr/>
-          <p:nvPr/>
-        </p:nvSpPr>
-        <p:spPr>
-          <a:xfrm>
-            <a:off x="457200" y="4800600"/>
-            <a:ext cx="6949440" cy="274320"/>
-          </a:xfrm>
-          <a:prstGeom prst="rect">
-            <a:avLst/>
-          </a:prstGeom>
-          <a:noFill/>
-          <a:ln/>
-        </p:spPr>
-        <p:txBody>
-          <a:bodyPr wrap="square" lIns="0" tIns="0" rIns="0" bIns="0" rtlCol="0" anchor="ctr"/>
-          <a:lstStyle/>
-          <a:p>
-            <a:pPr indent="0" marL="0">
-              <a:buNone/>
-            </a:pPr>
-            <a:r>
-              <a:rPr lang="en-US" sz="900" dirty="0">
-                <a:solidFill>
-                  <a:srgbClr val="64748B"/>
+          <a:p>
+            <a:pPr marL="342900" indent="-342900">
+              <a:spcAft>
+                <a:spcPts val="600"/>
+              </a:spcAft>
+              <a:buSzPct val="100000"/>
+              <a:buChar char="•"/>
+            </a:pPr>
+            <a:r>
+              <a:rPr lang="en-US" sz="1400" dirty="0">
+                <a:solidFill>
+                  <a:srgbClr val="1F2937"/>
                 </a:solidFill>
                 <a:latin typeface="Calibri" pitchFamily="34" charset="0"/>
                 <a:ea typeface="Calibri" pitchFamily="34" charset="-122"/>
                 <a:cs typeface="Calibri" pitchFamily="34" charset="-120"/>
               </a:rPr>
+              <a:t>Validate type · length · range · format</a:t>
+            </a:r>
+            <a:endParaRPr lang="en-US" sz="1400" dirty="0"/>
+          </a:p>
+          <a:p>
+            <a:pPr marL="342900" indent="-342900">
+              <a:spcAft>
+                <a:spcPts val="600"/>
+              </a:spcAft>
+              <a:buSzPct val="100000"/>
+              <a:buChar char="•"/>
+            </a:pPr>
+            <a:r>
+              <a:rPr lang="en-US" sz="1400" dirty="0">
+                <a:solidFill>
+                  <a:srgbClr val="1F2937"/>
+                </a:solidFill>
+                <a:latin typeface="Calibri" pitchFamily="34" charset="0"/>
+                <a:ea typeface="Calibri" pitchFamily="34" charset="-122"/>
+                <a:cs typeface="Calibri" pitchFamily="34" charset="-120"/>
+              </a:rPr>
+              <a:t>Client-side for UX, server-side for security</a:t>
+            </a:r>
+            <a:endParaRPr lang="en-US" sz="1400" dirty="0"/>
+          </a:p>
+        </p:txBody>
+      </p:sp>
+      <p:sp>
+        <p:nvSpPr>
+          <p:cNvPr id="7" name="Text 4"/>
+          <p:cNvSpPr/>
+          <p:nvPr/>
+        </p:nvSpPr>
+        <p:spPr>
+          <a:xfrm>
+            <a:off x="457200" y="4800600"/>
+            <a:ext cx="6949440" cy="274320"/>
+          </a:xfrm>
+          <a:prstGeom prst="rect">
+            <a:avLst/>
+          </a:prstGeom>
+          <a:noFill/>
+          <a:ln/>
+        </p:spPr>
+        <p:txBody>
+          <a:bodyPr wrap="square" lIns="0" tIns="0" rIns="0" bIns="0" rtlCol="0" anchor="ctr"/>
+          <a:lstStyle/>
+          <a:p>
+            <a:pPr indent="0" marL="0">
+              <a:buNone/>
+            </a:pPr>
+            <a:r>
+              <a:rPr lang="en-US" sz="900" dirty="0">
+                <a:solidFill>
+                  <a:srgbClr val="64748B"/>
+                </a:solidFill>
+                <a:latin typeface="Calibri" pitchFamily="34" charset="0"/>
+                <a:ea typeface="Calibri" pitchFamily="34" charset="-122"/>
+                <a:cs typeface="Calibri" pitchFamily="34" charset="-120"/>
+              </a:rPr>
               <a:t>Software Security · Week 4</a:t>
             </a:r>
             <a:endParaRPr lang="en-US" sz="900" dirty="0"/>
@@ -4053,7 +4270,7 @@
       </p:sp>
       <p:pic>
         <p:nvPicPr>
-          <p:cNvPr id="10" name="Image 1" descr="/Users/pop7/Library/CloudStorage/OneDrive-MonsterConnectCo.,Ltd/Lecture/KOSEN69 - software-security/slides/pptx/assets/logo-small.png">    </p:cNvPr>
+          <p:cNvPr id="8" name="Image 1" descr="/private/tmp/claude-501/-Users-pop7-Library-CloudStorage-OneDrive-MonsterConnectCo--Ltd-Lecture-KOSEN69---software-security/e6d6556f-17de-403d-a9a0-cf2f846149b4/scratchpad/pptx2/src/slides/pptx/assets/logo-small.png">    </p:cNvPr>
           <p:cNvPicPr>
             <a:picLocks noChangeAspect="1"/>
           </p:cNvPicPr>
@@ -4191,7 +4408,7 @@
                 <a:ea typeface="Arial" pitchFamily="34" charset="-122"/>
                 <a:cs typeface="Arial" pitchFamily="34" charset="-120"/>
               </a:rPr>
-              <a:t>Upload → RCE (a classic chain)</a:t>
+              <a:t>Demo / attack surface</a:t>
             </a:r>
             <a:endParaRPr lang="en-US" sz="2600" dirty="0"/>
           </a:p>
@@ -4199,127 +4416,18 @@
       </p:sp>
       <p:sp>
         <p:nvSpPr>
-          <p:cNvPr id="5" name="Text 2"/>
-          <p:cNvSpPr/>
-          <p:nvPr/>
-        </p:nvSpPr>
-        <p:spPr>
-          <a:xfrm>
-            <a:off x="548640" y="1325880"/>
-            <a:ext cx="8046720" cy="548640"/>
-          </a:xfrm>
-          <a:prstGeom prst="rect">
-            <a:avLst/>
-          </a:prstGeom>
-          <a:noFill/>
-          <a:ln/>
-        </p:spPr>
-        <p:txBody>
-          <a:bodyPr wrap="square" lIns="0" tIns="0" rIns="0" bIns="0" rtlCol="0" anchor="t">
-            <a:normAutofit/>
-          </a:bodyPr>
-          <a:lstStyle/>
-          <a:p>
-            <a:pPr indent="0" marL="0">
-              <a:buNone/>
-            </a:pPr>
-            <a:r>
-              <a:rPr lang="en-US" sz="1400" dirty="0">
-                <a:solidFill>
-                  <a:srgbClr val="1F2937"/>
-                </a:solidFill>
-                <a:latin typeface="Calibri" pitchFamily="34" charset="0"/>
-                <a:ea typeface="Calibri" pitchFamily="34" charset="-122"/>
-                <a:cs typeface="Calibri" pitchFamily="34" charset="-120"/>
-              </a:rPr>
-              <a:t>The classic chain, attacker uploads shell.php:</a:t>
-            </a:r>
-            <a:endParaRPr lang="en-US" sz="1400" dirty="0"/>
-          </a:p>
-        </p:txBody>
-      </p:sp>
-      <p:sp>
-        <p:nvSpPr>
-          <p:cNvPr id="6" name="Shape 3"/>
-          <p:cNvSpPr/>
-          <p:nvPr/>
-        </p:nvSpPr>
-        <p:spPr>
-          <a:xfrm>
-            <a:off x="457200" y="1965960"/>
-            <a:ext cx="8229600" cy="493776"/>
+          <p:cNvPr id="5" name="Shape 2"/>
+          <p:cNvSpPr/>
+          <p:nvPr/>
+        </p:nvSpPr>
+        <p:spPr>
+          <a:xfrm>
+            <a:off x="457200" y="1325880"/>
+            <a:ext cx="8229600" cy="1920240"/>
           </a:xfrm>
           <a:prstGeom prst="roundRect">
             <a:avLst>
-              <a:gd name="adj" fmla="val 11111"/>
-            </a:avLst>
-          </a:prstGeom>
-          <a:solidFill>
-            <a:srgbClr val="0A1020"/>
-          </a:solidFill>
-          <a:ln w="12700">
-            <a:solidFill>
-              <a:srgbClr val="E8EDF3"/>
-            </a:solidFill>
-            <a:prstDash val="solid"/>
-          </a:ln>
-        </p:spPr>
-      </p:sp>
-      <p:sp>
-        <p:nvSpPr>
-          <p:cNvPr id="7" name="Text 4"/>
-          <p:cNvSpPr/>
-          <p:nvPr/>
-        </p:nvSpPr>
-        <p:spPr>
-          <a:xfrm>
-            <a:off x="640080" y="2039112"/>
-            <a:ext cx="7863840" cy="347472"/>
-          </a:xfrm>
-          <a:prstGeom prst="rect">
-            <a:avLst/>
-          </a:prstGeom>
-          <a:noFill/>
-          <a:ln/>
-        </p:spPr>
-        <p:txBody>
-          <a:bodyPr wrap="square" lIns="0" tIns="0" rIns="0" bIns="0" rtlCol="0" anchor="t">
-            <a:normAutofit/>
-          </a:bodyPr>
-          <a:lstStyle/>
-          <a:p>
-            <a:pPr indent="0" marL="0">
-              <a:buNone/>
-            </a:pPr>
-            <a:r>
-              <a:rPr lang="en-US" sz="1150" dirty="0">
-                <a:solidFill>
-                  <a:srgbClr val="9FE7D6"/>
-                </a:solidFill>
-                <a:latin typeface="Courier New" pitchFamily="34" charset="0"/>
-                <a:ea typeface="Courier New" pitchFamily="34" charset="-122"/>
-                <a:cs typeface="Courier New" pitchFamily="34" charset="-120"/>
-              </a:rPr>
-              <a:t>&lt;?php system($_GET['cmd']); ?&gt;</a:t>
-            </a:r>
-            <a:endParaRPr lang="en-US" sz="1150" dirty="0"/>
-          </a:p>
-        </p:txBody>
-      </p:sp>
-      <p:sp>
-        <p:nvSpPr>
-          <p:cNvPr id="8" name="Shape 5"/>
-          <p:cNvSpPr/>
-          <p:nvPr/>
-        </p:nvSpPr>
-        <p:spPr>
-          <a:xfrm>
-            <a:off x="457200" y="2624328"/>
-            <a:ext cx="8229600" cy="1901952"/>
-          </a:xfrm>
-          <a:prstGeom prst="roundRect">
-            <a:avLst>
-              <a:gd name="adj" fmla="val 3846"/>
+              <a:gd name="adj" fmla="val 3810"/>
             </a:avLst>
           </a:prstGeom>
           <a:solidFill>
@@ -4337,14 +4445,14 @@
       </p:sp>
       <p:sp>
         <p:nvSpPr>
-          <p:cNvPr id="9" name="Text 6"/>
-          <p:cNvSpPr/>
-          <p:nvPr/>
-        </p:nvSpPr>
-        <p:spPr>
-          <a:xfrm>
-            <a:off x="731520" y="2734056"/>
-            <a:ext cx="7680960" cy="1682496"/>
+          <p:cNvPr id="6" name="Text 3"/>
+          <p:cNvSpPr/>
+          <p:nvPr/>
+        </p:nvSpPr>
+        <p:spPr>
+          <a:xfrm>
+            <a:off x="731520" y="1435608"/>
+            <a:ext cx="7680960" cy="1700784"/>
           </a:xfrm>
           <a:prstGeom prst="rect">
             <a:avLst/>
@@ -4374,7 +4482,7 @@
                 <a:ea typeface="Calibri" pitchFamily="34" charset="-122"/>
                 <a:cs typeface="Calibri" pitchFamily="34" charset="-120"/>
               </a:rPr>
-              <a:t>If the upload dir is web-served and PHP-executable: .../uploads/shell.php?cmd=ls%20-l → RCE</a:t>
+              <a:t>Login forms, search boxes, URL params, JSON fields, headers</a:t>
             </a:r>
             <a:endParaRPr lang="en-US" sz="1400" dirty="0"/>
           </a:p>
@@ -4395,45 +4503,87 @@
                 <a:ea typeface="Calibri" pitchFamily="34" charset="-122"/>
                 <a:cs typeface="Calibri" pitchFamily="34" charset="-120"/>
               </a:rPr>
-              <a:t>This week's lab stops one step earlier: CWE-434 unrestricted upload — the app accepts any file type/extension, but the upload directory is not served or executed. Your task: explain which missing control would complete the chain (type check, extension allow-list, storage outside web root, no-exec) — not demonstrate a live shell</a:t>
+              <a:t>Error messages leak schema → enumeration</a:t>
             </a:r>
             <a:endParaRPr lang="en-US" sz="1400" dirty="0"/>
           </a:p>
-        </p:txBody>
-      </p:sp>
-      <p:sp>
-        <p:nvSpPr>
-          <p:cNvPr id="10" name="Text 7"/>
-          <p:cNvSpPr/>
-          <p:nvPr/>
-        </p:nvSpPr>
-        <p:spPr>
-          <a:xfrm>
-            <a:off x="457200" y="4800600"/>
-            <a:ext cx="6949440" cy="274320"/>
-          </a:xfrm>
-          <a:prstGeom prst="rect">
-            <a:avLst/>
-          </a:prstGeom>
-          <a:noFill/>
-          <a:ln/>
-        </p:spPr>
-        <p:txBody>
-          <a:bodyPr wrap="square" lIns="0" tIns="0" rIns="0" bIns="0" rtlCol="0" anchor="ctr"/>
-          <a:lstStyle/>
-          <a:p>
-            <a:pPr indent="0" marL="0">
-              <a:buNone/>
-            </a:pPr>
-            <a:r>
-              <a:rPr lang="en-US" sz="900" dirty="0">
-                <a:solidFill>
-                  <a:srgbClr val="64748B"/>
+          <a:p>
+            <a:pPr marL="342900" indent="-342900">
+              <a:spcAft>
+                <a:spcPts val="600"/>
+              </a:spcAft>
+              <a:buSzPct val="100000"/>
+              <a:buChar char="•"/>
+            </a:pPr>
+            <a:r>
+              <a:rPr lang="en-US" sz="1400" dirty="0">
+                <a:solidFill>
+                  <a:srgbClr val="1F2937"/>
                 </a:solidFill>
                 <a:latin typeface="Calibri" pitchFamily="34" charset="0"/>
                 <a:ea typeface="Calibri" pitchFamily="34" charset="-122"/>
                 <a:cs typeface="Calibri" pitchFamily="34" charset="-120"/>
               </a:rPr>
+              <a:t>Today's lab: raw payloads via browser/curl against app.py — no scanner needed to see the mechanism</a:t>
+            </a:r>
+            <a:endParaRPr lang="en-US" sz="1400" dirty="0"/>
+          </a:p>
+          <a:p>
+            <a:pPr marL="342900" indent="-342900">
+              <a:spcAft>
+                <a:spcPts val="600"/>
+              </a:spcAft>
+              <a:buSzPct val="100000"/>
+              <a:buChar char="•"/>
+            </a:pPr>
+            <a:r>
+              <a:rPr lang="en-US" sz="1400" dirty="0">
+                <a:solidFill>
+                  <a:srgbClr val="1F2937"/>
+                </a:solidFill>
+                <a:latin typeface="Calibri" pitchFamily="34" charset="0"/>
+                <a:ea typeface="Calibri" pitchFamily="34" charset="-122"/>
+                <a:cs typeface="Calibri" pitchFamily="34" charset="-120"/>
+              </a:rPr>
+              <a:t>Burp Suite / sqlmap are real-world tools worth knowing (sandbox-only, ethically) — not required for this week's tasks</a:t>
+            </a:r>
+            <a:endParaRPr lang="en-US" sz="1400" dirty="0"/>
+          </a:p>
+        </p:txBody>
+      </p:sp>
+      <p:sp>
+        <p:nvSpPr>
+          <p:cNvPr id="7" name="Text 4"/>
+          <p:cNvSpPr/>
+          <p:nvPr/>
+        </p:nvSpPr>
+        <p:spPr>
+          <a:xfrm>
+            <a:off x="457200" y="4800600"/>
+            <a:ext cx="6949440" cy="274320"/>
+          </a:xfrm>
+          <a:prstGeom prst="rect">
+            <a:avLst/>
+          </a:prstGeom>
+          <a:noFill/>
+          <a:ln/>
+        </p:spPr>
+        <p:txBody>
+          <a:bodyPr wrap="square" lIns="0" tIns="0" rIns="0" bIns="0" rtlCol="0" anchor="ctr"/>
+          <a:lstStyle/>
+          <a:p>
+            <a:pPr indent="0" marL="0">
+              <a:buNone/>
+            </a:pPr>
+            <a:r>
+              <a:rPr lang="en-US" sz="900" dirty="0">
+                <a:solidFill>
+                  <a:srgbClr val="64748B"/>
+                </a:solidFill>
+                <a:latin typeface="Calibri" pitchFamily="34" charset="0"/>
+                <a:ea typeface="Calibri" pitchFamily="34" charset="-122"/>
+                <a:cs typeface="Calibri" pitchFamily="34" charset="-120"/>
+              </a:rPr>
               <a:t>Software Security · Week 4</a:t>
             </a:r>
             <a:endParaRPr lang="en-US" sz="900" dirty="0"/>
@@ -4442,7 +4592,7 @@
       </p:sp>
       <p:pic>
         <p:nvPicPr>
-          <p:cNvPr id="11" name="Image 1" descr="/Users/pop7/Library/CloudStorage/OneDrive-MonsterConnectCo.,Ltd/Lecture/KOSEN69 - software-security/slides/pptx/assets/logo-small.png">    </p:cNvPr>
+          <p:cNvPr id="8" name="Image 1" descr="/private/tmp/claude-501/-Users-pop7-Library-CloudStorage-OneDrive-MonsterConnectCo--Ltd-Lecture-KOSEN69---software-security/e6d6556f-17de-403d-a9a0-cf2f846149b4/scratchpad/pptx2/src/slides/pptx/assets/logo-small.png">    </p:cNvPr>
           <p:cNvPicPr>
             <a:picLocks noChangeAspect="1"/>
           </p:cNvPicPr>
@@ -4580,7 +4730,7 @@
                 <a:ea typeface="Arial" pitchFamily="34" charset="-122"/>
                 <a:cs typeface="Arial" pitchFamily="34" charset="-120"/>
               </a:rPr>
-              <a:t>Upload → RCE (a classic chain) (cont.)</a:t>
+              <a:t>Command injection</a:t>
             </a:r>
             <a:endParaRPr lang="en-US" sz="2600" dirty="0"/>
           </a:p>
@@ -4595,11 +4745,96 @@
         <p:spPr>
           <a:xfrm>
             <a:off x="457200" y="1325880"/>
-            <a:ext cx="8229600" cy="786384"/>
+            <a:ext cx="8229600" cy="713232"/>
           </a:xfrm>
           <a:prstGeom prst="roundRect">
             <a:avLst>
-              <a:gd name="adj" fmla="val 9302"/>
+              <a:gd name="adj" fmla="val 7692"/>
+            </a:avLst>
+          </a:prstGeom>
+          <a:solidFill>
+            <a:srgbClr val="0A1020"/>
+          </a:solidFill>
+          <a:ln w="12700">
+            <a:solidFill>
+              <a:srgbClr val="E8EDF3"/>
+            </a:solidFill>
+            <a:prstDash val="solid"/>
+          </a:ln>
+        </p:spPr>
+      </p:sp>
+      <p:sp>
+        <p:nvSpPr>
+          <p:cNvPr id="6" name="Text 3"/>
+          <p:cNvSpPr/>
+          <p:nvPr/>
+        </p:nvSpPr>
+        <p:spPr>
+          <a:xfrm>
+            <a:off x="640080" y="1399032"/>
+            <a:ext cx="7863840" cy="566928"/>
+          </a:xfrm>
+          <a:prstGeom prst="rect">
+            <a:avLst/>
+          </a:prstGeom>
+          <a:noFill/>
+          <a:ln/>
+        </p:spPr>
+        <p:txBody>
+          <a:bodyPr wrap="square" lIns="0" tIns="0" rIns="0" bIns="0" rtlCol="0" anchor="t">
+            <a:normAutofit/>
+          </a:bodyPr>
+          <a:lstStyle/>
+          <a:p>
+            <a:pPr indent="0" marL="0">
+              <a:buNone/>
+            </a:pPr>
+            <a:r>
+              <a:rPr lang="en-US" sz="1150" dirty="0">
+                <a:solidFill>
+                  <a:srgbClr val="9FE7D6"/>
+                </a:solidFill>
+                <a:latin typeface="Courier New" pitchFamily="34" charset="0"/>
+                <a:ea typeface="Courier New" pitchFamily="34" charset="-122"/>
+                <a:cs typeface="Courier New" pitchFamily="34" charset="-120"/>
+              </a:rPr>
+              <a:t>system("ping -c 1 " . $_GET['host']);   // vulnerable</a:t>
+            </a:r>
+            <a:endParaRPr lang="en-US" sz="1150" dirty="0"/>
+          </a:p>
+          <a:p>
+            <a:pPr indent="0" marL="0">
+              <a:buNone/>
+            </a:pPr>
+            <a:r>
+              <a:rPr lang="en-US" sz="1150" dirty="0">
+                <a:solidFill>
+                  <a:srgbClr val="9FE7D6"/>
+                </a:solidFill>
+                <a:latin typeface="Courier New" pitchFamily="34" charset="0"/>
+                <a:ea typeface="Courier New" pitchFamily="34" charset="-122"/>
+                <a:cs typeface="Courier New" pitchFamily="34" charset="-120"/>
+              </a:rPr>
+              <a:t>// host = 8.8.8.8; cat /etc/passwd</a:t>
+            </a:r>
+            <a:endParaRPr lang="en-US" sz="1150" dirty="0"/>
+          </a:p>
+        </p:txBody>
+      </p:sp>
+      <p:sp>
+        <p:nvSpPr>
+          <p:cNvPr id="7" name="Shape 4"/>
+          <p:cNvSpPr/>
+          <p:nvPr/>
+        </p:nvSpPr>
+        <p:spPr>
+          <a:xfrm>
+            <a:off x="457200" y="2203704"/>
+            <a:ext cx="8229600" cy="896112"/>
+          </a:xfrm>
+          <a:prstGeom prst="roundRect">
+            <a:avLst>
+              <a:gd name="adj" fmla="val 8163"/>
             </a:avLst>
           </a:prstGeom>
           <a:solidFill>
@@ -4617,14 +4852,14 @@
       </p:sp>
       <p:sp>
         <p:nvSpPr>
-          <p:cNvPr id="6" name="Text 3"/>
-          <p:cNvSpPr/>
-          <p:nvPr/>
-        </p:nvSpPr>
-        <p:spPr>
-          <a:xfrm>
-            <a:off x="731520" y="1435608"/>
-            <a:ext cx="7680960" cy="566928"/>
+          <p:cNvPr id="8" name="Text 5"/>
+          <p:cNvSpPr/>
+          <p:nvPr/>
+        </p:nvSpPr>
+        <p:spPr>
+          <a:xfrm>
+            <a:off x="731520" y="2313432"/>
+            <a:ext cx="7680960" cy="676656"/>
           </a:xfrm>
           <a:prstGeom prst="rect">
             <a:avLst/>
@@ -4654,45 +4889,66 @@
                 <a:ea typeface="Calibri" pitchFamily="34" charset="-122"/>
                 <a:cs typeface="Calibri" pitchFamily="34" charset="-120"/>
               </a:rPr>
-              <a:t>Fix: validate file type via mime_content_type(), allow-list extensions, store uploads outside web root, no execute</a:t>
+              <a:t>Shell metacharacters: ; | &amp; $() \ &gt;`</a:t>
             </a:r>
             <a:endParaRPr lang="en-US" sz="1400" dirty="0"/>
           </a:p>
-        </p:txBody>
-      </p:sp>
-      <p:sp>
-        <p:nvSpPr>
-          <p:cNvPr id="7" name="Text 4"/>
-          <p:cNvSpPr/>
-          <p:nvPr/>
-        </p:nvSpPr>
-        <p:spPr>
-          <a:xfrm>
-            <a:off x="457200" y="4800600"/>
-            <a:ext cx="6949440" cy="274320"/>
-          </a:xfrm>
-          <a:prstGeom prst="rect">
-            <a:avLst/>
-          </a:prstGeom>
-          <a:noFill/>
-          <a:ln/>
-        </p:spPr>
-        <p:txBody>
-          <a:bodyPr wrap="square" lIns="0" tIns="0" rIns="0" bIns="0" rtlCol="0" anchor="ctr"/>
-          <a:lstStyle/>
-          <a:p>
-            <a:pPr indent="0" marL="0">
-              <a:buNone/>
-            </a:pPr>
-            <a:r>
-              <a:rPr lang="en-US" sz="900" dirty="0">
-                <a:solidFill>
-                  <a:srgbClr val="64748B"/>
+          <a:p>
+            <a:pPr marL="342900" indent="-342900">
+              <a:spcAft>
+                <a:spcPts val="600"/>
+              </a:spcAft>
+              <a:buSzPct val="100000"/>
+              <a:buChar char="•"/>
+            </a:pPr>
+            <a:r>
+              <a:rPr lang="en-US" sz="1400" dirty="0">
+                <a:solidFill>
+                  <a:srgbClr val="1F2937"/>
                 </a:solidFill>
                 <a:latin typeface="Calibri" pitchFamily="34" charset="0"/>
                 <a:ea typeface="Calibri" pitchFamily="34" charset="-122"/>
                 <a:cs typeface="Calibri" pitchFamily="34" charset="-120"/>
               </a:rPr>
+              <a:t>Leads to RCE — full server compromise</a:t>
+            </a:r>
+            <a:endParaRPr lang="en-US" sz="1400" dirty="0"/>
+          </a:p>
+        </p:txBody>
+      </p:sp>
+      <p:sp>
+        <p:nvSpPr>
+          <p:cNvPr id="9" name="Text 6"/>
+          <p:cNvSpPr/>
+          <p:nvPr/>
+        </p:nvSpPr>
+        <p:spPr>
+          <a:xfrm>
+            <a:off x="457200" y="4800600"/>
+            <a:ext cx="6949440" cy="274320"/>
+          </a:xfrm>
+          <a:prstGeom prst="rect">
+            <a:avLst/>
+          </a:prstGeom>
+          <a:noFill/>
+          <a:ln/>
+        </p:spPr>
+        <p:txBody>
+          <a:bodyPr wrap="square" lIns="0" tIns="0" rIns="0" bIns="0" rtlCol="0" anchor="ctr"/>
+          <a:lstStyle/>
+          <a:p>
+            <a:pPr indent="0" marL="0">
+              <a:buNone/>
+            </a:pPr>
+            <a:r>
+              <a:rPr lang="en-US" sz="900" dirty="0">
+                <a:solidFill>
+                  <a:srgbClr val="64748B"/>
+                </a:solidFill>
+                <a:latin typeface="Calibri" pitchFamily="34" charset="0"/>
+                <a:ea typeface="Calibri" pitchFamily="34" charset="-122"/>
+                <a:cs typeface="Calibri" pitchFamily="34" charset="-120"/>
+              </a:rPr>
               <a:t>Software Security · Week 4</a:t>
             </a:r>
             <a:endParaRPr lang="en-US" sz="900" dirty="0"/>
@@ -4701,7 +4957,7 @@
       </p:sp>
       <p:pic>
         <p:nvPicPr>
-          <p:cNvPr id="8" name="Image 1" descr="/Users/pop7/Library/CloudStorage/OneDrive-MonsterConnectCo.,Ltd/Lecture/KOSEN69 - software-security/slides/pptx/assets/logo-small.png">    </p:cNvPr>
+          <p:cNvPr id="10" name="Image 1" descr="/private/tmp/claude-501/-Users-pop7-Library-CloudStorage-OneDrive-MonsterConnectCo--Ltd-Lecture-KOSEN69---software-security/e6d6556f-17de-403d-a9a0-cf2f846149b4/scratchpad/pptx2/src/slides/pptx/assets/logo-small.png">    </p:cNvPr>
           <p:cNvPicPr>
             <a:picLocks noChangeAspect="1"/>
           </p:cNvPicPr>
@@ -4839,7 +5095,7 @@
                 <a:ea typeface="Arial" pitchFamily="34" charset="-122"/>
                 <a:cs typeface="Arial" pitchFamily="34" charset="-120"/>
               </a:rPr>
-              <a:t>CWE mapping</a:t>
+              <a:t>The fix: no shell — pass an argument vector</a:t>
             </a:r>
             <a:endParaRPr lang="en-US" sz="2600" dirty="0"/>
           </a:p>
@@ -4854,11 +5110,136 @@
         <p:spPr>
           <a:xfrm>
             <a:off x="457200" y="1325880"/>
-            <a:ext cx="8229600" cy="1408176"/>
+            <a:ext cx="8229600" cy="1371600"/>
           </a:xfrm>
           <a:prstGeom prst="roundRect">
             <a:avLst>
-              <a:gd name="adj" fmla="val 5195"/>
+              <a:gd name="adj" fmla="val 4000"/>
+            </a:avLst>
+          </a:prstGeom>
+          <a:solidFill>
+            <a:srgbClr val="0A1020"/>
+          </a:solidFill>
+          <a:ln w="12700">
+            <a:solidFill>
+              <a:srgbClr val="E8EDF3"/>
+            </a:solidFill>
+            <a:prstDash val="solid"/>
+          </a:ln>
+        </p:spPr>
+      </p:sp>
+      <p:sp>
+        <p:nvSpPr>
+          <p:cNvPr id="6" name="Text 3"/>
+          <p:cNvSpPr/>
+          <p:nvPr/>
+        </p:nvSpPr>
+        <p:spPr>
+          <a:xfrm>
+            <a:off x="640080" y="1399032"/>
+            <a:ext cx="7863840" cy="1225296"/>
+          </a:xfrm>
+          <a:prstGeom prst="rect">
+            <a:avLst/>
+          </a:prstGeom>
+          <a:noFill/>
+          <a:ln/>
+        </p:spPr>
+        <p:txBody>
+          <a:bodyPr wrap="square" lIns="0" tIns="0" rIns="0" bIns="0" rtlCol="0" anchor="t">
+            <a:normAutofit/>
+          </a:bodyPr>
+          <a:lstStyle/>
+          <a:p>
+            <a:pPr indent="0" marL="0">
+              <a:buNone/>
+            </a:pPr>
+            <a:r>
+              <a:rPr lang="en-US" sz="1150" dirty="0">
+                <a:solidFill>
+                  <a:srgbClr val="9FE7D6"/>
+                </a:solidFill>
+                <a:latin typeface="Courier New" pitchFamily="34" charset="0"/>
+                <a:ea typeface="Courier New" pitchFamily="34" charset="-122"/>
+                <a:cs typeface="Courier New" pitchFamily="34" charset="-120"/>
+              </a:rPr>
+              <a:t># vulnerable: shell=True -&gt; the OS shell parses the whole string</a:t>
+            </a:r>
+            <a:endParaRPr lang="en-US" sz="1150" dirty="0"/>
+          </a:p>
+          <a:p>
+            <a:pPr indent="0" marL="0">
+              <a:buNone/>
+            </a:pPr>
+            <a:r>
+              <a:rPr lang="en-US" sz="1150" dirty="0">
+                <a:solidFill>
+                  <a:srgbClr val="9FE7D6"/>
+                </a:solidFill>
+                <a:latin typeface="Courier New" pitchFamily="34" charset="0"/>
+                <a:ea typeface="Courier New" pitchFamily="34" charset="-122"/>
+                <a:cs typeface="Courier New" pitchFamily="34" charset="-120"/>
+              </a:rPr>
+              <a:t>subprocess.run("ping -c 1 " + host, shell=True)     # host = 8.8.8.8;cat /flag.txt</a:t>
+            </a:r>
+            <a:endParaRPr lang="en-US" sz="1150" dirty="0"/>
+          </a:p>
+          <a:p>
+            <a:pPr indent="0" marL="0">
+              <a:buNone/>
+            </a:pPr>
+            <a:endParaRPr lang="en-US" sz="1150" dirty="0"/>
+          </a:p>
+          <a:p>
+            <a:pPr indent="0" marL="0">
+              <a:buNone/>
+            </a:pPr>
+            <a:r>
+              <a:rPr lang="en-US" sz="1150" dirty="0">
+                <a:solidFill>
+                  <a:srgbClr val="9FE7D6"/>
+                </a:solidFill>
+                <a:latin typeface="Courier New" pitchFamily="34" charset="0"/>
+                <a:ea typeface="Courier New" pitchFamily="34" charset="-122"/>
+                <a:cs typeface="Courier New" pitchFamily="34" charset="-120"/>
+              </a:rPr>
+              <a:t># fixed: shell=False + argument array -&gt; no shell, no metacharacters</a:t>
+            </a:r>
+            <a:endParaRPr lang="en-US" sz="1150" dirty="0"/>
+          </a:p>
+          <a:p>
+            <a:pPr indent="0" marL="0">
+              <a:buNone/>
+            </a:pPr>
+            <a:r>
+              <a:rPr lang="en-US" sz="1150" dirty="0">
+                <a:solidFill>
+                  <a:srgbClr val="9FE7D6"/>
+                </a:solidFill>
+                <a:latin typeface="Courier New" pitchFamily="34" charset="0"/>
+                <a:ea typeface="Courier New" pitchFamily="34" charset="-122"/>
+                <a:cs typeface="Courier New" pitchFamily="34" charset="-120"/>
+              </a:rPr>
+              <a:t>subprocess.run(["ping", "-c", "1", host], shell=False)   # + allow-list host</a:t>
+            </a:r>
+            <a:endParaRPr lang="en-US" sz="1150" dirty="0"/>
+          </a:p>
+        </p:txBody>
+      </p:sp>
+      <p:sp>
+        <p:nvSpPr>
+          <p:cNvPr id="7" name="Shape 4"/>
+          <p:cNvSpPr/>
+          <p:nvPr/>
+        </p:nvSpPr>
+        <p:spPr>
+          <a:xfrm>
+            <a:off x="457200" y="2862072"/>
+            <a:ext cx="8229600" cy="1207008"/>
+          </a:xfrm>
+          <a:prstGeom prst="roundRect">
+            <a:avLst>
+              <a:gd name="adj" fmla="val 6061"/>
             </a:avLst>
           </a:prstGeom>
           <a:solidFill>
@@ -4876,14 +5257,14 @@
       </p:sp>
       <p:sp>
         <p:nvSpPr>
-          <p:cNvPr id="6" name="Text 3"/>
-          <p:cNvSpPr/>
-          <p:nvPr/>
-        </p:nvSpPr>
-        <p:spPr>
-          <a:xfrm>
-            <a:off x="731520" y="1435608"/>
-            <a:ext cx="7680960" cy="1188720"/>
+          <p:cNvPr id="8" name="Text 5"/>
+          <p:cNvSpPr/>
+          <p:nvPr/>
+        </p:nvSpPr>
+        <p:spPr>
+          <a:xfrm>
+            <a:off x="731520" y="2971800"/>
+            <a:ext cx="7680960" cy="987552"/>
           </a:xfrm>
           <a:prstGeom prst="rect">
             <a:avLst/>
@@ -4913,7 +5294,7 @@
                 <a:ea typeface="Calibri" pitchFamily="34" charset="-122"/>
                 <a:cs typeface="Calibri" pitchFamily="34" charset="-120"/>
               </a:rPr>
-              <a:t>CWE-89 — SQL injection</a:t>
+              <a:t>shell=True hands your string to /bin/sh, which reads ; | $() as syntax</a:t>
             </a:r>
             <a:endParaRPr lang="en-US" sz="1400" dirty="0"/>
           </a:p>
@@ -4934,7 +5315,7 @@
                 <a:ea typeface="Calibri" pitchFamily="34" charset="-122"/>
                 <a:cs typeface="Calibri" pitchFamily="34" charset="-120"/>
               </a:rPr>
-              <a:t>CWE-78 — OS command injection (CWE-77 is its general parent — cite CWE-78, the specific one)</a:t>
+              <a:t>An arg vector runs ping directly — host is one literal argument, never parsed</a:t>
             </a:r>
             <a:endParaRPr lang="en-US" sz="1400" dirty="0"/>
           </a:p>
@@ -4955,7 +5336,7 @@
                 <a:ea typeface="Calibri" pitchFamily="34" charset="-122"/>
                 <a:cs typeface="Calibri" pitchFamily="34" charset="-120"/>
               </a:rPr>
-              <a:t>CWE-434 — unrestricted upload of a dangerous file type</a:t>
+              <a:t>8.8.8.8;cat /flag.txt becomes one impossible "hostname"; the ; is inert</a:t>
             </a:r>
             <a:endParaRPr lang="en-US" sz="1400" dirty="0"/>
           </a:p>
@@ -4963,7 +5344,7 @@
       </p:sp>
       <p:sp>
         <p:nvSpPr>
-          <p:cNvPr id="7" name="Text 4"/>
+          <p:cNvPr id="9" name="Text 6"/>
           <p:cNvSpPr/>
           <p:nvPr/>
         </p:nvSpPr>
@@ -5002,7 +5383,7 @@
       </p:sp>
       <p:pic>
         <p:nvPicPr>
-          <p:cNvPr id="8" name="Image 1" descr="/Users/pop7/Library/CloudStorage/OneDrive-MonsterConnectCo.,Ltd/Lecture/KOSEN69 - software-security/slides/pptx/assets/logo-small.png">    </p:cNvPr>
+          <p:cNvPr id="10" name="Image 1" descr="/private/tmp/claude-501/-Users-pop7-Library-CloudStorage-OneDrive-MonsterConnectCo--Ltd-Lecture-KOSEN69---software-security/e6d6556f-17de-403d-a9a0-cf2f846149b4/scratchpad/pptx2/src/slides/pptx/assets/logo-small.png">    </p:cNvPr>
           <p:cNvPicPr>
             <a:picLocks noChangeAspect="1"/>
           </p:cNvPicPr>
@@ -5140,7 +5521,7 @@
                 <a:ea typeface="Arial" pitchFamily="34" charset="-122"/>
                 <a:cs typeface="Arial" pitchFamily="34" charset="-120"/>
               </a:rPr>
-              <a:t>Defenses that actually work</a:t>
+              <a:t>Upload → RCE (a classic chain)</a:t>
             </a:r>
             <a:endParaRPr lang="en-US" sz="2600" dirty="0"/>
           </a:p>
@@ -5148,18 +5529,127 @@
       </p:sp>
       <p:sp>
         <p:nvSpPr>
-          <p:cNvPr id="5" name="Shape 2"/>
-          <p:cNvSpPr/>
-          <p:nvPr/>
-        </p:nvSpPr>
-        <p:spPr>
-          <a:xfrm>
-            <a:off x="457200" y="1325880"/>
-            <a:ext cx="8229600" cy="1828800"/>
+          <p:cNvPr id="5" name="Text 2"/>
+          <p:cNvSpPr/>
+          <p:nvPr/>
+        </p:nvSpPr>
+        <p:spPr>
+          <a:xfrm>
+            <a:off x="548640" y="1325880"/>
+            <a:ext cx="8046720" cy="548640"/>
+          </a:xfrm>
+          <a:prstGeom prst="rect">
+            <a:avLst/>
+          </a:prstGeom>
+          <a:noFill/>
+          <a:ln/>
+        </p:spPr>
+        <p:txBody>
+          <a:bodyPr wrap="square" lIns="0" tIns="0" rIns="0" bIns="0" rtlCol="0" anchor="t">
+            <a:normAutofit/>
+          </a:bodyPr>
+          <a:lstStyle/>
+          <a:p>
+            <a:pPr indent="0" marL="0">
+              <a:buNone/>
+            </a:pPr>
+            <a:r>
+              <a:rPr lang="en-US" sz="1400" dirty="0">
+                <a:solidFill>
+                  <a:srgbClr val="1F2937"/>
+                </a:solidFill>
+                <a:latin typeface="Calibri" pitchFamily="34" charset="0"/>
+                <a:ea typeface="Calibri" pitchFamily="34" charset="-122"/>
+                <a:cs typeface="Calibri" pitchFamily="34" charset="-120"/>
+              </a:rPr>
+              <a:t>The classic chain, attacker uploads shell.php:</a:t>
+            </a:r>
+            <a:endParaRPr lang="en-US" sz="1400" dirty="0"/>
+          </a:p>
+        </p:txBody>
+      </p:sp>
+      <p:sp>
+        <p:nvSpPr>
+          <p:cNvPr id="6" name="Shape 3"/>
+          <p:cNvSpPr/>
+          <p:nvPr/>
+        </p:nvSpPr>
+        <p:spPr>
+          <a:xfrm>
+            <a:off x="457200" y="1965960"/>
+            <a:ext cx="8229600" cy="493776"/>
           </a:xfrm>
           <a:prstGeom prst="roundRect">
             <a:avLst>
-              <a:gd name="adj" fmla="val 4000"/>
+              <a:gd name="adj" fmla="val 11111"/>
+            </a:avLst>
+          </a:prstGeom>
+          <a:solidFill>
+            <a:srgbClr val="0A1020"/>
+          </a:solidFill>
+          <a:ln w="12700">
+            <a:solidFill>
+              <a:srgbClr val="E8EDF3"/>
+            </a:solidFill>
+            <a:prstDash val="solid"/>
+          </a:ln>
+        </p:spPr>
+      </p:sp>
+      <p:sp>
+        <p:nvSpPr>
+          <p:cNvPr id="7" name="Text 4"/>
+          <p:cNvSpPr/>
+          <p:nvPr/>
+        </p:nvSpPr>
+        <p:spPr>
+          <a:xfrm>
+            <a:off x="640080" y="2039112"/>
+            <a:ext cx="7863840" cy="347472"/>
+          </a:xfrm>
+          <a:prstGeom prst="rect">
+            <a:avLst/>
+          </a:prstGeom>
+          <a:noFill/>
+          <a:ln/>
+        </p:spPr>
+        <p:txBody>
+          <a:bodyPr wrap="square" lIns="0" tIns="0" rIns="0" bIns="0" rtlCol="0" anchor="t">
+            <a:normAutofit/>
+          </a:bodyPr>
+          <a:lstStyle/>
+          <a:p>
+            <a:pPr indent="0" marL="0">
+              <a:buNone/>
+            </a:pPr>
+            <a:r>
+              <a:rPr lang="en-US" sz="1150" dirty="0">
+                <a:solidFill>
+                  <a:srgbClr val="9FE7D6"/>
+                </a:solidFill>
+                <a:latin typeface="Courier New" pitchFamily="34" charset="0"/>
+                <a:ea typeface="Courier New" pitchFamily="34" charset="-122"/>
+                <a:cs typeface="Courier New" pitchFamily="34" charset="-120"/>
+              </a:rPr>
+              <a:t>&lt;?php system($_GET['cmd']); ?&gt;</a:t>
+            </a:r>
+            <a:endParaRPr lang="en-US" sz="1150" dirty="0"/>
+          </a:p>
+        </p:txBody>
+      </p:sp>
+      <p:sp>
+        <p:nvSpPr>
+          <p:cNvPr id="8" name="Shape 5"/>
+          <p:cNvSpPr/>
+          <p:nvPr/>
+        </p:nvSpPr>
+        <p:spPr>
+          <a:xfrm>
+            <a:off x="457200" y="2624328"/>
+            <a:ext cx="8229600" cy="1901952"/>
+          </a:xfrm>
+          <a:prstGeom prst="roundRect">
+            <a:avLst>
+              <a:gd name="adj" fmla="val 3846"/>
             </a:avLst>
           </a:prstGeom>
           <a:solidFill>
@@ -5177,14 +5667,14 @@
       </p:sp>
       <p:sp>
         <p:nvSpPr>
-          <p:cNvPr id="6" name="Text 3"/>
-          <p:cNvSpPr/>
-          <p:nvPr/>
-        </p:nvSpPr>
-        <p:spPr>
-          <a:xfrm>
-            <a:off x="731520" y="1435608"/>
-            <a:ext cx="7680960" cy="1609344"/>
+          <p:cNvPr id="9" name="Text 6"/>
+          <p:cNvSpPr/>
+          <p:nvPr/>
+        </p:nvSpPr>
+        <p:spPr>
+          <a:xfrm>
+            <a:off x="731520" y="2734056"/>
+            <a:ext cx="7680960" cy="1682496"/>
           </a:xfrm>
           <a:prstGeom prst="rect">
             <a:avLst/>
@@ -5214,7 +5704,7 @@
                 <a:ea typeface="Calibri" pitchFamily="34" charset="-122"/>
                 <a:cs typeface="Calibri" pitchFamily="34" charset="-120"/>
               </a:rPr>
-              <a:t>Parameterized queries / prepared statements (the fix for SQLi)</a:t>
+              <a:t>If the upload dir is web-served and PHP-executable: .../uploads/shell.php?cmd=ls%20-l → RCE</a:t>
             </a:r>
             <a:endParaRPr lang="en-US" sz="1400" dirty="0"/>
           </a:p>
@@ -5235,108 +5725,45 @@
                 <a:ea typeface="Calibri" pitchFamily="34" charset="-122"/>
                 <a:cs typeface="Calibri" pitchFamily="34" charset="-120"/>
               </a:rPr>
-              <a:t>ORM with bound parameters</a:t>
+              <a:t>This week's lab stops one step earlier: CWE-434 unrestricted upload — the app accepts any file type/extension, but the upload directory is not served or executed. Your task: explain which missing control would complete the chain (type check, extension allow-list, storage outside web root, no-exec) — not demonstrate a live shell</a:t>
             </a:r>
             <a:endParaRPr lang="en-US" sz="1400" dirty="0"/>
           </a:p>
-          <a:p>
-            <a:pPr marL="342900" indent="-342900">
-              <a:spcAft>
-                <a:spcPts val="600"/>
-              </a:spcAft>
-              <a:buSzPct val="100000"/>
-              <a:buChar char="•"/>
-            </a:pPr>
-            <a:r>
-              <a:rPr lang="en-US" sz="1400" dirty="0">
-                <a:solidFill>
-                  <a:srgbClr val="1F2937"/>
+        </p:txBody>
+      </p:sp>
+      <p:sp>
+        <p:nvSpPr>
+          <p:cNvPr id="10" name="Text 7"/>
+          <p:cNvSpPr/>
+          <p:nvPr/>
+        </p:nvSpPr>
+        <p:spPr>
+          <a:xfrm>
+            <a:off x="457200" y="4800600"/>
+            <a:ext cx="6949440" cy="274320"/>
+          </a:xfrm>
+          <a:prstGeom prst="rect">
+            <a:avLst/>
+          </a:prstGeom>
+          <a:noFill/>
+          <a:ln/>
+        </p:spPr>
+        <p:txBody>
+          <a:bodyPr wrap="square" lIns="0" tIns="0" rIns="0" bIns="0" rtlCol="0" anchor="ctr"/>
+          <a:lstStyle/>
+          <a:p>
+            <a:pPr indent="0" marL="0">
+              <a:buNone/>
+            </a:pPr>
+            <a:r>
+              <a:rPr lang="en-US" sz="900" dirty="0">
+                <a:solidFill>
+                  <a:srgbClr val="64748B"/>
                 </a:solidFill>
                 <a:latin typeface="Calibri" pitchFamily="34" charset="0"/>
                 <a:ea typeface="Calibri" pitchFamily="34" charset="-122"/>
                 <a:cs typeface="Calibri" pitchFamily="34" charset="-120"/>
               </a:rPr>
-              <a:t>Allow-list input validation (type, length, format)</a:t>
-            </a:r>
-            <a:endParaRPr lang="en-US" sz="1400" dirty="0"/>
-          </a:p>
-          <a:p>
-            <a:pPr marL="342900" indent="-342900">
-              <a:spcAft>
-                <a:spcPts val="600"/>
-              </a:spcAft>
-              <a:buSzPct val="100000"/>
-              <a:buChar char="•"/>
-            </a:pPr>
-            <a:r>
-              <a:rPr lang="en-US" sz="1400" dirty="0">
-                <a:solidFill>
-                  <a:srgbClr val="1F2937"/>
-                </a:solidFill>
-                <a:latin typeface="Calibri" pitchFamily="34" charset="0"/>
-                <a:ea typeface="Calibri" pitchFamily="34" charset="-122"/>
-                <a:cs typeface="Calibri" pitchFamily="34" charset="-120"/>
-              </a:rPr>
-              <a:t>Avoid shells: use exec APIs with arg arrays, not string concat</a:t>
-            </a:r>
-            <a:endParaRPr lang="en-US" sz="1400" dirty="0"/>
-          </a:p>
-          <a:p>
-            <a:pPr marL="342900" indent="-342900">
-              <a:spcAft>
-                <a:spcPts val="600"/>
-              </a:spcAft>
-              <a:buSzPct val="100000"/>
-              <a:buChar char="•"/>
-            </a:pPr>
-            <a:r>
-              <a:rPr lang="en-US" sz="1400" dirty="0">
-                <a:solidFill>
-                  <a:srgbClr val="1F2937"/>
-                </a:solidFill>
-                <a:latin typeface="Calibri" pitchFamily="34" charset="0"/>
-                <a:ea typeface="Calibri" pitchFamily="34" charset="-122"/>
-                <a:cs typeface="Calibri" pitchFamily="34" charset="-120"/>
-              </a:rPr>
-              <a:t>Least-privilege DB accounts</a:t>
-            </a:r>
-            <a:endParaRPr lang="en-US" sz="1400" dirty="0"/>
-          </a:p>
-        </p:txBody>
-      </p:sp>
-      <p:sp>
-        <p:nvSpPr>
-          <p:cNvPr id="7" name="Text 4"/>
-          <p:cNvSpPr/>
-          <p:nvPr/>
-        </p:nvSpPr>
-        <p:spPr>
-          <a:xfrm>
-            <a:off x="457200" y="4800600"/>
-            <a:ext cx="6949440" cy="274320"/>
-          </a:xfrm>
-          <a:prstGeom prst="rect">
-            <a:avLst/>
-          </a:prstGeom>
-          <a:noFill/>
-          <a:ln/>
-        </p:spPr>
-        <p:txBody>
-          <a:bodyPr wrap="square" lIns="0" tIns="0" rIns="0" bIns="0" rtlCol="0" anchor="ctr"/>
-          <a:lstStyle/>
-          <a:p>
-            <a:pPr indent="0" marL="0">
-              <a:buNone/>
-            </a:pPr>
-            <a:r>
-              <a:rPr lang="en-US" sz="900" dirty="0">
-                <a:solidFill>
-                  <a:srgbClr val="64748B"/>
-                </a:solidFill>
-                <a:latin typeface="Calibri" pitchFamily="34" charset="0"/>
-                <a:ea typeface="Calibri" pitchFamily="34" charset="-122"/>
-                <a:cs typeface="Calibri" pitchFamily="34" charset="-120"/>
-              </a:rPr>
               <a:t>Software Security · Week 4</a:t>
             </a:r>
             <a:endParaRPr lang="en-US" sz="900" dirty="0"/>
@@ -5345,7 +5772,7 @@
       </p:sp>
       <p:pic>
         <p:nvPicPr>
-          <p:cNvPr id="8" name="Image 1" descr="/Users/pop7/Library/CloudStorage/OneDrive-MonsterConnectCo.,Ltd/Lecture/KOSEN69 - software-security/slides/pptx/assets/logo-small.png">    </p:cNvPr>
+          <p:cNvPr id="11" name="Image 1" descr="/private/tmp/claude-501/-Users-pop7-Library-CloudStorage-OneDrive-MonsterConnectCo--Ltd-Lecture-KOSEN69---software-security/e6d6556f-17de-403d-a9a0-cf2f846149b4/scratchpad/pptx2/src/slides/pptx/assets/logo-small.png">    </p:cNvPr>
           <p:cNvPicPr>
             <a:picLocks noChangeAspect="1"/>
           </p:cNvPicPr>
@@ -5483,7 +5910,7 @@
                 <a:ea typeface="Arial" pitchFamily="34" charset="-122"/>
                 <a:cs typeface="Arial" pitchFamily="34" charset="-120"/>
               </a:rPr>
-              <a:t>One value, three interpreters</a:t>
+              <a:t>Upload → RCE (a classic chain) (cont.)</a:t>
             </a:r>
             <a:endParaRPr lang="en-US" sz="2600" dirty="0"/>
           </a:p>
@@ -5491,14 +5918,43 @@
       </p:sp>
       <p:sp>
         <p:nvSpPr>
-          <p:cNvPr id="5" name="Text 2"/>
-          <p:cNvSpPr/>
-          <p:nvPr/>
-        </p:nvSpPr>
-        <p:spPr>
-          <a:xfrm>
-            <a:off x="548640" y="1325880"/>
-            <a:ext cx="8046720" cy="1645920"/>
+          <p:cNvPr id="5" name="Shape 2"/>
+          <p:cNvSpPr/>
+          <p:nvPr/>
+        </p:nvSpPr>
+        <p:spPr>
+          <a:xfrm>
+            <a:off x="457200" y="1325880"/>
+            <a:ext cx="8229600" cy="786384"/>
+          </a:xfrm>
+          <a:prstGeom prst="roundRect">
+            <a:avLst>
+              <a:gd name="adj" fmla="val 9302"/>
+            </a:avLst>
+          </a:prstGeom>
+          <a:solidFill>
+            <a:srgbClr val="F1F5F9"/>
+          </a:solidFill>
+          <a:ln/>
+          <a:effectLst>
+            <a:outerShdw sx="100000" sy="100000" kx="0" ky="0" algn="bl" rotWithShape="0" blurRad="76200" dist="25400" dir="5400000">
+              <a:srgbClr val="000000">
+                <a:alpha val="12000"/>
+              </a:srgbClr>
+            </a:outerShdw>
+          </a:effectLst>
+        </p:spPr>
+      </p:sp>
+      <p:sp>
+        <p:nvSpPr>
+          <p:cNvPr id="6" name="Text 3"/>
+          <p:cNvSpPr/>
+          <p:nvPr/>
+        </p:nvSpPr>
+        <p:spPr>
+          <a:xfrm>
+            <a:off x="731520" y="1435608"/>
+            <a:ext cx="7680960" cy="566928"/>
           </a:xfrm>
           <a:prstGeom prst="rect">
             <a:avLst/>
@@ -5512,8 +5968,12 @@
           </a:bodyPr>
           <a:lstStyle/>
           <a:p>
-            <a:pPr indent="0" marL="0">
-              <a:buNone/>
+            <a:pPr marL="342900" indent="-342900">
+              <a:spcAft>
+                <a:spcPts val="600"/>
+              </a:spcAft>
+              <a:buSzPct val="100000"/>
+              <a:buChar char="•"/>
             </a:pPr>
             <a:r>
               <a:rPr lang="en-US" sz="1400" dirty="0">
@@ -5524,7 +5984,7 @@
                 <a:ea typeface="Calibri" pitchFamily="34" charset="-122"/>
                 <a:cs typeface="Calibri" pitchFamily="34" charset="-120"/>
               </a:rPr>
-              <a:t>See diagram: One untrusted request value reaches three different interpreters — SQL (CWE-89, fixed by a parameterized query), the OS shell (CWE-78, fixed by an argument vector with shell=False), and a filesystem write (CWE-434, fixed by an extension allow-list). One input filter cannot guard three grammars — the fix belongs at the sink that parses the value, not at the source. (web only)</a:t>
+              <a:t>Fix: validate file type via mime_content_type(), allow-list extensions, store uploads outside web root, no execute</a:t>
             </a:r>
             <a:endParaRPr lang="en-US" sz="1400" dirty="0"/>
           </a:p>
@@ -5532,7 +5992,7 @@
       </p:sp>
       <p:sp>
         <p:nvSpPr>
-          <p:cNvPr id="6" name="Text 3"/>
+          <p:cNvPr id="7" name="Text 4"/>
           <p:cNvSpPr/>
           <p:nvPr/>
         </p:nvSpPr>
@@ -5571,7 +6031,7 @@
       </p:sp>
       <p:pic>
         <p:nvPicPr>
-          <p:cNvPr id="7" name="Image 1" descr="/Users/pop7/Library/CloudStorage/OneDrive-MonsterConnectCo.,Ltd/Lecture/KOSEN69 - software-security/slides/pptx/assets/logo-small.png">    </p:cNvPr>
+          <p:cNvPr id="8" name="Image 1" descr="/private/tmp/claude-501/-Users-pop7-Library-CloudStorage-OneDrive-MonsterConnectCo--Ltd-Lecture-KOSEN69---software-security/e6d6556f-17de-403d-a9a0-cf2f846149b4/scratchpad/pptx2/src/slides/pptx/assets/logo-small.png">    </p:cNvPr>
           <p:cNvPicPr>
             <a:picLocks noChangeAspect="1"/>
           </p:cNvPicPr>
@@ -5709,7 +6169,7 @@
                 <a:ea typeface="Arial" pitchFamily="34" charset="-122"/>
                 <a:cs typeface="Arial" pitchFamily="34" charset="-120"/>
               </a:rPr>
-              <a:t>⚔️ Game — SQLi Boss Fight</a:t>
+              <a:t>CWE mapping</a:t>
             </a:r>
             <a:endParaRPr lang="en-US" sz="2600" dirty="0"/>
           </a:p>
@@ -5717,14 +6177,43 @@
       </p:sp>
       <p:sp>
         <p:nvSpPr>
-          <p:cNvPr id="5" name="Text 2"/>
-          <p:cNvSpPr/>
-          <p:nvPr/>
-        </p:nvSpPr>
-        <p:spPr>
-          <a:xfrm>
-            <a:off x="548640" y="1325880"/>
-            <a:ext cx="8046720" cy="548640"/>
+          <p:cNvPr id="5" name="Shape 2"/>
+          <p:cNvSpPr/>
+          <p:nvPr/>
+        </p:nvSpPr>
+        <p:spPr>
+          <a:xfrm>
+            <a:off x="457200" y="1325880"/>
+            <a:ext cx="8229600" cy="1408176"/>
+          </a:xfrm>
+          <a:prstGeom prst="roundRect">
+            <a:avLst>
+              <a:gd name="adj" fmla="val 5195"/>
+            </a:avLst>
+          </a:prstGeom>
+          <a:solidFill>
+            <a:srgbClr val="F1F5F9"/>
+          </a:solidFill>
+          <a:ln/>
+          <a:effectLst>
+            <a:outerShdw sx="100000" sy="100000" kx="0" ky="0" algn="bl" rotWithShape="0" blurRad="76200" dist="25400" dir="5400000">
+              <a:srgbClr val="000000">
+                <a:alpha val="12000"/>
+              </a:srgbClr>
+            </a:outerShdw>
+          </a:effectLst>
+        </p:spPr>
+      </p:sp>
+      <p:sp>
+        <p:nvSpPr>
+          <p:cNvPr id="6" name="Text 3"/>
+          <p:cNvSpPr/>
+          <p:nvPr/>
+        </p:nvSpPr>
+        <p:spPr>
+          <a:xfrm>
+            <a:off x="731520" y="1435608"/>
+            <a:ext cx="7680960" cy="1188720"/>
           </a:xfrm>
           <a:prstGeom prst="rect">
             <a:avLst/>
@@ -5738,8 +6227,12 @@
           </a:bodyPr>
           <a:lstStyle/>
           <a:p>
-            <a:pPr indent="0" marL="0">
-              <a:buNone/>
+            <a:pPr marL="342900" indent="-342900">
+              <a:spcAft>
+                <a:spcPts val="600"/>
+              </a:spcAft>
+              <a:buSzPct val="100000"/>
+              <a:buChar char="•"/>
             </a:pPr>
             <a:r>
               <a:rPr lang="en-US" sz="1400" dirty="0">
@@ -5750,99 +6243,20 @@
                 <a:ea typeface="Calibri" pitchFamily="34" charset="-122"/>
                 <a:cs typeface="Calibri" pitchFamily="34" charset="-120"/>
               </a:rPr>
-              <a:t>Four hits against this week's own app — no filters to bypass, the app has none:</a:t>
+              <a:t>CWE-89 — SQL injection</a:t>
             </a:r>
             <a:endParaRPr lang="en-US" sz="1400" dirty="0"/>
           </a:p>
-        </p:txBody>
-      </p:sp>
-      <p:sp>
-        <p:nvSpPr>
-          <p:cNvPr id="6" name="Shape 3"/>
-          <p:cNvSpPr/>
-          <p:nvPr/>
-        </p:nvSpPr>
-        <p:spPr>
-          <a:xfrm>
-            <a:off x="502920" y="1965960"/>
-            <a:ext cx="384048" cy="384048"/>
-          </a:xfrm>
-          <a:prstGeom prst="ellipse">
-            <a:avLst/>
-          </a:prstGeom>
-          <a:solidFill>
-            <a:srgbClr val="E35205"/>
-          </a:solidFill>
-          <a:ln/>
-        </p:spPr>
-      </p:sp>
-      <p:sp>
-        <p:nvSpPr>
-          <p:cNvPr id="7" name="Text 4"/>
-          <p:cNvSpPr/>
-          <p:nvPr/>
-        </p:nvSpPr>
-        <p:spPr>
-          <a:xfrm>
-            <a:off x="502920" y="1965960"/>
-            <a:ext cx="384048" cy="384048"/>
-          </a:xfrm>
-          <a:prstGeom prst="rect">
-            <a:avLst/>
-          </a:prstGeom>
-          <a:noFill/>
-          <a:ln/>
-        </p:spPr>
-        <p:txBody>
-          <a:bodyPr wrap="square" lIns="0" tIns="0" rIns="0" bIns="0" rtlCol="0" anchor="ctr"/>
-          <a:lstStyle/>
-          <a:p>
-            <a:pPr algn="ctr" indent="0" marL="0">
-              <a:buNone/>
-            </a:pPr>
-            <a:r>
-              <a:rPr lang="en-US" sz="1500" b="1" dirty="0">
-                <a:solidFill>
-                  <a:srgbClr val="0E1726"/>
-                </a:solidFill>
-                <a:latin typeface="Arial" pitchFamily="34" charset="0"/>
-                <a:ea typeface="Arial" pitchFamily="34" charset="-122"/>
-                <a:cs typeface="Arial" pitchFamily="34" charset="-120"/>
-              </a:rPr>
-              <a:t>1</a:t>
-            </a:r>
-            <a:endParaRPr lang="en-US" sz="1500" dirty="0"/>
-          </a:p>
-        </p:txBody>
-      </p:sp>
-      <p:sp>
-        <p:nvSpPr>
-          <p:cNvPr id="8" name="Text 5"/>
-          <p:cNvSpPr/>
-          <p:nvPr/>
-        </p:nvSpPr>
-        <p:spPr>
-          <a:xfrm>
-            <a:off x="1051560" y="1965960"/>
-            <a:ext cx="7589520" cy="402336"/>
-          </a:xfrm>
-          <a:prstGeom prst="rect">
-            <a:avLst/>
-          </a:prstGeom>
-          <a:noFill/>
-          <a:ln/>
-        </p:spPr>
-        <p:txBody>
-          <a:bodyPr wrap="square" lIns="0" tIns="0" rIns="0" bIns="0" rtlCol="0" anchor="ctr">
-            <a:normAutofit/>
-          </a:bodyPr>
-          <a:lstStyle/>
-          <a:p>
-            <a:pPr indent="0" marL="0">
-              <a:buNone/>
-            </a:pPr>
-            <a:r>
-              <a:rPr lang="en-US" sz="1350" dirty="0">
+          <a:p>
+            <a:pPr marL="342900" indent="-342900">
+              <a:spcAft>
+                <a:spcPts val="600"/>
+              </a:spcAft>
+              <a:buSzPct val="100000"/>
+              <a:buChar char="•"/>
+            </a:pPr>
+            <a:r>
+              <a:rPr lang="en-US" sz="1400" dirty="0">
                 <a:solidFill>
                   <a:srgbClr val="1F2937"/>
                 </a:solidFill>
@@ -5850,99 +6264,20 @@
                 <a:ea typeface="Calibri" pitchFamily="34" charset="-122"/>
                 <a:cs typeface="Calibri" pitchFamily="34" charset="-120"/>
               </a:rPr>
-              <a:t>Auth bypass (alice'--)</a:t>
-            </a:r>
-            <a:endParaRPr lang="en-US" sz="1350" dirty="0"/>
-          </a:p>
-        </p:txBody>
-      </p:sp>
-      <p:sp>
-        <p:nvSpPr>
-          <p:cNvPr id="9" name="Shape 6"/>
-          <p:cNvSpPr/>
-          <p:nvPr/>
-        </p:nvSpPr>
-        <p:spPr>
-          <a:xfrm>
-            <a:off x="502920" y="2441448"/>
-            <a:ext cx="384048" cy="384048"/>
-          </a:xfrm>
-          <a:prstGeom prst="ellipse">
-            <a:avLst/>
-          </a:prstGeom>
-          <a:solidFill>
-            <a:srgbClr val="E35205"/>
-          </a:solidFill>
-          <a:ln/>
-        </p:spPr>
-      </p:sp>
-      <p:sp>
-        <p:nvSpPr>
-          <p:cNvPr id="10" name="Text 7"/>
-          <p:cNvSpPr/>
-          <p:nvPr/>
-        </p:nvSpPr>
-        <p:spPr>
-          <a:xfrm>
-            <a:off x="502920" y="2441448"/>
-            <a:ext cx="384048" cy="384048"/>
-          </a:xfrm>
-          <a:prstGeom prst="rect">
-            <a:avLst/>
-          </a:prstGeom>
-          <a:noFill/>
-          <a:ln/>
-        </p:spPr>
-        <p:txBody>
-          <a:bodyPr wrap="square" lIns="0" tIns="0" rIns="0" bIns="0" rtlCol="0" anchor="ctr"/>
-          <a:lstStyle/>
-          <a:p>
-            <a:pPr algn="ctr" indent="0" marL="0">
-              <a:buNone/>
-            </a:pPr>
-            <a:r>
-              <a:rPr lang="en-US" sz="1500" b="1" dirty="0">
-                <a:solidFill>
-                  <a:srgbClr val="0E1726"/>
-                </a:solidFill>
-                <a:latin typeface="Arial" pitchFamily="34" charset="0"/>
-                <a:ea typeface="Arial" pitchFamily="34" charset="-122"/>
-                <a:cs typeface="Arial" pitchFamily="34" charset="-120"/>
-              </a:rPr>
-              <a:t>2</a:t>
-            </a:r>
-            <a:endParaRPr lang="en-US" sz="1500" dirty="0"/>
-          </a:p>
-        </p:txBody>
-      </p:sp>
-      <p:sp>
-        <p:nvSpPr>
-          <p:cNvPr id="11" name="Text 8"/>
-          <p:cNvSpPr/>
-          <p:nvPr/>
-        </p:nvSpPr>
-        <p:spPr>
-          <a:xfrm>
-            <a:off x="1051560" y="2441448"/>
-            <a:ext cx="7589520" cy="402336"/>
-          </a:xfrm>
-          <a:prstGeom prst="rect">
-            <a:avLst/>
-          </a:prstGeom>
-          <a:noFill/>
-          <a:ln/>
-        </p:spPr>
-        <p:txBody>
-          <a:bodyPr wrap="square" lIns="0" tIns="0" rIns="0" bIns="0" rtlCol="0" anchor="ctr">
-            <a:normAutofit/>
-          </a:bodyPr>
-          <a:lstStyle/>
-          <a:p>
-            <a:pPr indent="0" marL="0">
-              <a:buNone/>
-            </a:pPr>
-            <a:r>
-              <a:rPr lang="en-US" sz="1350" dirty="0">
+              <a:t>CWE-78 — OS command injection (CWE-77 is its general parent — cite CWE-78, the specific one)</a:t>
+            </a:r>
+            <a:endParaRPr lang="en-US" sz="1400" dirty="0"/>
+          </a:p>
+          <a:p>
+            <a:pPr marL="342900" indent="-342900">
+              <a:spcAft>
+                <a:spcPts val="600"/>
+              </a:spcAft>
+              <a:buSzPct val="100000"/>
+              <a:buChar char="•"/>
+            </a:pPr>
+            <a:r>
+              <a:rPr lang="en-US" sz="1400" dirty="0">
                 <a:solidFill>
                   <a:srgbClr val="1F2937"/>
                 </a:solidFill>
@@ -5950,42 +6285,22 @@
                 <a:ea typeface="Calibri" pitchFamily="34" charset="-122"/>
                 <a:cs typeface="Calibri" pitchFamily="34" charset="-120"/>
               </a:rPr>
-              <a:t>UNION dump (steal all credentials)</a:t>
-            </a:r>
-            <a:endParaRPr lang="en-US" sz="1350" dirty="0"/>
-          </a:p>
-        </p:txBody>
-      </p:sp>
-      <p:sp>
-        <p:nvSpPr>
-          <p:cNvPr id="12" name="Shape 9"/>
-          <p:cNvSpPr/>
-          <p:nvPr/>
-        </p:nvSpPr>
-        <p:spPr>
-          <a:xfrm>
-            <a:off x="502920" y="2916936"/>
-            <a:ext cx="384048" cy="384048"/>
-          </a:xfrm>
-          <a:prstGeom prst="ellipse">
-            <a:avLst/>
-          </a:prstGeom>
-          <a:solidFill>
-            <a:srgbClr val="E35205"/>
-          </a:solidFill>
-          <a:ln/>
-        </p:spPr>
-      </p:sp>
-      <p:sp>
-        <p:nvSpPr>
-          <p:cNvPr id="13" name="Text 10"/>
-          <p:cNvSpPr/>
-          <p:nvPr/>
-        </p:nvSpPr>
-        <p:spPr>
-          <a:xfrm>
-            <a:off x="502920" y="2916936"/>
-            <a:ext cx="384048" cy="384048"/>
+              <a:t>CWE-434 — unrestricted upload of a dangerous file type</a:t>
+            </a:r>
+            <a:endParaRPr lang="en-US" sz="1400" dirty="0"/>
+          </a:p>
+        </p:txBody>
+      </p:sp>
+      <p:sp>
+        <p:nvSpPr>
+          <p:cNvPr id="7" name="Text 4"/>
+          <p:cNvSpPr/>
+          <p:nvPr/>
+        </p:nvSpPr>
+        <p:spPr>
+          <a:xfrm>
+            <a:off x="457200" y="4800600"/>
+            <a:ext cx="6949440" cy="274320"/>
           </a:xfrm>
           <a:prstGeom prst="rect">
             <a:avLst/>
@@ -5995,200 +6310,20 @@
         </p:spPr>
         <p:txBody>
           <a:bodyPr wrap="square" lIns="0" tIns="0" rIns="0" bIns="0" rtlCol="0" anchor="ctr"/>
-          <a:lstStyle/>
-          <a:p>
-            <a:pPr algn="ctr" indent="0" marL="0">
-              <a:buNone/>
-            </a:pPr>
-            <a:r>
-              <a:rPr lang="en-US" sz="1500" b="1" dirty="0">
-                <a:solidFill>
-                  <a:srgbClr val="0E1726"/>
-                </a:solidFill>
-                <a:latin typeface="Arial" pitchFamily="34" charset="0"/>
-                <a:ea typeface="Arial" pitchFamily="34" charset="-122"/>
-                <a:cs typeface="Arial" pitchFamily="34" charset="-120"/>
-              </a:rPr>
-              <a:t>3</a:t>
-            </a:r>
-            <a:endParaRPr lang="en-US" sz="1500" dirty="0"/>
-          </a:p>
-        </p:txBody>
-      </p:sp>
-      <p:sp>
-        <p:nvSpPr>
-          <p:cNvPr id="14" name="Text 11"/>
-          <p:cNvSpPr/>
-          <p:nvPr/>
-        </p:nvSpPr>
-        <p:spPr>
-          <a:xfrm>
-            <a:off x="1051560" y="2916936"/>
-            <a:ext cx="7589520" cy="402336"/>
-          </a:xfrm>
-          <a:prstGeom prst="rect">
-            <a:avLst/>
-          </a:prstGeom>
-          <a:noFill/>
-          <a:ln/>
-        </p:spPr>
-        <p:txBody>
-          <a:bodyPr wrap="square" lIns="0" tIns="0" rIns="0" bIns="0" rtlCol="0" anchor="ctr">
-            <a:normAutofit/>
-          </a:bodyPr>
           <a:lstStyle/>
           <a:p>
             <a:pPr indent="0" marL="0">
               <a:buNone/>
             </a:pPr>
             <a:r>
-              <a:rPr lang="en-US" sz="1350" dirty="0">
-                <a:solidFill>
-                  <a:srgbClr val="1F2937"/>
+              <a:rPr lang="en-US" sz="900" dirty="0">
+                <a:solidFill>
+                  <a:srgbClr val="64748B"/>
                 </a:solidFill>
                 <a:latin typeface="Calibri" pitchFamily="34" charset="0"/>
                 <a:ea typeface="Calibri" pitchFamily="34" charset="-122"/>
                 <a:cs typeface="Calibri" pitchFamily="34" charset="-120"/>
               </a:rPr>
-              <a:t>Command injection</a:t>
-            </a:r>
-            <a:endParaRPr lang="en-US" sz="1350" dirty="0"/>
-          </a:p>
-        </p:txBody>
-      </p:sp>
-      <p:sp>
-        <p:nvSpPr>
-          <p:cNvPr id="15" name="Shape 12"/>
-          <p:cNvSpPr/>
-          <p:nvPr/>
-        </p:nvSpPr>
-        <p:spPr>
-          <a:xfrm>
-            <a:off x="502920" y="3392424"/>
-            <a:ext cx="384048" cy="384048"/>
-          </a:xfrm>
-          <a:prstGeom prst="ellipse">
-            <a:avLst/>
-          </a:prstGeom>
-          <a:solidFill>
-            <a:srgbClr val="E35205"/>
-          </a:solidFill>
-          <a:ln/>
-        </p:spPr>
-      </p:sp>
-      <p:sp>
-        <p:nvSpPr>
-          <p:cNvPr id="16" name="Text 13"/>
-          <p:cNvSpPr/>
-          <p:nvPr/>
-        </p:nvSpPr>
-        <p:spPr>
-          <a:xfrm>
-            <a:off x="502920" y="3392424"/>
-            <a:ext cx="384048" cy="384048"/>
-          </a:xfrm>
-          <a:prstGeom prst="rect">
-            <a:avLst/>
-          </a:prstGeom>
-          <a:noFill/>
-          <a:ln/>
-        </p:spPr>
-        <p:txBody>
-          <a:bodyPr wrap="square" lIns="0" tIns="0" rIns="0" bIns="0" rtlCol="0" anchor="ctr"/>
-          <a:lstStyle/>
-          <a:p>
-            <a:pPr algn="ctr" indent="0" marL="0">
-              <a:buNone/>
-            </a:pPr>
-            <a:r>
-              <a:rPr lang="en-US" sz="1500" b="1" dirty="0">
-                <a:solidFill>
-                  <a:srgbClr val="0E1726"/>
-                </a:solidFill>
-                <a:latin typeface="Arial" pitchFamily="34" charset="0"/>
-                <a:ea typeface="Arial" pitchFamily="34" charset="-122"/>
-                <a:cs typeface="Arial" pitchFamily="34" charset="-120"/>
-              </a:rPr>
-              <a:t>4</a:t>
-            </a:r>
-            <a:endParaRPr lang="en-US" sz="1500" dirty="0"/>
-          </a:p>
-        </p:txBody>
-      </p:sp>
-      <p:sp>
-        <p:nvSpPr>
-          <p:cNvPr id="17" name="Text 14"/>
-          <p:cNvSpPr/>
-          <p:nvPr/>
-        </p:nvSpPr>
-        <p:spPr>
-          <a:xfrm>
-            <a:off x="1051560" y="3392424"/>
-            <a:ext cx="7589520" cy="402336"/>
-          </a:xfrm>
-          <a:prstGeom prst="rect">
-            <a:avLst/>
-          </a:prstGeom>
-          <a:noFill/>
-          <a:ln/>
-        </p:spPr>
-        <p:txBody>
-          <a:bodyPr wrap="square" lIns="0" tIns="0" rIns="0" bIns="0" rtlCol="0" anchor="ctr">
-            <a:normAutofit/>
-          </a:bodyPr>
-          <a:lstStyle/>
-          <a:p>
-            <a:pPr indent="0" marL="0">
-              <a:buNone/>
-            </a:pPr>
-            <a:r>
-              <a:rPr lang="en-US" sz="1350" dirty="0">
-                <a:solidFill>
-                  <a:srgbClr val="1F2937"/>
-                </a:solidFill>
-                <a:latin typeface="Calibri" pitchFamily="34" charset="0"/>
-                <a:ea typeface="Calibri" pitchFamily="34" charset="-122"/>
-                <a:cs typeface="Calibri" pitchFamily="34" charset="-120"/>
-              </a:rPr>
-              <a:t>Unrestricted upload</a:t>
-            </a:r>
-            <a:endParaRPr lang="en-US" sz="1350" dirty="0"/>
-          </a:p>
-        </p:txBody>
-      </p:sp>
-      <p:sp>
-        <p:nvSpPr>
-          <p:cNvPr id="18" name="Text 15"/>
-          <p:cNvSpPr/>
-          <p:nvPr/>
-        </p:nvSpPr>
-        <p:spPr>
-          <a:xfrm>
-            <a:off x="457200" y="4800600"/>
-            <a:ext cx="6949440" cy="274320"/>
-          </a:xfrm>
-          <a:prstGeom prst="rect">
-            <a:avLst/>
-          </a:prstGeom>
-          <a:noFill/>
-          <a:ln/>
-        </p:spPr>
-        <p:txBody>
-          <a:bodyPr wrap="square" lIns="0" tIns="0" rIns="0" bIns="0" rtlCol="0" anchor="ctr"/>
-          <a:lstStyle/>
-          <a:p>
-            <a:pPr indent="0" marL="0">
-              <a:buNone/>
-            </a:pPr>
-            <a:r>
-              <a:rPr lang="en-US" sz="900" dirty="0">
-                <a:solidFill>
-                  <a:srgbClr val="64748B"/>
-                </a:solidFill>
-                <a:latin typeface="Calibri" pitchFamily="34" charset="0"/>
-                <a:ea typeface="Calibri" pitchFamily="34" charset="-122"/>
-                <a:cs typeface="Calibri" pitchFamily="34" charset="-120"/>
-              </a:rPr>
               <a:t>Software Security · Week 4</a:t>
             </a:r>
             <a:endParaRPr lang="en-US" sz="900" dirty="0"/>
@@ -6197,7 +6332,7 @@
       </p:sp>
       <p:pic>
         <p:nvPicPr>
-          <p:cNvPr id="19" name="Image 1" descr="/Users/pop7/Library/CloudStorage/OneDrive-MonsterConnectCo.,Ltd/Lecture/KOSEN69 - software-security/slides/pptx/assets/logo-small.png">    </p:cNvPr>
+          <p:cNvPr id="8" name="Image 1" descr="/private/tmp/claude-501/-Users-pop7-Library-CloudStorage-OneDrive-MonsterConnectCo--Ltd-Lecture-KOSEN69---software-security/e6d6556f-17de-403d-a9a0-cf2f846149b4/scratchpad/pptx2/src/slides/pptx/assets/logo-small.png">    </p:cNvPr>
           <p:cNvPicPr>
             <a:picLocks noChangeAspect="1"/>
           </p:cNvPicPr>
@@ -6335,7 +6470,7 @@
                 <a:ea typeface="Arial" pitchFamily="34" charset="-122"/>
                 <a:cs typeface="Arial" pitchFamily="34" charset="-120"/>
               </a:rPr>
-              <a:t>⚔️ Game — SQLi Boss Fight (cont.)</a:t>
+              <a:t>Defenses that actually work</a:t>
             </a:r>
             <a:endParaRPr lang="en-US" sz="2600" dirty="0"/>
           </a:p>
@@ -6349,16 +6484,25 @@
         </p:nvSpPr>
         <p:spPr>
           <a:xfrm>
-            <a:off x="502920" y="1325880"/>
-            <a:ext cx="384048" cy="384048"/>
-          </a:xfrm>
-          <a:prstGeom prst="ellipse">
-            <a:avLst/>
+            <a:off x="457200" y="1325880"/>
+            <a:ext cx="8229600" cy="1828800"/>
+          </a:xfrm>
+          <a:prstGeom prst="roundRect">
+            <a:avLst>
+              <a:gd name="adj" fmla="val 4000"/>
+            </a:avLst>
           </a:prstGeom>
           <a:solidFill>
-            <a:srgbClr val="E35205"/>
+            <a:srgbClr val="F1F5F9"/>
           </a:solidFill>
           <a:ln/>
+          <a:effectLst>
+            <a:outerShdw sx="100000" sy="100000" kx="0" ky="0" algn="bl" rotWithShape="0" blurRad="76200" dist="25400" dir="5400000">
+              <a:srgbClr val="000000">
+                <a:alpha val="12000"/>
+              </a:srgbClr>
+            </a:outerShdw>
+          </a:effectLst>
         </p:spPr>
       </p:sp>
       <p:sp>
@@ -6369,8 +6513,8 @@
         </p:nvSpPr>
         <p:spPr>
           <a:xfrm>
-            <a:off x="502920" y="1325880"/>
-            <a:ext cx="384048" cy="384048"/>
+            <a:off x="731520" y="1435608"/>
+            <a:ext cx="7680960" cy="1609344"/>
           </a:xfrm>
           <a:prstGeom prst="rect">
             <a:avLst/>
@@ -6379,55 +6523,20 @@
           <a:ln/>
         </p:spPr>
         <p:txBody>
-          <a:bodyPr wrap="square" lIns="0" tIns="0" rIns="0" bIns="0" rtlCol="0" anchor="ctr"/>
-          <a:lstStyle/>
-          <a:p>
-            <a:pPr algn="ctr" indent="0" marL="0">
-              <a:buNone/>
-            </a:pPr>
-            <a:r>
-              <a:rPr lang="en-US" sz="1500" b="1" dirty="0">
-                <a:solidFill>
-                  <a:srgbClr val="0E1726"/>
-                </a:solidFill>
-                <a:latin typeface="Arial" pitchFamily="34" charset="0"/>
-                <a:ea typeface="Arial" pitchFamily="34" charset="-122"/>
-                <a:cs typeface="Arial" pitchFamily="34" charset="-120"/>
-              </a:rPr>
-              <a:t>5</a:t>
-            </a:r>
-            <a:endParaRPr lang="en-US" sz="1500" dirty="0"/>
-          </a:p>
-        </p:txBody>
-      </p:sp>
-      <p:sp>
-        <p:nvSpPr>
-          <p:cNvPr id="7" name="Text 4"/>
-          <p:cNvSpPr/>
-          <p:nvPr/>
-        </p:nvSpPr>
-        <p:spPr>
-          <a:xfrm>
-            <a:off x="1051560" y="1325880"/>
-            <a:ext cx="7589520" cy="658368"/>
-          </a:xfrm>
-          <a:prstGeom prst="rect">
-            <a:avLst/>
-          </a:prstGeom>
-          <a:noFill/>
-          <a:ln/>
-        </p:spPr>
-        <p:txBody>
-          <a:bodyPr wrap="square" lIns="0" tIns="0" rIns="0" bIns="0" rtlCol="0" anchor="ctr">
+          <a:bodyPr wrap="square" lIns="0" tIns="0" rIns="0" bIns="0" rtlCol="0" anchor="t">
             <a:normAutofit/>
           </a:bodyPr>
           <a:lstStyle/>
           <a:p>
-            <a:pPr indent="0" marL="0">
-              <a:buNone/>
-            </a:pPr>
-            <a:r>
-              <a:rPr lang="en-US" sz="1350" dirty="0">
+            <a:pPr marL="342900" indent="-342900">
+              <a:spcAft>
+                <a:spcPts val="600"/>
+              </a:spcAft>
+              <a:buSzPct val="100000"/>
+              <a:buChar char="•"/>
+            </a:pPr>
+            <a:r>
+              <a:rPr lang="en-US" sz="1400" dirty="0">
                 <a:solidFill>
                   <a:srgbClr val="1F2937"/>
                 </a:solidFill>
@@ -6435,45 +6544,129 @@
                 <a:ea typeface="Calibri" pitchFamily="34" charset="-122"/>
                 <a:cs typeface="Calibri" pitchFamily="34" charset="-120"/>
               </a:rPr>
-              <a:t>Boss defeated: run solution_app.py, prove all four attacks now fail, cite the exact fix line for each</a:t>
-            </a:r>
-            <a:endParaRPr lang="en-US" sz="1350" dirty="0"/>
-          </a:p>
-        </p:txBody>
-      </p:sp>
-      <p:sp>
-        <p:nvSpPr>
-          <p:cNvPr id="8" name="Text 5"/>
-          <p:cNvSpPr/>
-          <p:nvPr/>
-        </p:nvSpPr>
-        <p:spPr>
-          <a:xfrm>
-            <a:off x="457200" y="4800600"/>
-            <a:ext cx="6949440" cy="274320"/>
-          </a:xfrm>
-          <a:prstGeom prst="rect">
-            <a:avLst/>
-          </a:prstGeom>
-          <a:noFill/>
-          <a:ln/>
-        </p:spPr>
-        <p:txBody>
-          <a:bodyPr wrap="square" lIns="0" tIns="0" rIns="0" bIns="0" rtlCol="0" anchor="ctr"/>
-          <a:lstStyle/>
-          <a:p>
-            <a:pPr indent="0" marL="0">
-              <a:buNone/>
-            </a:pPr>
-            <a:r>
-              <a:rPr lang="en-US" sz="900" dirty="0">
-                <a:solidFill>
-                  <a:srgbClr val="64748B"/>
+              <a:t>Parameterized queries / prepared statements (the fix for SQLi)</a:t>
+            </a:r>
+            <a:endParaRPr lang="en-US" sz="1400" dirty="0"/>
+          </a:p>
+          <a:p>
+            <a:pPr marL="342900" indent="-342900">
+              <a:spcAft>
+                <a:spcPts val="600"/>
+              </a:spcAft>
+              <a:buSzPct val="100000"/>
+              <a:buChar char="•"/>
+            </a:pPr>
+            <a:r>
+              <a:rPr lang="en-US" sz="1400" dirty="0">
+                <a:solidFill>
+                  <a:srgbClr val="1F2937"/>
                 </a:solidFill>
                 <a:latin typeface="Calibri" pitchFamily="34" charset="0"/>
                 <a:ea typeface="Calibri" pitchFamily="34" charset="-122"/>
                 <a:cs typeface="Calibri" pitchFamily="34" charset="-120"/>
               </a:rPr>
+              <a:t>ORM with bound parameters</a:t>
+            </a:r>
+            <a:endParaRPr lang="en-US" sz="1400" dirty="0"/>
+          </a:p>
+          <a:p>
+            <a:pPr marL="342900" indent="-342900">
+              <a:spcAft>
+                <a:spcPts val="600"/>
+              </a:spcAft>
+              <a:buSzPct val="100000"/>
+              <a:buChar char="•"/>
+            </a:pPr>
+            <a:r>
+              <a:rPr lang="en-US" sz="1400" dirty="0">
+                <a:solidFill>
+                  <a:srgbClr val="1F2937"/>
+                </a:solidFill>
+                <a:latin typeface="Calibri" pitchFamily="34" charset="0"/>
+                <a:ea typeface="Calibri" pitchFamily="34" charset="-122"/>
+                <a:cs typeface="Calibri" pitchFamily="34" charset="-120"/>
+              </a:rPr>
+              <a:t>Allow-list input validation (type, length, format)</a:t>
+            </a:r>
+            <a:endParaRPr lang="en-US" sz="1400" dirty="0"/>
+          </a:p>
+          <a:p>
+            <a:pPr marL="342900" indent="-342900">
+              <a:spcAft>
+                <a:spcPts val="600"/>
+              </a:spcAft>
+              <a:buSzPct val="100000"/>
+              <a:buChar char="•"/>
+            </a:pPr>
+            <a:r>
+              <a:rPr lang="en-US" sz="1400" dirty="0">
+                <a:solidFill>
+                  <a:srgbClr val="1F2937"/>
+                </a:solidFill>
+                <a:latin typeface="Calibri" pitchFamily="34" charset="0"/>
+                <a:ea typeface="Calibri" pitchFamily="34" charset="-122"/>
+                <a:cs typeface="Calibri" pitchFamily="34" charset="-120"/>
+              </a:rPr>
+              <a:t>Avoid shells: use exec APIs with arg arrays, not string concat</a:t>
+            </a:r>
+            <a:endParaRPr lang="en-US" sz="1400" dirty="0"/>
+          </a:p>
+          <a:p>
+            <a:pPr marL="342900" indent="-342900">
+              <a:spcAft>
+                <a:spcPts val="600"/>
+              </a:spcAft>
+              <a:buSzPct val="100000"/>
+              <a:buChar char="•"/>
+            </a:pPr>
+            <a:r>
+              <a:rPr lang="en-US" sz="1400" dirty="0">
+                <a:solidFill>
+                  <a:srgbClr val="1F2937"/>
+                </a:solidFill>
+                <a:latin typeface="Calibri" pitchFamily="34" charset="0"/>
+                <a:ea typeface="Calibri" pitchFamily="34" charset="-122"/>
+                <a:cs typeface="Calibri" pitchFamily="34" charset="-120"/>
+              </a:rPr>
+              <a:t>Least-privilege DB accounts</a:t>
+            </a:r>
+            <a:endParaRPr lang="en-US" sz="1400" dirty="0"/>
+          </a:p>
+        </p:txBody>
+      </p:sp>
+      <p:sp>
+        <p:nvSpPr>
+          <p:cNvPr id="7" name="Text 4"/>
+          <p:cNvSpPr/>
+          <p:nvPr/>
+        </p:nvSpPr>
+        <p:spPr>
+          <a:xfrm>
+            <a:off x="457200" y="4800600"/>
+            <a:ext cx="6949440" cy="274320"/>
+          </a:xfrm>
+          <a:prstGeom prst="rect">
+            <a:avLst/>
+          </a:prstGeom>
+          <a:noFill/>
+          <a:ln/>
+        </p:spPr>
+        <p:txBody>
+          <a:bodyPr wrap="square" lIns="0" tIns="0" rIns="0" bIns="0" rtlCol="0" anchor="ctr"/>
+          <a:lstStyle/>
+          <a:p>
+            <a:pPr indent="0" marL="0">
+              <a:buNone/>
+            </a:pPr>
+            <a:r>
+              <a:rPr lang="en-US" sz="900" dirty="0">
+                <a:solidFill>
+                  <a:srgbClr val="64748B"/>
+                </a:solidFill>
+                <a:latin typeface="Calibri" pitchFamily="34" charset="0"/>
+                <a:ea typeface="Calibri" pitchFamily="34" charset="-122"/>
+                <a:cs typeface="Calibri" pitchFamily="34" charset="-120"/>
+              </a:rPr>
               <a:t>Software Security · Week 4</a:t>
             </a:r>
             <a:endParaRPr lang="en-US" sz="900" dirty="0"/>
@@ -6482,7 +6675,7 @@
       </p:sp>
       <p:pic>
         <p:nvPicPr>
-          <p:cNvPr id="9" name="Image 1" descr="/Users/pop7/Library/CloudStorage/OneDrive-MonsterConnectCo.,Ltd/Lecture/KOSEN69 - software-security/slides/pptx/assets/logo-small.png">    </p:cNvPr>
+          <p:cNvPr id="8" name="Image 1" descr="/private/tmp/claude-501/-Users-pop7-Library-CloudStorage-OneDrive-MonsterConnectCo--Ltd-Lecture-KOSEN69---software-security/e6d6556f-17de-403d-a9a0-cf2f846149b4/scratchpad/pptx2/src/slides/pptx/assets/logo-small.png">    </p:cNvPr>
           <p:cNvPicPr>
             <a:picLocks noChangeAspect="1"/>
           </p:cNvPicPr>
@@ -6799,7 +6992,7 @@
                 <a:ea typeface="Calibri" pitchFamily="34" charset="-122"/>
                 <a:cs typeface="Calibri" pitchFamily="34" charset="-120"/>
               </a:rPr>
-              <a:t>🎮 Game: SQLi Boss Fight</a:t>
+              <a:t>🎮 Game: SQLi Warm-up</a:t>
             </a:r>
             <a:endParaRPr lang="en-US" sz="1400" dirty="0"/>
           </a:p>
@@ -6846,7 +7039,7 @@
       </p:sp>
       <p:pic>
         <p:nvPicPr>
-          <p:cNvPr id="8" name="Image 1" descr="/Users/pop7/Library/CloudStorage/OneDrive-MonsterConnectCo.,Ltd/Lecture/KOSEN69 - software-security/slides/pptx/assets/logo-small.png">    </p:cNvPr>
+          <p:cNvPr id="8" name="Image 1" descr="/private/tmp/claude-501/-Users-pop7-Library-CloudStorage-OneDrive-MonsterConnectCo--Ltd-Lecture-KOSEN69---software-security/e6d6556f-17de-403d-a9a0-cf2f846149b4/scratchpad/pptx2/src/slides/pptx/assets/logo-small.png">    </p:cNvPr>
           <p:cNvPicPr>
             <a:picLocks noChangeAspect="1"/>
           </p:cNvPicPr>
@@ -6984,7 +7177,7 @@
                 <a:ea typeface="Arial" pitchFamily="34" charset="-122"/>
                 <a:cs typeface="Arial" pitchFamily="34" charset="-120"/>
               </a:rPr>
-              <a:t>Lab steps</a:t>
+              <a:t>One value, three interpreters</a:t>
             </a:r>
             <a:endParaRPr lang="en-US" sz="2600" dirty="0"/>
           </a:p>
@@ -6992,36 +7185,14 @@
       </p:sp>
       <p:sp>
         <p:nvSpPr>
-          <p:cNvPr id="5" name="Shape 2"/>
-          <p:cNvSpPr/>
-          <p:nvPr/>
-        </p:nvSpPr>
-        <p:spPr>
-          <a:xfrm>
-            <a:off x="457200" y="1325880"/>
-            <a:ext cx="8229600" cy="822960"/>
-          </a:xfrm>
-          <a:prstGeom prst="roundRect">
-            <a:avLst>
-              <a:gd name="adj" fmla="val 8889"/>
-            </a:avLst>
-          </a:prstGeom>
-          <a:solidFill>
-            <a:srgbClr val="E8EDF3"/>
-          </a:solidFill>
-          <a:ln/>
-        </p:spPr>
-      </p:sp>
-      <p:sp>
-        <p:nvSpPr>
-          <p:cNvPr id="6" name="Text 3"/>
-          <p:cNvSpPr/>
-          <p:nvPr/>
-        </p:nvSpPr>
-        <p:spPr>
-          <a:xfrm>
-            <a:off x="731520" y="1325880"/>
-            <a:ext cx="7680960" cy="822960"/>
+          <p:cNvPr id="5" name="Text 2"/>
+          <p:cNvSpPr/>
+          <p:nvPr/>
+        </p:nvSpPr>
+        <p:spPr>
+          <a:xfrm>
+            <a:off x="548640" y="1325880"/>
+            <a:ext cx="8046720" cy="1645920"/>
           </a:xfrm>
           <a:prstGeom prst="rect">
             <a:avLst/>
@@ -7030,7 +7201,7 @@
           <a:ln/>
         </p:spPr>
         <p:txBody>
-          <a:bodyPr wrap="square" lIns="0" tIns="0" rIns="0" bIns="0" rtlCol="0" anchor="ctr">
+          <a:bodyPr wrap="square" lIns="0" tIns="0" rIns="0" bIns="0" rtlCol="0" anchor="t">
             <a:normAutofit/>
           </a:bodyPr>
           <a:lstStyle/>
@@ -7039,15 +7210,15 @@
               <a:buNone/>
             </a:pPr>
             <a:r>
-              <a:rPr lang="en-US" sz="1400" i="1" dirty="0">
-                <a:solidFill>
-                  <a:srgbClr val="E35205"/>
+              <a:rPr lang="en-US" sz="1400" dirty="0">
+                <a:solidFill>
+                  <a:srgbClr val="1F2937"/>
                 </a:solidFill>
                 <a:latin typeface="Calibri" pitchFamily="34" charset="0"/>
                 <a:ea typeface="Calibri" pitchFamily="34" charset="-122"/>
                 <a:cs typeface="Calibri" pitchFamily="34" charset="-120"/>
               </a:rPr>
-              <a:t>📋 Worksheet 4 — labs/week04-injection/worksheet.md (Part 3) · kickoff: docker compose up → http://localhost:8080</a:t>
+              <a:t>See diagram: One untrusted request value reaches three different interpreters — SQL (CWE-89, fixed by a parameterized query), the OS shell (CWE-78, fixed by an argument vector with shell=False), and a filesystem write (CWE-434, fixed by an extension allow-list). One input filter cannot guard three grammars — the fix belongs at the sink that parses the value, not at the source. (web only)</a:t>
             </a:r>
             <a:endParaRPr lang="en-US" sz="1400" dirty="0"/>
           </a:p>
@@ -7055,41 +7226,43 @@
       </p:sp>
       <p:sp>
         <p:nvSpPr>
-          <p:cNvPr id="7" name="Shape 4"/>
-          <p:cNvSpPr/>
-          <p:nvPr/>
-        </p:nvSpPr>
-        <p:spPr>
-          <a:xfrm>
-            <a:off x="457200" y="2313432"/>
-            <a:ext cx="8229600" cy="493776"/>
+          <p:cNvPr id="6" name="Shape 3"/>
+          <p:cNvSpPr/>
+          <p:nvPr/>
+        </p:nvSpPr>
+        <p:spPr>
+          <a:xfrm>
+            <a:off x="457200" y="3063240"/>
+            <a:ext cx="8229600" cy="1207008"/>
           </a:xfrm>
           <a:prstGeom prst="roundRect">
             <a:avLst>
-              <a:gd name="adj" fmla="val 11111"/>
+              <a:gd name="adj" fmla="val 6061"/>
             </a:avLst>
           </a:prstGeom>
           <a:solidFill>
-            <a:srgbClr val="0A1020"/>
+            <a:srgbClr val="F1F5F9"/>
           </a:solidFill>
-          <a:ln w="12700">
-            <a:solidFill>
-              <a:srgbClr val="E8EDF3"/>
-            </a:solidFill>
-            <a:prstDash val="solid"/>
-          </a:ln>
-        </p:spPr>
-      </p:sp>
-      <p:sp>
-        <p:nvSpPr>
-          <p:cNvPr id="8" name="Text 5"/>
-          <p:cNvSpPr/>
-          <p:nvPr/>
-        </p:nvSpPr>
-        <p:spPr>
-          <a:xfrm>
-            <a:off x="640080" y="2386584"/>
-            <a:ext cx="7863840" cy="347472"/>
+          <a:ln/>
+          <a:effectLst>
+            <a:outerShdw sx="100000" sy="100000" kx="0" ky="0" algn="bl" rotWithShape="0" blurRad="76200" dist="25400" dir="5400000">
+              <a:srgbClr val="000000">
+                <a:alpha val="12000"/>
+              </a:srgbClr>
+            </a:outerShdw>
+          </a:effectLst>
+        </p:spPr>
+      </p:sp>
+      <p:sp>
+        <p:nvSpPr>
+          <p:cNvPr id="7" name="Text 4"/>
+          <p:cNvSpPr/>
+          <p:nvPr/>
+        </p:nvSpPr>
+        <p:spPr>
+          <a:xfrm>
+            <a:off x="731520" y="3172968"/>
+            <a:ext cx="7680960" cy="987552"/>
           </a:xfrm>
           <a:prstGeom prst="rect">
             <a:avLst/>
@@ -7103,111 +7276,15 @@
           </a:bodyPr>
           <a:lstStyle/>
           <a:p>
-            <a:pPr indent="0" marL="0">
-              <a:buNone/>
-            </a:pPr>
-            <a:r>
-              <a:rPr lang="en-US" sz="1150" dirty="0">
-                <a:solidFill>
-                  <a:srgbClr val="9FE7D6"/>
-                </a:solidFill>
-                <a:latin typeface="Courier New" pitchFamily="34" charset="0"/>
-                <a:ea typeface="Courier New" pitchFamily="34" charset="-122"/>
-                <a:cs typeface="Courier New" pitchFamily="34" charset="-120"/>
-              </a:rPr>
-              <a:t>docker run --rm -p 80:80 vulnerables/web-dvwa   # optional extra target (or Juice Shop)</a:t>
-            </a:r>
-            <a:endParaRPr lang="en-US" sz="1150" dirty="0"/>
-          </a:p>
-        </p:txBody>
-      </p:sp>
-      <p:sp>
-        <p:nvSpPr>
-          <p:cNvPr id="9" name="Shape 6"/>
-          <p:cNvSpPr/>
-          <p:nvPr/>
-        </p:nvSpPr>
-        <p:spPr>
-          <a:xfrm>
-            <a:off x="502920" y="2971800"/>
-            <a:ext cx="384048" cy="384048"/>
-          </a:xfrm>
-          <a:prstGeom prst="ellipse">
-            <a:avLst/>
-          </a:prstGeom>
-          <a:solidFill>
-            <a:srgbClr val="E35205"/>
-          </a:solidFill>
-          <a:ln/>
-        </p:spPr>
-      </p:sp>
-      <p:sp>
-        <p:nvSpPr>
-          <p:cNvPr id="10" name="Text 7"/>
-          <p:cNvSpPr/>
-          <p:nvPr/>
-        </p:nvSpPr>
-        <p:spPr>
-          <a:xfrm>
-            <a:off x="502920" y="2971800"/>
-            <a:ext cx="384048" cy="384048"/>
-          </a:xfrm>
-          <a:prstGeom prst="rect">
-            <a:avLst/>
-          </a:prstGeom>
-          <a:noFill/>
-          <a:ln/>
-        </p:spPr>
-        <p:txBody>
-          <a:bodyPr wrap="square" lIns="0" tIns="0" rIns="0" bIns="0" rtlCol="0" anchor="ctr"/>
-          <a:lstStyle/>
-          <a:p>
-            <a:pPr algn="ctr" indent="0" marL="0">
-              <a:buNone/>
-            </a:pPr>
-            <a:r>
-              <a:rPr lang="en-US" sz="1500" b="1" dirty="0">
-                <a:solidFill>
-                  <a:srgbClr val="0E1726"/>
-                </a:solidFill>
-                <a:latin typeface="Arial" pitchFamily="34" charset="0"/>
-                <a:ea typeface="Arial" pitchFamily="34" charset="-122"/>
-                <a:cs typeface="Arial" pitchFamily="34" charset="-120"/>
-              </a:rPr>
-              <a:t>1</a:t>
-            </a:r>
-            <a:endParaRPr lang="en-US" sz="1500" dirty="0"/>
-          </a:p>
-        </p:txBody>
-      </p:sp>
-      <p:sp>
-        <p:nvSpPr>
-          <p:cNvPr id="11" name="Text 8"/>
-          <p:cNvSpPr/>
-          <p:nvPr/>
-        </p:nvSpPr>
-        <p:spPr>
-          <a:xfrm>
-            <a:off x="1051560" y="2971800"/>
-            <a:ext cx="7589520" cy="402336"/>
-          </a:xfrm>
-          <a:prstGeom prst="rect">
-            <a:avLst/>
-          </a:prstGeom>
-          <a:noFill/>
-          <a:ln/>
-        </p:spPr>
-        <p:txBody>
-          <a:bodyPr wrap="square" lIns="0" tIns="0" rIns="0" bIns="0" rtlCol="0" anchor="ctr">
-            <a:normAutofit/>
-          </a:bodyPr>
-          <a:lstStyle/>
-          <a:p>
-            <a:pPr indent="0" marL="0">
-              <a:buNone/>
-            </a:pPr>
-            <a:r>
-              <a:rPr lang="en-US" sz="1350" dirty="0">
+            <a:pPr marL="342900" indent="-342900">
+              <a:spcAft>
+                <a:spcPts val="600"/>
+              </a:spcAft>
+              <a:buSzPct val="100000"/>
+              <a:buChar char="•"/>
+            </a:pPr>
+            <a:r>
+              <a:rPr lang="en-US" sz="1400" dirty="0">
                 <a:solidFill>
                   <a:srgbClr val="1F2937"/>
                 </a:solidFill>
@@ -7215,99 +7292,20 @@
                 <a:ea typeface="Calibri" pitchFamily="34" charset="-122"/>
                 <a:cs typeface="Calibri" pitchFamily="34" charset="-120"/>
               </a:rPr>
-              <a:t>Find an injectable parameter, bypass auth</a:t>
-            </a:r>
-            <a:endParaRPr lang="en-US" sz="1350" dirty="0"/>
-          </a:p>
-        </p:txBody>
-      </p:sp>
-      <p:sp>
-        <p:nvSpPr>
-          <p:cNvPr id="12" name="Shape 9"/>
-          <p:cNvSpPr/>
-          <p:nvPr/>
-        </p:nvSpPr>
-        <p:spPr>
-          <a:xfrm>
-            <a:off x="502920" y="3447288"/>
-            <a:ext cx="384048" cy="384048"/>
-          </a:xfrm>
-          <a:prstGeom prst="ellipse">
-            <a:avLst/>
-          </a:prstGeom>
-          <a:solidFill>
-            <a:srgbClr val="E35205"/>
-          </a:solidFill>
-          <a:ln/>
-        </p:spPr>
-      </p:sp>
-      <p:sp>
-        <p:nvSpPr>
-          <p:cNvPr id="13" name="Text 10"/>
-          <p:cNvSpPr/>
-          <p:nvPr/>
-        </p:nvSpPr>
-        <p:spPr>
-          <a:xfrm>
-            <a:off x="502920" y="3447288"/>
-            <a:ext cx="384048" cy="384048"/>
-          </a:xfrm>
-          <a:prstGeom prst="rect">
-            <a:avLst/>
-          </a:prstGeom>
-          <a:noFill/>
-          <a:ln/>
-        </p:spPr>
-        <p:txBody>
-          <a:bodyPr wrap="square" lIns="0" tIns="0" rIns="0" bIns="0" rtlCol="0" anchor="ctr"/>
-          <a:lstStyle/>
-          <a:p>
-            <a:pPr algn="ctr" indent="0" marL="0">
-              <a:buNone/>
-            </a:pPr>
-            <a:r>
-              <a:rPr lang="en-US" sz="1500" b="1" dirty="0">
-                <a:solidFill>
-                  <a:srgbClr val="0E1726"/>
-                </a:solidFill>
-                <a:latin typeface="Arial" pitchFamily="34" charset="0"/>
-                <a:ea typeface="Arial" pitchFamily="34" charset="-122"/>
-                <a:cs typeface="Arial" pitchFamily="34" charset="-120"/>
-              </a:rPr>
-              <a:t>2</a:t>
-            </a:r>
-            <a:endParaRPr lang="en-US" sz="1500" dirty="0"/>
-          </a:p>
-        </p:txBody>
-      </p:sp>
-      <p:sp>
-        <p:nvSpPr>
-          <p:cNvPr id="14" name="Text 11"/>
-          <p:cNvSpPr/>
-          <p:nvPr/>
-        </p:nvSpPr>
-        <p:spPr>
-          <a:xfrm>
-            <a:off x="1051560" y="3447288"/>
-            <a:ext cx="7589520" cy="402336"/>
-          </a:xfrm>
-          <a:prstGeom prst="rect">
-            <a:avLst/>
-          </a:prstGeom>
-          <a:noFill/>
-          <a:ln/>
-        </p:spPr>
-        <p:txBody>
-          <a:bodyPr wrap="square" lIns="0" tIns="0" rIns="0" bIns="0" rtlCol="0" anchor="ctr">
-            <a:normAutofit/>
-          </a:bodyPr>
-          <a:lstStyle/>
-          <a:p>
-            <a:pPr indent="0" marL="0">
-              <a:buNone/>
-            </a:pPr>
-            <a:r>
-              <a:rPr lang="en-US" sz="1350" dirty="0">
+              <a:t>SQL (WHERE username = &lt;in&gt;) → parameterized query — bind the value</a:t>
+            </a:r>
+            <a:endParaRPr lang="en-US" sz="1400" dirty="0"/>
+          </a:p>
+          <a:p>
+            <a:pPr marL="342900" indent="-342900">
+              <a:spcAft>
+                <a:spcPts val="600"/>
+              </a:spcAft>
+              <a:buSzPct val="100000"/>
+              <a:buChar char="•"/>
+            </a:pPr>
+            <a:r>
+              <a:rPr lang="en-US" sz="1400" dirty="0">
                 <a:solidFill>
                   <a:srgbClr val="1F2937"/>
                 </a:solidFill>
@@ -7315,99 +7313,20 @@
                 <a:ea typeface="Calibri" pitchFamily="34" charset="-122"/>
                 <a:cs typeface="Calibri" pitchFamily="34" charset="-120"/>
               </a:rPr>
-              <a:t>Extract data (UNION dump)</a:t>
-            </a:r>
-            <a:endParaRPr lang="en-US" sz="1350" dirty="0"/>
-          </a:p>
-        </p:txBody>
-      </p:sp>
-      <p:sp>
-        <p:nvSpPr>
-          <p:cNvPr id="15" name="Shape 12"/>
-          <p:cNvSpPr/>
-          <p:nvPr/>
-        </p:nvSpPr>
-        <p:spPr>
-          <a:xfrm>
-            <a:off x="502920" y="3922776"/>
-            <a:ext cx="384048" cy="384048"/>
-          </a:xfrm>
-          <a:prstGeom prst="ellipse">
-            <a:avLst/>
-          </a:prstGeom>
-          <a:solidFill>
-            <a:srgbClr val="E35205"/>
-          </a:solidFill>
-          <a:ln/>
-        </p:spPr>
-      </p:sp>
-      <p:sp>
-        <p:nvSpPr>
-          <p:cNvPr id="16" name="Text 13"/>
-          <p:cNvSpPr/>
-          <p:nvPr/>
-        </p:nvSpPr>
-        <p:spPr>
-          <a:xfrm>
-            <a:off x="502920" y="3922776"/>
-            <a:ext cx="384048" cy="384048"/>
-          </a:xfrm>
-          <a:prstGeom prst="rect">
-            <a:avLst/>
-          </a:prstGeom>
-          <a:noFill/>
-          <a:ln/>
-        </p:spPr>
-        <p:txBody>
-          <a:bodyPr wrap="square" lIns="0" tIns="0" rIns="0" bIns="0" rtlCol="0" anchor="ctr"/>
-          <a:lstStyle/>
-          <a:p>
-            <a:pPr algn="ctr" indent="0" marL="0">
-              <a:buNone/>
-            </a:pPr>
-            <a:r>
-              <a:rPr lang="en-US" sz="1500" b="1" dirty="0">
-                <a:solidFill>
-                  <a:srgbClr val="0E1726"/>
-                </a:solidFill>
-                <a:latin typeface="Arial" pitchFamily="34" charset="0"/>
-                <a:ea typeface="Arial" pitchFamily="34" charset="-122"/>
-                <a:cs typeface="Arial" pitchFamily="34" charset="-120"/>
-              </a:rPr>
-              <a:t>3</a:t>
-            </a:r>
-            <a:endParaRPr lang="en-US" sz="1500" dirty="0"/>
-          </a:p>
-        </p:txBody>
-      </p:sp>
-      <p:sp>
-        <p:nvSpPr>
-          <p:cNvPr id="17" name="Text 14"/>
-          <p:cNvSpPr/>
-          <p:nvPr/>
-        </p:nvSpPr>
-        <p:spPr>
-          <a:xfrm>
-            <a:off x="1051560" y="3922776"/>
-            <a:ext cx="7589520" cy="402336"/>
-          </a:xfrm>
-          <a:prstGeom prst="rect">
-            <a:avLst/>
-          </a:prstGeom>
-          <a:noFill/>
-          <a:ln/>
-        </p:spPr>
-        <p:txBody>
-          <a:bodyPr wrap="square" lIns="0" tIns="0" rIns="0" bIns="0" rtlCol="0" anchor="ctr">
-            <a:normAutofit/>
-          </a:bodyPr>
-          <a:lstStyle/>
-          <a:p>
-            <a:pPr indent="0" marL="0">
-              <a:buNone/>
-            </a:pPr>
-            <a:r>
-              <a:rPr lang="en-US" sz="1350" dirty="0">
+              <a:t>Shell (ping … &lt;in&gt;) → argument vector + shell=False — no shell to parse it</a:t>
+            </a:r>
+            <a:endParaRPr lang="en-US" sz="1400" dirty="0"/>
+          </a:p>
+          <a:p>
+            <a:pPr marL="342900" indent="-342900">
+              <a:spcAft>
+                <a:spcPts val="600"/>
+              </a:spcAft>
+              <a:buSzPct val="100000"/>
+              <a:buChar char="•"/>
+            </a:pPr>
+            <a:r>
+              <a:rPr lang="en-US" sz="1400" dirty="0">
                 <a:solidFill>
                   <a:srgbClr val="1F2937"/>
                 </a:solidFill>
@@ -7415,15 +7334,15 @@
                 <a:ea typeface="Calibri" pitchFamily="34" charset="-122"/>
                 <a:cs typeface="Calibri" pitchFamily="34" charset="-120"/>
               </a:rPr>
-              <a:t>Achieve command injection</a:t>
-            </a:r>
-            <a:endParaRPr lang="en-US" sz="1350" dirty="0"/>
-          </a:p>
-        </p:txBody>
-      </p:sp>
-      <p:sp>
-        <p:nvSpPr>
-          <p:cNvPr id="18" name="Text 15"/>
+              <a:t>Filesystem (save(&lt;in&gt;)) → extension allow-list + store outside web root</a:t>
+            </a:r>
+            <a:endParaRPr lang="en-US" sz="1400" dirty="0"/>
+          </a:p>
+        </p:txBody>
+      </p:sp>
+      <p:sp>
+        <p:nvSpPr>
+          <p:cNvPr id="8" name="Text 5"/>
           <p:cNvSpPr/>
           <p:nvPr/>
         </p:nvSpPr>
@@ -7462,7 +7381,7 @@
       </p:sp>
       <p:pic>
         <p:nvPicPr>
-          <p:cNvPr id="19" name="Image 1" descr="/Users/pop7/Library/CloudStorage/OneDrive-MonsterConnectCo.,Ltd/Lecture/KOSEN69 - software-security/slides/pptx/assets/logo-small.png">    </p:cNvPr>
+          <p:cNvPr id="9" name="Image 1" descr="/private/tmp/claude-501/-Users-pop7-Library-CloudStorage-OneDrive-MonsterConnectCo--Ltd-Lecture-KOSEN69---software-security/e6d6556f-17de-403d-a9a0-cf2f846149b4/scratchpad/pptx2/src/slides/pptx/assets/logo-small.png">    </p:cNvPr>
           <p:cNvPicPr>
             <a:picLocks noChangeAspect="1"/>
           </p:cNvPicPr>
@@ -7600,7 +7519,7 @@
                 <a:ea typeface="Arial" pitchFamily="34" charset="-122"/>
                 <a:cs typeface="Arial" pitchFamily="34" charset="-120"/>
               </a:rPr>
-              <a:t>Lab steps (cont.)</a:t>
+              <a:t>One value, three interpreters (cont.)</a:t>
             </a:r>
             <a:endParaRPr lang="en-US" sz="2600" dirty="0"/>
           </a:p>
@@ -7614,16 +7533,25 @@
         </p:nvSpPr>
         <p:spPr>
           <a:xfrm>
-            <a:off x="502920" y="1325880"/>
-            <a:ext cx="384048" cy="384048"/>
-          </a:xfrm>
-          <a:prstGeom prst="ellipse">
-            <a:avLst/>
+            <a:off x="457200" y="1325880"/>
+            <a:ext cx="8229600" cy="585216"/>
+          </a:xfrm>
+          <a:prstGeom prst="roundRect">
+            <a:avLst>
+              <a:gd name="adj" fmla="val 12500"/>
+            </a:avLst>
           </a:prstGeom>
           <a:solidFill>
-            <a:srgbClr val="E35205"/>
+            <a:srgbClr val="F1F5F9"/>
           </a:solidFill>
           <a:ln/>
+          <a:effectLst>
+            <a:outerShdw sx="100000" sy="100000" kx="0" ky="0" algn="bl" rotWithShape="0" blurRad="76200" dist="25400" dir="5400000">
+              <a:srgbClr val="000000">
+                <a:alpha val="12000"/>
+              </a:srgbClr>
+            </a:outerShdw>
+          </a:effectLst>
         </p:spPr>
       </p:sp>
       <p:sp>
@@ -7634,8 +7562,8 @@
         </p:nvSpPr>
         <p:spPr>
           <a:xfrm>
-            <a:off x="502920" y="1325880"/>
-            <a:ext cx="384048" cy="384048"/>
+            <a:off x="731520" y="1435608"/>
+            <a:ext cx="7680960" cy="365760"/>
           </a:xfrm>
           <a:prstGeom prst="rect">
             <a:avLst/>
@@ -7644,55 +7572,20 @@
           <a:ln/>
         </p:spPr>
         <p:txBody>
-          <a:bodyPr wrap="square" lIns="0" tIns="0" rIns="0" bIns="0" rtlCol="0" anchor="ctr"/>
-          <a:lstStyle/>
-          <a:p>
-            <a:pPr algn="ctr" indent="0" marL="0">
-              <a:buNone/>
-            </a:pPr>
-            <a:r>
-              <a:rPr lang="en-US" sz="1500" b="1" dirty="0">
-                <a:solidFill>
-                  <a:srgbClr val="0E1726"/>
-                </a:solidFill>
-                <a:latin typeface="Arial" pitchFamily="34" charset="0"/>
-                <a:ea typeface="Arial" pitchFamily="34" charset="-122"/>
-                <a:cs typeface="Arial" pitchFamily="34" charset="-120"/>
-              </a:rPr>
-              <a:t>4</a:t>
-            </a:r>
-            <a:endParaRPr lang="en-US" sz="1500" dirty="0"/>
-          </a:p>
-        </p:txBody>
-      </p:sp>
-      <p:sp>
-        <p:nvSpPr>
-          <p:cNvPr id="7" name="Text 4"/>
-          <p:cNvSpPr/>
-          <p:nvPr/>
-        </p:nvSpPr>
-        <p:spPr>
-          <a:xfrm>
-            <a:off x="1051560" y="1325880"/>
-            <a:ext cx="7589520" cy="402336"/>
-          </a:xfrm>
-          <a:prstGeom prst="rect">
-            <a:avLst/>
-          </a:prstGeom>
-          <a:noFill/>
-          <a:ln/>
-        </p:spPr>
-        <p:txBody>
-          <a:bodyPr wrap="square" lIns="0" tIns="0" rIns="0" bIns="0" rtlCol="0" anchor="ctr">
+          <a:bodyPr wrap="square" lIns="0" tIns="0" rIns="0" bIns="0" rtlCol="0" anchor="t">
             <a:normAutofit/>
           </a:bodyPr>
           <a:lstStyle/>
           <a:p>
-            <a:pPr indent="0" marL="0">
-              <a:buNone/>
-            </a:pPr>
-            <a:r>
-              <a:rPr lang="en-US" sz="1350" dirty="0">
+            <a:pPr marL="342900" indent="-342900">
+              <a:spcAft>
+                <a:spcPts val="600"/>
+              </a:spcAft>
+              <a:buSzPct val="100000"/>
+              <a:buChar char="•"/>
+            </a:pPr>
+            <a:r>
+              <a:rPr lang="en-US" sz="1400" dirty="0">
                 <a:solidFill>
                   <a:srgbClr val="1F2937"/>
                 </a:solidFill>
@@ -7700,42 +7593,22 @@
                 <a:ea typeface="Calibri" pitchFamily="34" charset="-122"/>
                 <a:cs typeface="Calibri" pitchFamily="34" charset="-120"/>
               </a:rPr>
-              <a:t>Probe the upload endpoint — document the missing control</a:t>
-            </a:r>
-            <a:endParaRPr lang="en-US" sz="1350" dirty="0"/>
-          </a:p>
-        </p:txBody>
-      </p:sp>
-      <p:sp>
-        <p:nvSpPr>
-          <p:cNvPr id="8" name="Shape 5"/>
-          <p:cNvSpPr/>
-          <p:nvPr/>
-        </p:nvSpPr>
-        <p:spPr>
-          <a:xfrm>
-            <a:off x="502920" y="1801368"/>
-            <a:ext cx="384048" cy="384048"/>
-          </a:xfrm>
-          <a:prstGeom prst="ellipse">
-            <a:avLst/>
-          </a:prstGeom>
-          <a:solidFill>
-            <a:srgbClr val="E35205"/>
-          </a:solidFill>
-          <a:ln/>
-        </p:spPr>
-      </p:sp>
-      <p:sp>
-        <p:nvSpPr>
-          <p:cNvPr id="9" name="Text 6"/>
-          <p:cNvSpPr/>
-          <p:nvPr/>
-        </p:nvSpPr>
-        <p:spPr>
-          <a:xfrm>
-            <a:off x="502920" y="1801368"/>
-            <a:ext cx="384048" cy="384048"/>
+              <a:t>One filter can't guard three grammars — fix at each sink, not at the source</a:t>
+            </a:r>
+            <a:endParaRPr lang="en-US" sz="1400" dirty="0"/>
+          </a:p>
+        </p:txBody>
+      </p:sp>
+      <p:sp>
+        <p:nvSpPr>
+          <p:cNvPr id="7" name="Text 4"/>
+          <p:cNvSpPr/>
+          <p:nvPr/>
+        </p:nvSpPr>
+        <p:spPr>
+          <a:xfrm>
+            <a:off x="457200" y="4800600"/>
+            <a:ext cx="6949440" cy="274320"/>
           </a:xfrm>
           <a:prstGeom prst="rect">
             <a:avLst/>
@@ -7745,100 +7618,20 @@
         </p:spPr>
         <p:txBody>
           <a:bodyPr wrap="square" lIns="0" tIns="0" rIns="0" bIns="0" rtlCol="0" anchor="ctr"/>
-          <a:lstStyle/>
-          <a:p>
-            <a:pPr algn="ctr" indent="0" marL="0">
-              <a:buNone/>
-            </a:pPr>
-            <a:r>
-              <a:rPr lang="en-US" sz="1500" b="1" dirty="0">
-                <a:solidFill>
-                  <a:srgbClr val="0E1726"/>
-                </a:solidFill>
-                <a:latin typeface="Arial" pitchFamily="34" charset="0"/>
-                <a:ea typeface="Arial" pitchFamily="34" charset="-122"/>
-                <a:cs typeface="Arial" pitchFamily="34" charset="-120"/>
-              </a:rPr>
-              <a:t>5</a:t>
-            </a:r>
-            <a:endParaRPr lang="en-US" sz="1500" dirty="0"/>
-          </a:p>
-        </p:txBody>
-      </p:sp>
-      <p:sp>
-        <p:nvSpPr>
-          <p:cNvPr id="10" name="Text 7"/>
-          <p:cNvSpPr/>
-          <p:nvPr/>
-        </p:nvSpPr>
-        <p:spPr>
-          <a:xfrm>
-            <a:off x="1051560" y="1801368"/>
-            <a:ext cx="7589520" cy="402336"/>
-          </a:xfrm>
-          <a:prstGeom prst="rect">
-            <a:avLst/>
-          </a:prstGeom>
-          <a:noFill/>
-          <a:ln/>
-        </p:spPr>
-        <p:txBody>
-          <a:bodyPr wrap="square" lIns="0" tIns="0" rIns="0" bIns="0" rtlCol="0" anchor="ctr">
-            <a:normAutofit/>
-          </a:bodyPr>
           <a:lstStyle/>
           <a:p>
             <a:pPr indent="0" marL="0">
               <a:buNone/>
             </a:pPr>
             <a:r>
-              <a:rPr lang="en-US" sz="1350" dirty="0">
-                <a:solidFill>
-                  <a:srgbClr val="1F2937"/>
+              <a:rPr lang="en-US" sz="900" dirty="0">
+                <a:solidFill>
+                  <a:srgbClr val="64748B"/>
                 </a:solidFill>
                 <a:latin typeface="Calibri" pitchFamily="34" charset="0"/>
                 <a:ea typeface="Calibri" pitchFamily="34" charset="-122"/>
                 <a:cs typeface="Calibri" pitchFamily="34" charset="-120"/>
               </a:rPr>
-              <a:t>Rewrite the endpoints safely &amp; re-test</a:t>
-            </a:r>
-            <a:endParaRPr lang="en-US" sz="1350" dirty="0"/>
-          </a:p>
-        </p:txBody>
-      </p:sp>
-      <p:sp>
-        <p:nvSpPr>
-          <p:cNvPr id="11" name="Text 8"/>
-          <p:cNvSpPr/>
-          <p:nvPr/>
-        </p:nvSpPr>
-        <p:spPr>
-          <a:xfrm>
-            <a:off x="457200" y="4800600"/>
-            <a:ext cx="6949440" cy="274320"/>
-          </a:xfrm>
-          <a:prstGeom prst="rect">
-            <a:avLst/>
-          </a:prstGeom>
-          <a:noFill/>
-          <a:ln/>
-        </p:spPr>
-        <p:txBody>
-          <a:bodyPr wrap="square" lIns="0" tIns="0" rIns="0" bIns="0" rtlCol="0" anchor="ctr"/>
-          <a:lstStyle/>
-          <a:p>
-            <a:pPr indent="0" marL="0">
-              <a:buNone/>
-            </a:pPr>
-            <a:r>
-              <a:rPr lang="en-US" sz="900" dirty="0">
-                <a:solidFill>
-                  <a:srgbClr val="64748B"/>
-                </a:solidFill>
-                <a:latin typeface="Calibri" pitchFamily="34" charset="0"/>
-                <a:ea typeface="Calibri" pitchFamily="34" charset="-122"/>
-                <a:cs typeface="Calibri" pitchFamily="34" charset="-120"/>
-              </a:rPr>
               <a:t>Software Security · Week 4</a:t>
             </a:r>
             <a:endParaRPr lang="en-US" sz="900" dirty="0"/>
@@ -7847,7 +7640,7 @@
       </p:sp>
       <p:pic>
         <p:nvPicPr>
-          <p:cNvPr id="12" name="Image 1" descr="/Users/pop7/Library/CloudStorage/OneDrive-MonsterConnectCo.,Ltd/Lecture/KOSEN69 - software-security/slides/pptx/assets/logo-small.png">    </p:cNvPr>
+          <p:cNvPr id="8" name="Image 1" descr="/private/tmp/claude-501/-Users-pop7-Library-CloudStorage-OneDrive-MonsterConnectCo--Ltd-Lecture-KOSEN69---software-security/e6d6556f-17de-403d-a9a0-cf2f846149b4/scratchpad/pptx2/src/slides/pptx/assets/logo-small.png">    </p:cNvPr>
           <p:cNvPicPr>
             <a:picLocks noChangeAspect="1"/>
           </p:cNvPicPr>
@@ -7985,7 +7778,7 @@
                 <a:ea typeface="Arial" pitchFamily="34" charset="-122"/>
                 <a:cs typeface="Arial" pitchFamily="34" charset="-120"/>
               </a:rPr>
-              <a:t>Deliverable</a:t>
+              <a:t>⚔️ Game — SQLi Warm-up</a:t>
             </a:r>
             <a:endParaRPr lang="en-US" sz="2600" dirty="0"/>
           </a:p>
@@ -7993,43 +7786,14 @@
       </p:sp>
       <p:sp>
         <p:nvSpPr>
-          <p:cNvPr id="5" name="Shape 2"/>
-          <p:cNvSpPr/>
-          <p:nvPr/>
-        </p:nvSpPr>
-        <p:spPr>
-          <a:xfrm>
-            <a:off x="457200" y="1325880"/>
-            <a:ext cx="8229600" cy="1517904"/>
-          </a:xfrm>
-          <a:prstGeom prst="roundRect">
-            <a:avLst>
-              <a:gd name="adj" fmla="val 4819"/>
-            </a:avLst>
-          </a:prstGeom>
-          <a:solidFill>
-            <a:srgbClr val="F1F5F9"/>
-          </a:solidFill>
-          <a:ln/>
-          <a:effectLst>
-            <a:outerShdw sx="100000" sy="100000" kx="0" ky="0" algn="bl" rotWithShape="0" blurRad="76200" dist="25400" dir="5400000">
-              <a:srgbClr val="000000">
-                <a:alpha val="12000"/>
-              </a:srgbClr>
-            </a:outerShdw>
-          </a:effectLst>
-        </p:spPr>
-      </p:sp>
-      <p:sp>
-        <p:nvSpPr>
-          <p:cNvPr id="6" name="Text 3"/>
-          <p:cNvSpPr/>
-          <p:nvPr/>
-        </p:nvSpPr>
-        <p:spPr>
-          <a:xfrm>
-            <a:off x="731520" y="1435608"/>
-            <a:ext cx="7680960" cy="1298448"/>
+          <p:cNvPr id="5" name="Text 2"/>
+          <p:cNvSpPr/>
+          <p:nvPr/>
+        </p:nvSpPr>
+        <p:spPr>
+          <a:xfrm>
+            <a:off x="548640" y="1325880"/>
+            <a:ext cx="8046720" cy="548640"/>
           </a:xfrm>
           <a:prstGeom prst="rect">
             <a:avLst/>
@@ -8043,12 +7807,8 @@
           </a:bodyPr>
           <a:lstStyle/>
           <a:p>
-            <a:pPr marL="342900" indent="-342900">
-              <a:spcAft>
-                <a:spcPts val="600"/>
-              </a:spcAft>
-              <a:buSzPct val="100000"/>
-              <a:buChar char="•"/>
+            <a:pPr indent="0" marL="0">
+              <a:buNone/>
             </a:pPr>
             <a:r>
               <a:rPr lang="en-US" sz="1400" dirty="0">
@@ -8059,20 +7819,99 @@
                 <a:ea typeface="Calibri" pitchFamily="34" charset="-122"/>
                 <a:cs typeface="Calibri" pitchFamily="34" charset="-120"/>
               </a:rPr>
-              <a:t>Findings: each injection point + payload + impact (CWE-mapped)</a:t>
+              <a:t>Four hits against this week's own app — no filters to bypass, the app has none:</a:t>
             </a:r>
             <a:endParaRPr lang="en-US" sz="1400" dirty="0"/>
           </a:p>
-          <a:p>
-            <a:pPr marL="342900" indent="-342900">
-              <a:spcAft>
-                <a:spcPts val="600"/>
-              </a:spcAft>
-              <a:buSzPct val="100000"/>
-              <a:buChar char="•"/>
-            </a:pPr>
-            <a:r>
-              <a:rPr lang="en-US" sz="1400" dirty="0">
+        </p:txBody>
+      </p:sp>
+      <p:sp>
+        <p:nvSpPr>
+          <p:cNvPr id="6" name="Shape 3"/>
+          <p:cNvSpPr/>
+          <p:nvPr/>
+        </p:nvSpPr>
+        <p:spPr>
+          <a:xfrm>
+            <a:off x="502920" y="1965960"/>
+            <a:ext cx="384048" cy="384048"/>
+          </a:xfrm>
+          <a:prstGeom prst="ellipse">
+            <a:avLst/>
+          </a:prstGeom>
+          <a:solidFill>
+            <a:srgbClr val="E35205"/>
+          </a:solidFill>
+          <a:ln/>
+        </p:spPr>
+      </p:sp>
+      <p:sp>
+        <p:nvSpPr>
+          <p:cNvPr id="7" name="Text 4"/>
+          <p:cNvSpPr/>
+          <p:nvPr/>
+        </p:nvSpPr>
+        <p:spPr>
+          <a:xfrm>
+            <a:off x="502920" y="1965960"/>
+            <a:ext cx="384048" cy="384048"/>
+          </a:xfrm>
+          <a:prstGeom prst="rect">
+            <a:avLst/>
+          </a:prstGeom>
+          <a:noFill/>
+          <a:ln/>
+        </p:spPr>
+        <p:txBody>
+          <a:bodyPr wrap="square" lIns="0" tIns="0" rIns="0" bIns="0" rtlCol="0" anchor="ctr"/>
+          <a:lstStyle/>
+          <a:p>
+            <a:pPr algn="ctr" indent="0" marL="0">
+              <a:buNone/>
+            </a:pPr>
+            <a:r>
+              <a:rPr lang="en-US" sz="1500" b="1" dirty="0">
+                <a:solidFill>
+                  <a:srgbClr val="0E1726"/>
+                </a:solidFill>
+                <a:latin typeface="Arial" pitchFamily="34" charset="0"/>
+                <a:ea typeface="Arial" pitchFamily="34" charset="-122"/>
+                <a:cs typeface="Arial" pitchFamily="34" charset="-120"/>
+              </a:rPr>
+              <a:t>1</a:t>
+            </a:r>
+            <a:endParaRPr lang="en-US" sz="1500" dirty="0"/>
+          </a:p>
+        </p:txBody>
+      </p:sp>
+      <p:sp>
+        <p:nvSpPr>
+          <p:cNvPr id="8" name="Text 5"/>
+          <p:cNvSpPr/>
+          <p:nvPr/>
+        </p:nvSpPr>
+        <p:spPr>
+          <a:xfrm>
+            <a:off x="1051560" y="1965960"/>
+            <a:ext cx="7589520" cy="402336"/>
+          </a:xfrm>
+          <a:prstGeom prst="rect">
+            <a:avLst/>
+          </a:prstGeom>
+          <a:noFill/>
+          <a:ln/>
+        </p:spPr>
+        <p:txBody>
+          <a:bodyPr wrap="square" lIns="0" tIns="0" rIns="0" bIns="0" rtlCol="0" anchor="ctr">
+            <a:normAutofit/>
+          </a:bodyPr>
+          <a:lstStyle/>
+          <a:p>
+            <a:pPr indent="0" marL="0">
+              <a:buNone/>
+            </a:pPr>
+            <a:r>
+              <a:rPr lang="en-US" sz="1350" dirty="0">
                 <a:solidFill>
                   <a:srgbClr val="1F2937"/>
                 </a:solidFill>
@@ -8080,20 +7919,99 @@
                 <a:ea typeface="Calibri" pitchFamily="34" charset="-122"/>
                 <a:cs typeface="Calibri" pitchFamily="34" charset="-120"/>
               </a:rPr>
-              <a:t>The fixed code (prepared statements / validation)</a:t>
-            </a:r>
-            <a:endParaRPr lang="en-US" sz="1400" dirty="0"/>
-          </a:p>
-          <a:p>
-            <a:pPr marL="342900" indent="-342900">
-              <a:spcAft>
-                <a:spcPts val="600"/>
-              </a:spcAft>
-              <a:buSzPct val="100000"/>
-              <a:buChar char="•"/>
-            </a:pPr>
-            <a:r>
-              <a:rPr lang="en-US" sz="1400" dirty="0">
+              <a:t>Auth bypass (alice'--)</a:t>
+            </a:r>
+            <a:endParaRPr lang="en-US" sz="1350" dirty="0"/>
+          </a:p>
+        </p:txBody>
+      </p:sp>
+      <p:sp>
+        <p:nvSpPr>
+          <p:cNvPr id="9" name="Shape 6"/>
+          <p:cNvSpPr/>
+          <p:nvPr/>
+        </p:nvSpPr>
+        <p:spPr>
+          <a:xfrm>
+            <a:off x="502920" y="2441448"/>
+            <a:ext cx="384048" cy="384048"/>
+          </a:xfrm>
+          <a:prstGeom prst="ellipse">
+            <a:avLst/>
+          </a:prstGeom>
+          <a:solidFill>
+            <a:srgbClr val="E35205"/>
+          </a:solidFill>
+          <a:ln/>
+        </p:spPr>
+      </p:sp>
+      <p:sp>
+        <p:nvSpPr>
+          <p:cNvPr id="10" name="Text 7"/>
+          <p:cNvSpPr/>
+          <p:nvPr/>
+        </p:nvSpPr>
+        <p:spPr>
+          <a:xfrm>
+            <a:off x="502920" y="2441448"/>
+            <a:ext cx="384048" cy="384048"/>
+          </a:xfrm>
+          <a:prstGeom prst="rect">
+            <a:avLst/>
+          </a:prstGeom>
+          <a:noFill/>
+          <a:ln/>
+        </p:spPr>
+        <p:txBody>
+          <a:bodyPr wrap="square" lIns="0" tIns="0" rIns="0" bIns="0" rtlCol="0" anchor="ctr"/>
+          <a:lstStyle/>
+          <a:p>
+            <a:pPr algn="ctr" indent="0" marL="0">
+              <a:buNone/>
+            </a:pPr>
+            <a:r>
+              <a:rPr lang="en-US" sz="1500" b="1" dirty="0">
+                <a:solidFill>
+                  <a:srgbClr val="0E1726"/>
+                </a:solidFill>
+                <a:latin typeface="Arial" pitchFamily="34" charset="0"/>
+                <a:ea typeface="Arial" pitchFamily="34" charset="-122"/>
+                <a:cs typeface="Arial" pitchFamily="34" charset="-120"/>
+              </a:rPr>
+              <a:t>2</a:t>
+            </a:r>
+            <a:endParaRPr lang="en-US" sz="1500" dirty="0"/>
+          </a:p>
+        </p:txBody>
+      </p:sp>
+      <p:sp>
+        <p:nvSpPr>
+          <p:cNvPr id="11" name="Text 8"/>
+          <p:cNvSpPr/>
+          <p:nvPr/>
+        </p:nvSpPr>
+        <p:spPr>
+          <a:xfrm>
+            <a:off x="1051560" y="2441448"/>
+            <a:ext cx="7589520" cy="402336"/>
+          </a:xfrm>
+          <a:prstGeom prst="rect">
+            <a:avLst/>
+          </a:prstGeom>
+          <a:noFill/>
+          <a:ln/>
+        </p:spPr>
+        <p:txBody>
+          <a:bodyPr wrap="square" lIns="0" tIns="0" rIns="0" bIns="0" rtlCol="0" anchor="ctr">
+            <a:normAutofit/>
+          </a:bodyPr>
+          <a:lstStyle/>
+          <a:p>
+            <a:pPr indent="0" marL="0">
+              <a:buNone/>
+            </a:pPr>
+            <a:r>
+              <a:rPr lang="en-US" sz="1350" dirty="0">
                 <a:solidFill>
                   <a:srgbClr val="1F2937"/>
                 </a:solidFill>
@@ -8101,20 +8019,99 @@
                 <a:ea typeface="Calibri" pitchFamily="34" charset="-122"/>
                 <a:cs typeface="Calibri" pitchFamily="34" charset="-120"/>
               </a:rPr>
-              <a:t>Proof the payload no longer works</a:t>
-            </a:r>
-            <a:endParaRPr lang="en-US" sz="1400" dirty="0"/>
-          </a:p>
-          <a:p>
-            <a:pPr marL="342900" indent="-342900">
-              <a:spcAft>
-                <a:spcPts val="600"/>
-              </a:spcAft>
-              <a:buSzPct val="100000"/>
-              <a:buChar char="•"/>
-            </a:pPr>
-            <a:r>
-              <a:rPr lang="en-US" sz="1400" dirty="0">
+              <a:t>UNION dump (steal all credentials)</a:t>
+            </a:r>
+            <a:endParaRPr lang="en-US" sz="1350" dirty="0"/>
+          </a:p>
+        </p:txBody>
+      </p:sp>
+      <p:sp>
+        <p:nvSpPr>
+          <p:cNvPr id="12" name="Shape 9"/>
+          <p:cNvSpPr/>
+          <p:nvPr/>
+        </p:nvSpPr>
+        <p:spPr>
+          <a:xfrm>
+            <a:off x="502920" y="2916936"/>
+            <a:ext cx="384048" cy="384048"/>
+          </a:xfrm>
+          <a:prstGeom prst="ellipse">
+            <a:avLst/>
+          </a:prstGeom>
+          <a:solidFill>
+            <a:srgbClr val="E35205"/>
+          </a:solidFill>
+          <a:ln/>
+        </p:spPr>
+      </p:sp>
+      <p:sp>
+        <p:nvSpPr>
+          <p:cNvPr id="13" name="Text 10"/>
+          <p:cNvSpPr/>
+          <p:nvPr/>
+        </p:nvSpPr>
+        <p:spPr>
+          <a:xfrm>
+            <a:off x="502920" y="2916936"/>
+            <a:ext cx="384048" cy="384048"/>
+          </a:xfrm>
+          <a:prstGeom prst="rect">
+            <a:avLst/>
+          </a:prstGeom>
+          <a:noFill/>
+          <a:ln/>
+        </p:spPr>
+        <p:txBody>
+          <a:bodyPr wrap="square" lIns="0" tIns="0" rIns="0" bIns="0" rtlCol="0" anchor="ctr"/>
+          <a:lstStyle/>
+          <a:p>
+            <a:pPr algn="ctr" indent="0" marL="0">
+              <a:buNone/>
+            </a:pPr>
+            <a:r>
+              <a:rPr lang="en-US" sz="1500" b="1" dirty="0">
+                <a:solidFill>
+                  <a:srgbClr val="0E1726"/>
+                </a:solidFill>
+                <a:latin typeface="Arial" pitchFamily="34" charset="0"/>
+                <a:ea typeface="Arial" pitchFamily="34" charset="-122"/>
+                <a:cs typeface="Arial" pitchFamily="34" charset="-120"/>
+              </a:rPr>
+              <a:t>3</a:t>
+            </a:r>
+            <a:endParaRPr lang="en-US" sz="1500" dirty="0"/>
+          </a:p>
+        </p:txBody>
+      </p:sp>
+      <p:sp>
+        <p:nvSpPr>
+          <p:cNvPr id="14" name="Text 11"/>
+          <p:cNvSpPr/>
+          <p:nvPr/>
+        </p:nvSpPr>
+        <p:spPr>
+          <a:xfrm>
+            <a:off x="1051560" y="2916936"/>
+            <a:ext cx="7589520" cy="402336"/>
+          </a:xfrm>
+          <a:prstGeom prst="rect">
+            <a:avLst/>
+          </a:prstGeom>
+          <a:noFill/>
+          <a:ln/>
+        </p:spPr>
+        <p:txBody>
+          <a:bodyPr wrap="square" lIns="0" tIns="0" rIns="0" bIns="0" rtlCol="0" anchor="ctr">
+            <a:normAutofit/>
+          </a:bodyPr>
+          <a:lstStyle/>
+          <a:p>
+            <a:pPr indent="0" marL="0">
+              <a:buNone/>
+            </a:pPr>
+            <a:r>
+              <a:rPr lang="en-US" sz="1350" dirty="0">
                 <a:solidFill>
                   <a:srgbClr val="1F2937"/>
                 </a:solidFill>
@@ -8122,22 +8119,42 @@
                 <a:ea typeface="Calibri" pitchFamily="34" charset="-122"/>
                 <a:cs typeface="Calibri" pitchFamily="34" charset="-120"/>
               </a:rPr>
-              <a:t>+ Audit the AI / EiPE / Prompt Problem (see worksheet)</a:t>
-            </a:r>
-            <a:endParaRPr lang="en-US" sz="1400" dirty="0"/>
-          </a:p>
-        </p:txBody>
-      </p:sp>
-      <p:sp>
-        <p:nvSpPr>
-          <p:cNvPr id="7" name="Text 4"/>
-          <p:cNvSpPr/>
-          <p:nvPr/>
-        </p:nvSpPr>
-        <p:spPr>
-          <a:xfrm>
-            <a:off x="457200" y="4800600"/>
-            <a:ext cx="6949440" cy="274320"/>
+              <a:t>Command injection</a:t>
+            </a:r>
+            <a:endParaRPr lang="en-US" sz="1350" dirty="0"/>
+          </a:p>
+        </p:txBody>
+      </p:sp>
+      <p:sp>
+        <p:nvSpPr>
+          <p:cNvPr id="15" name="Shape 12"/>
+          <p:cNvSpPr/>
+          <p:nvPr/>
+        </p:nvSpPr>
+        <p:spPr>
+          <a:xfrm>
+            <a:off x="502920" y="3392424"/>
+            <a:ext cx="384048" cy="384048"/>
+          </a:xfrm>
+          <a:prstGeom prst="ellipse">
+            <a:avLst/>
+          </a:prstGeom>
+          <a:solidFill>
+            <a:srgbClr val="E35205"/>
+          </a:solidFill>
+          <a:ln/>
+        </p:spPr>
+      </p:sp>
+      <p:sp>
+        <p:nvSpPr>
+          <p:cNvPr id="16" name="Text 13"/>
+          <p:cNvSpPr/>
+          <p:nvPr/>
+        </p:nvSpPr>
+        <p:spPr>
+          <a:xfrm>
+            <a:off x="502920" y="3392424"/>
+            <a:ext cx="384048" cy="384048"/>
           </a:xfrm>
           <a:prstGeom prst="rect">
             <a:avLst/>
@@ -8147,20 +8164,100 @@
         </p:spPr>
         <p:txBody>
           <a:bodyPr wrap="square" lIns="0" tIns="0" rIns="0" bIns="0" rtlCol="0" anchor="ctr"/>
+          <a:lstStyle/>
+          <a:p>
+            <a:pPr algn="ctr" indent="0" marL="0">
+              <a:buNone/>
+            </a:pPr>
+            <a:r>
+              <a:rPr lang="en-US" sz="1500" b="1" dirty="0">
+                <a:solidFill>
+                  <a:srgbClr val="0E1726"/>
+                </a:solidFill>
+                <a:latin typeface="Arial" pitchFamily="34" charset="0"/>
+                <a:ea typeface="Arial" pitchFamily="34" charset="-122"/>
+                <a:cs typeface="Arial" pitchFamily="34" charset="-120"/>
+              </a:rPr>
+              <a:t>4</a:t>
+            </a:r>
+            <a:endParaRPr lang="en-US" sz="1500" dirty="0"/>
+          </a:p>
+        </p:txBody>
+      </p:sp>
+      <p:sp>
+        <p:nvSpPr>
+          <p:cNvPr id="17" name="Text 14"/>
+          <p:cNvSpPr/>
+          <p:nvPr/>
+        </p:nvSpPr>
+        <p:spPr>
+          <a:xfrm>
+            <a:off x="1051560" y="3392424"/>
+            <a:ext cx="7589520" cy="402336"/>
+          </a:xfrm>
+          <a:prstGeom prst="rect">
+            <a:avLst/>
+          </a:prstGeom>
+          <a:noFill/>
+          <a:ln/>
+        </p:spPr>
+        <p:txBody>
+          <a:bodyPr wrap="square" lIns="0" tIns="0" rIns="0" bIns="0" rtlCol="0" anchor="ctr">
+            <a:normAutofit/>
+          </a:bodyPr>
           <a:lstStyle/>
           <a:p>
             <a:pPr indent="0" marL="0">
               <a:buNone/>
             </a:pPr>
             <a:r>
-              <a:rPr lang="en-US" sz="900" dirty="0">
-                <a:solidFill>
-                  <a:srgbClr val="64748B"/>
+              <a:rPr lang="en-US" sz="1350" dirty="0">
+                <a:solidFill>
+                  <a:srgbClr val="1F2937"/>
                 </a:solidFill>
                 <a:latin typeface="Calibri" pitchFamily="34" charset="0"/>
                 <a:ea typeface="Calibri" pitchFamily="34" charset="-122"/>
                 <a:cs typeface="Calibri" pitchFamily="34" charset="-120"/>
               </a:rPr>
+              <a:t>Unrestricted upload</a:t>
+            </a:r>
+            <a:endParaRPr lang="en-US" sz="1350" dirty="0"/>
+          </a:p>
+        </p:txBody>
+      </p:sp>
+      <p:sp>
+        <p:nvSpPr>
+          <p:cNvPr id="18" name="Text 15"/>
+          <p:cNvSpPr/>
+          <p:nvPr/>
+        </p:nvSpPr>
+        <p:spPr>
+          <a:xfrm>
+            <a:off x="457200" y="4800600"/>
+            <a:ext cx="6949440" cy="274320"/>
+          </a:xfrm>
+          <a:prstGeom prst="rect">
+            <a:avLst/>
+          </a:prstGeom>
+          <a:noFill/>
+          <a:ln/>
+        </p:spPr>
+        <p:txBody>
+          <a:bodyPr wrap="square" lIns="0" tIns="0" rIns="0" bIns="0" rtlCol="0" anchor="ctr"/>
+          <a:lstStyle/>
+          <a:p>
+            <a:pPr indent="0" marL="0">
+              <a:buNone/>
+            </a:pPr>
+            <a:r>
+              <a:rPr lang="en-US" sz="900" dirty="0">
+                <a:solidFill>
+                  <a:srgbClr val="64748B"/>
+                </a:solidFill>
+                <a:latin typeface="Calibri" pitchFamily="34" charset="0"/>
+                <a:ea typeface="Calibri" pitchFamily="34" charset="-122"/>
+                <a:cs typeface="Calibri" pitchFamily="34" charset="-120"/>
+              </a:rPr>
               <a:t>Software Security · Week 4</a:t>
             </a:r>
             <a:endParaRPr lang="en-US" sz="900" dirty="0"/>
@@ -8169,7 +8266,7 @@
       </p:sp>
       <p:pic>
         <p:nvPicPr>
-          <p:cNvPr id="8" name="Image 1" descr="/Users/pop7/Library/CloudStorage/OneDrive-MonsterConnectCo.,Ltd/Lecture/KOSEN69 - software-security/slides/pptx/assets/logo-small.png">    </p:cNvPr>
+          <p:cNvPr id="19" name="Image 1" descr="/private/tmp/claude-501/-Users-pop7-Library-CloudStorage-OneDrive-MonsterConnectCo--Ltd-Lecture-KOSEN69---software-security/e6d6556f-17de-403d-a9a0-cf2f846149b4/scratchpad/pptx2/src/slides/pptx/assets/logo-small.png">    </p:cNvPr>
           <p:cNvPicPr>
             <a:picLocks noChangeAspect="1"/>
           </p:cNvPicPr>
@@ -8307,7 +8404,7 @@
                 <a:ea typeface="Arial" pitchFamily="34" charset="-122"/>
                 <a:cs typeface="Arial" pitchFamily="34" charset="-120"/>
               </a:rPr>
-              <a:t>Key takeaways</a:t>
+              <a:t>⚔️ Game — SQLi Warm-up (cont.)</a:t>
             </a:r>
             <a:endParaRPr lang="en-US" sz="2600" dirty="0"/>
           </a:p>
@@ -8321,25 +8418,16 @@
         </p:nvSpPr>
         <p:spPr>
           <a:xfrm>
-            <a:off x="457200" y="1325880"/>
-            <a:ext cx="8229600" cy="1207008"/>
-          </a:xfrm>
-          <a:prstGeom prst="roundRect">
-            <a:avLst>
-              <a:gd name="adj" fmla="val 6061"/>
-            </a:avLst>
+            <a:off x="502920" y="1325880"/>
+            <a:ext cx="384048" cy="384048"/>
+          </a:xfrm>
+          <a:prstGeom prst="ellipse">
+            <a:avLst/>
           </a:prstGeom>
           <a:solidFill>
-            <a:srgbClr val="F1F5F9"/>
+            <a:srgbClr val="E35205"/>
           </a:solidFill>
           <a:ln/>
-          <a:effectLst>
-            <a:outerShdw sx="100000" sy="100000" kx="0" ky="0" algn="bl" rotWithShape="0" blurRad="76200" dist="25400" dir="5400000">
-              <a:srgbClr val="000000">
-                <a:alpha val="12000"/>
-              </a:srgbClr>
-            </a:outerShdw>
-          </a:effectLst>
         </p:spPr>
       </p:sp>
       <p:sp>
@@ -8350,8 +8438,8 @@
         </p:nvSpPr>
         <p:spPr>
           <a:xfrm>
-            <a:off x="731520" y="1435608"/>
-            <a:ext cx="7680960" cy="987552"/>
+            <a:off x="502920" y="1325880"/>
+            <a:ext cx="384048" cy="384048"/>
           </a:xfrm>
           <a:prstGeom prst="rect">
             <a:avLst/>
@@ -8360,20 +8448,55 @@
           <a:ln/>
         </p:spPr>
         <p:txBody>
-          <a:bodyPr wrap="square" lIns="0" tIns="0" rIns="0" bIns="0" rtlCol="0" anchor="t">
+          <a:bodyPr wrap="square" lIns="0" tIns="0" rIns="0" bIns="0" rtlCol="0" anchor="ctr"/>
+          <a:lstStyle/>
+          <a:p>
+            <a:pPr algn="ctr" indent="0" marL="0">
+              <a:buNone/>
+            </a:pPr>
+            <a:r>
+              <a:rPr lang="en-US" sz="1500" b="1" dirty="0">
+                <a:solidFill>
+                  <a:srgbClr val="0E1726"/>
+                </a:solidFill>
+                <a:latin typeface="Arial" pitchFamily="34" charset="0"/>
+                <a:ea typeface="Arial" pitchFamily="34" charset="-122"/>
+                <a:cs typeface="Arial" pitchFamily="34" charset="-120"/>
+              </a:rPr>
+              <a:t>5</a:t>
+            </a:r>
+            <a:endParaRPr lang="en-US" sz="1500" dirty="0"/>
+          </a:p>
+        </p:txBody>
+      </p:sp>
+      <p:sp>
+        <p:nvSpPr>
+          <p:cNvPr id="7" name="Text 4"/>
+          <p:cNvSpPr/>
+          <p:nvPr/>
+        </p:nvSpPr>
+        <p:spPr>
+          <a:xfrm>
+            <a:off x="1051560" y="1325880"/>
+            <a:ext cx="7589520" cy="658368"/>
+          </a:xfrm>
+          <a:prstGeom prst="rect">
+            <a:avLst/>
+          </a:prstGeom>
+          <a:noFill/>
+          <a:ln/>
+        </p:spPr>
+        <p:txBody>
+          <a:bodyPr wrap="square" lIns="0" tIns="0" rIns="0" bIns="0" rtlCol="0" anchor="ctr">
             <a:normAutofit/>
           </a:bodyPr>
           <a:lstStyle/>
           <a:p>
-            <a:pPr marL="342900" indent="-342900">
-              <a:spcAft>
-                <a:spcPts val="600"/>
-              </a:spcAft>
-              <a:buSzPct val="100000"/>
-              <a:buChar char="•"/>
-            </a:pPr>
-            <a:r>
-              <a:rPr lang="en-US" sz="1400" dirty="0">
+            <a:pPr indent="0" marL="0">
+              <a:buNone/>
+            </a:pPr>
+            <a:r>
+              <a:rPr lang="en-US" sz="1350" dirty="0">
                 <a:solidFill>
                   <a:srgbClr val="1F2937"/>
                 </a:solidFill>
@@ -8381,87 +8504,45 @@
                 <a:ea typeface="Calibri" pitchFamily="34" charset="-122"/>
                 <a:cs typeface="Calibri" pitchFamily="34" charset="-120"/>
               </a:rPr>
-              <a:t>Never build interpreter strings from untrusted input</a:t>
-            </a:r>
-            <a:endParaRPr lang="en-US" sz="1400" dirty="0"/>
-          </a:p>
-          <a:p>
-            <a:pPr marL="342900" indent="-342900">
-              <a:spcAft>
-                <a:spcPts val="600"/>
-              </a:spcAft>
-              <a:buSzPct val="100000"/>
-              <a:buChar char="•"/>
-            </a:pPr>
-            <a:r>
-              <a:rPr lang="en-US" sz="1400" dirty="0">
-                <a:solidFill>
-                  <a:srgbClr val="1F2937"/>
+              <a:t>Warm-up cleared: run solution_app.py, prove all four attacks now fail, cite the exact fix line for each</a:t>
+            </a:r>
+            <a:endParaRPr lang="en-US" sz="1350" dirty="0"/>
+          </a:p>
+        </p:txBody>
+      </p:sp>
+      <p:sp>
+        <p:nvSpPr>
+          <p:cNvPr id="8" name="Text 5"/>
+          <p:cNvSpPr/>
+          <p:nvPr/>
+        </p:nvSpPr>
+        <p:spPr>
+          <a:xfrm>
+            <a:off x="457200" y="4800600"/>
+            <a:ext cx="6949440" cy="274320"/>
+          </a:xfrm>
+          <a:prstGeom prst="rect">
+            <a:avLst/>
+          </a:prstGeom>
+          <a:noFill/>
+          <a:ln/>
+        </p:spPr>
+        <p:txBody>
+          <a:bodyPr wrap="square" lIns="0" tIns="0" rIns="0" bIns="0" rtlCol="0" anchor="ctr"/>
+          <a:lstStyle/>
+          <a:p>
+            <a:pPr indent="0" marL="0">
+              <a:buNone/>
+            </a:pPr>
+            <a:r>
+              <a:rPr lang="en-US" sz="900" dirty="0">
+                <a:solidFill>
+                  <a:srgbClr val="64748B"/>
                 </a:solidFill>
                 <a:latin typeface="Calibri" pitchFamily="34" charset="0"/>
                 <a:ea typeface="Calibri" pitchFamily="34" charset="-122"/>
                 <a:cs typeface="Calibri" pitchFamily="34" charset="-120"/>
               </a:rPr>
-              <a:t>Parameterize first; validate as defense-in-depth</a:t>
-            </a:r>
-            <a:endParaRPr lang="en-US" sz="1400" dirty="0"/>
-          </a:p>
-          <a:p>
-            <a:pPr marL="342900" indent="-342900">
-              <a:spcAft>
-                <a:spcPts val="600"/>
-              </a:spcAft>
-              <a:buSzPct val="100000"/>
-              <a:buChar char="•"/>
-            </a:pPr>
-            <a:r>
-              <a:rPr lang="en-US" sz="1400" dirty="0">
-                <a:solidFill>
-                  <a:srgbClr val="1F2937"/>
-                </a:solidFill>
-                <a:latin typeface="Calibri" pitchFamily="34" charset="0"/>
-                <a:ea typeface="Calibri" pitchFamily="34" charset="-122"/>
-                <a:cs typeface="Calibri" pitchFamily="34" charset="-120"/>
-              </a:rPr>
-              <a:t>Injection = data treated as code</a:t>
-            </a:r>
-            <a:endParaRPr lang="en-US" sz="1400" dirty="0"/>
-          </a:p>
-        </p:txBody>
-      </p:sp>
-      <p:sp>
-        <p:nvSpPr>
-          <p:cNvPr id="7" name="Text 4"/>
-          <p:cNvSpPr/>
-          <p:nvPr/>
-        </p:nvSpPr>
-        <p:spPr>
-          <a:xfrm>
-            <a:off x="457200" y="4800600"/>
-            <a:ext cx="6949440" cy="274320"/>
-          </a:xfrm>
-          <a:prstGeom prst="rect">
-            <a:avLst/>
-          </a:prstGeom>
-          <a:noFill/>
-          <a:ln/>
-        </p:spPr>
-        <p:txBody>
-          <a:bodyPr wrap="square" lIns="0" tIns="0" rIns="0" bIns="0" rtlCol="0" anchor="ctr"/>
-          <a:lstStyle/>
-          <a:p>
-            <a:pPr indent="0" marL="0">
-              <a:buNone/>
-            </a:pPr>
-            <a:r>
-              <a:rPr lang="en-US" sz="900" dirty="0">
-                <a:solidFill>
-                  <a:srgbClr val="64748B"/>
-                </a:solidFill>
-                <a:latin typeface="Calibri" pitchFamily="34" charset="0"/>
-                <a:ea typeface="Calibri" pitchFamily="34" charset="-122"/>
-                <a:cs typeface="Calibri" pitchFamily="34" charset="-120"/>
-              </a:rPr>
               <a:t>Software Security · Week 4</a:t>
             </a:r>
             <a:endParaRPr lang="en-US" sz="900" dirty="0"/>
@@ -8470,7 +8551,7 @@
       </p:sp>
       <p:pic>
         <p:nvPicPr>
-          <p:cNvPr id="8" name="Image 1" descr="/Users/pop7/Library/CloudStorage/OneDrive-MonsterConnectCo.,Ltd/Lecture/KOSEN69 - software-security/slides/pptx/assets/logo-small.png">    </p:cNvPr>
+          <p:cNvPr id="9" name="Image 1" descr="/private/tmp/claude-501/-Users-pop7-Library-CloudStorage-OneDrive-MonsterConnectCo--Ltd-Lecture-KOSEN69---software-security/e6d6556f-17de-403d-a9a0-cf2f846149b4/scratchpad/pptx2/src/slides/pptx/assets/logo-small.png">    </p:cNvPr>
           <p:cNvPicPr>
             <a:picLocks noChangeAspect="1"/>
           </p:cNvPicPr>
@@ -8526,14 +8607,65 @@
       </p:grpSpPr>
       <p:sp>
         <p:nvSpPr>
-          <p:cNvPr id="2" name="Text 0"/>
-          <p:cNvSpPr/>
-          <p:nvPr/>
-        </p:nvSpPr>
-        <p:spPr>
-          <a:xfrm>
-            <a:off x="640080" y="1737360"/>
-            <a:ext cx="7863840" cy="1097280"/>
+          <p:cNvPr id="2" name="Shape 0"/>
+          <p:cNvSpPr/>
+          <p:nvPr/>
+        </p:nvSpPr>
+        <p:spPr>
+          <a:xfrm>
+            <a:off x="457200" y="384048"/>
+            <a:ext cx="530352" cy="530352"/>
+          </a:xfrm>
+          <a:prstGeom prst="ellipse">
+            <a:avLst/>
+          </a:prstGeom>
+          <a:solidFill>
+            <a:srgbClr val="E35205"/>
+          </a:solidFill>
+          <a:ln/>
+          <a:effectLst>
+            <a:outerShdw sx="100000" sy="100000" kx="0" ky="0" algn="bl" rotWithShape="0" blurRad="76200" dist="25400" dir="5400000">
+              <a:srgbClr val="000000">
+                <a:alpha val="12000"/>
+              </a:srgbClr>
+            </a:outerShdw>
+          </a:effectLst>
+        </p:spPr>
+      </p:sp>
+      <p:pic>
+        <p:nvPicPr>
+          <p:cNvPr id="3" name="Image 0" descr="preencoded.png">    </p:cNvPr>
+          <p:cNvPicPr>
+            <a:picLocks noChangeAspect="1"/>
+          </p:cNvPicPr>
+          <p:nvPr/>
+        </p:nvPicPr>
+        <p:blipFill>
+          <a:blip r:embed="rId1"/>
+          <a:stretch>
+            <a:fillRect/>
+          </a:stretch>
+        </p:blipFill>
+        <p:spPr>
+          <a:xfrm>
+            <a:off x="594360" y="521208"/>
+            <a:ext cx="256032" cy="256032"/>
+          </a:xfrm>
+          <a:prstGeom prst="rect">
+            <a:avLst/>
+          </a:prstGeom>
+        </p:spPr>
+      </p:pic>
+      <p:sp>
+        <p:nvSpPr>
+          <p:cNvPr id="4" name="Text 1"/>
+          <p:cNvSpPr/>
+          <p:nvPr/>
+        </p:nvSpPr>
+        <p:spPr>
+          <a:xfrm>
+            <a:off x="1143000" y="329184"/>
+            <a:ext cx="7498080" cy="603504"/>
           </a:xfrm>
           <a:prstGeom prst="rect">
             <a:avLst/>
@@ -8549,7 +8681,7 @@
               <a:buNone/>
             </a:pPr>
             <a:r>
-              <a:rPr lang="en-US" sz="4600" b="1" dirty="0">
+              <a:rPr lang="en-US" sz="2600" b="1" dirty="0">
                 <a:solidFill>
                   <a:srgbClr val="1F2937"/>
                 </a:solidFill>
@@ -8557,22 +8689,44 @@
                 <a:ea typeface="Arial" pitchFamily="34" charset="-122"/>
                 <a:cs typeface="Arial" pitchFamily="34" charset="-120"/>
               </a:rPr>
-              <a:t>Questions?</a:t>
-            </a:r>
-            <a:endParaRPr lang="en-US" sz="4600" dirty="0"/>
-          </a:p>
-        </p:txBody>
-      </p:sp>
-      <p:sp>
-        <p:nvSpPr>
-          <p:cNvPr id="3" name="Text 1"/>
-          <p:cNvSpPr/>
-          <p:nvPr/>
-        </p:nvSpPr>
-        <p:spPr>
-          <a:xfrm>
-            <a:off x="658368" y="2834640"/>
-            <a:ext cx="7863840" cy="731520"/>
+              <a:t>Lab steps</a:t>
+            </a:r>
+            <a:endParaRPr lang="en-US" sz="2600" dirty="0"/>
+          </a:p>
+        </p:txBody>
+      </p:sp>
+      <p:sp>
+        <p:nvSpPr>
+          <p:cNvPr id="5" name="Shape 2"/>
+          <p:cNvSpPr/>
+          <p:nvPr/>
+        </p:nvSpPr>
+        <p:spPr>
+          <a:xfrm>
+            <a:off x="457200" y="1325880"/>
+            <a:ext cx="8229600" cy="822960"/>
+          </a:xfrm>
+          <a:prstGeom prst="roundRect">
+            <a:avLst>
+              <a:gd name="adj" fmla="val 8889"/>
+            </a:avLst>
+          </a:prstGeom>
+          <a:solidFill>
+            <a:srgbClr val="E8EDF3"/>
+          </a:solidFill>
+          <a:ln/>
+        </p:spPr>
+      </p:sp>
+      <p:sp>
+        <p:nvSpPr>
+          <p:cNvPr id="6" name="Text 3"/>
+          <p:cNvSpPr/>
+          <p:nvPr/>
+        </p:nvSpPr>
+        <p:spPr>
+          <a:xfrm>
+            <a:off x="731520" y="1325880"/>
+            <a:ext cx="7680960" cy="822960"/>
           </a:xfrm>
           <a:prstGeom prst="rect">
             <a:avLst/>
@@ -8581,14 +8735,16 @@
           <a:ln/>
         </p:spPr>
         <p:txBody>
-          <a:bodyPr wrap="square" lIns="0" tIns="0" rIns="0" bIns="0" rtlCol="0" anchor="ctr"/>
+          <a:bodyPr wrap="square" lIns="0" tIns="0" rIns="0" bIns="0" rtlCol="0" anchor="ctr">
+            <a:normAutofit/>
+          </a:bodyPr>
           <a:lstStyle/>
           <a:p>
             <a:pPr indent="0" marL="0">
               <a:buNone/>
             </a:pPr>
             <a:r>
-              <a:rPr lang="en-US" sz="1800" dirty="0">
+              <a:rPr lang="en-US" sz="1400" i="1" dirty="0">
                 <a:solidFill>
                   <a:srgbClr val="E35205"/>
                 </a:solidFill>
@@ -8596,15 +8752,1564 @@
                 <a:ea typeface="Calibri" pitchFamily="34" charset="-122"/>
                 <a:cs typeface="Calibri" pitchFamily="34" charset="-120"/>
               </a:rPr>
-              <a:t>Next week: XSS &amp; client-side risks</a:t>
-            </a:r>
-            <a:endParaRPr lang="en-US" sz="1800" dirty="0"/>
+              <a:t>📋 Worksheet 4 — labs/week04-injection/worksheet.md (Part 3) · kickoff: docker compose up → http://localhost:8080</a:t>
+            </a:r>
+            <a:endParaRPr lang="en-US" sz="1400" dirty="0"/>
+          </a:p>
+        </p:txBody>
+      </p:sp>
+      <p:sp>
+        <p:nvSpPr>
+          <p:cNvPr id="7" name="Shape 4"/>
+          <p:cNvSpPr/>
+          <p:nvPr/>
+        </p:nvSpPr>
+        <p:spPr>
+          <a:xfrm>
+            <a:off x="457200" y="2313432"/>
+            <a:ext cx="8229600" cy="493776"/>
+          </a:xfrm>
+          <a:prstGeom prst="roundRect">
+            <a:avLst>
+              <a:gd name="adj" fmla="val 11111"/>
+            </a:avLst>
+          </a:prstGeom>
+          <a:solidFill>
+            <a:srgbClr val="0A1020"/>
+          </a:solidFill>
+          <a:ln w="12700">
+            <a:solidFill>
+              <a:srgbClr val="E8EDF3"/>
+            </a:solidFill>
+            <a:prstDash val="solid"/>
+          </a:ln>
+        </p:spPr>
+      </p:sp>
+      <p:sp>
+        <p:nvSpPr>
+          <p:cNvPr id="8" name="Text 5"/>
+          <p:cNvSpPr/>
+          <p:nvPr/>
+        </p:nvSpPr>
+        <p:spPr>
+          <a:xfrm>
+            <a:off x="640080" y="2386584"/>
+            <a:ext cx="7863840" cy="347472"/>
+          </a:xfrm>
+          <a:prstGeom prst="rect">
+            <a:avLst/>
+          </a:prstGeom>
+          <a:noFill/>
+          <a:ln/>
+        </p:spPr>
+        <p:txBody>
+          <a:bodyPr wrap="square" lIns="0" tIns="0" rIns="0" bIns="0" rtlCol="0" anchor="t">
+            <a:normAutofit/>
+          </a:bodyPr>
+          <a:lstStyle/>
+          <a:p>
+            <a:pPr indent="0" marL="0">
+              <a:buNone/>
+            </a:pPr>
+            <a:r>
+              <a:rPr lang="en-US" sz="1150" dirty="0">
+                <a:solidFill>
+                  <a:srgbClr val="9FE7D6"/>
+                </a:solidFill>
+                <a:latin typeface="Courier New" pitchFamily="34" charset="0"/>
+                <a:ea typeface="Courier New" pitchFamily="34" charset="-122"/>
+                <a:cs typeface="Courier New" pitchFamily="34" charset="-120"/>
+              </a:rPr>
+              <a:t>docker run --rm -p 80:80 vulnerables/web-dvwa   # optional extra target (or Juice Shop)</a:t>
+            </a:r>
+            <a:endParaRPr lang="en-US" sz="1150" dirty="0"/>
+          </a:p>
+        </p:txBody>
+      </p:sp>
+      <p:sp>
+        <p:nvSpPr>
+          <p:cNvPr id="9" name="Shape 6"/>
+          <p:cNvSpPr/>
+          <p:nvPr/>
+        </p:nvSpPr>
+        <p:spPr>
+          <a:xfrm>
+            <a:off x="502920" y="2971800"/>
+            <a:ext cx="384048" cy="384048"/>
+          </a:xfrm>
+          <a:prstGeom prst="ellipse">
+            <a:avLst/>
+          </a:prstGeom>
+          <a:solidFill>
+            <a:srgbClr val="E35205"/>
+          </a:solidFill>
+          <a:ln/>
+        </p:spPr>
+      </p:sp>
+      <p:sp>
+        <p:nvSpPr>
+          <p:cNvPr id="10" name="Text 7"/>
+          <p:cNvSpPr/>
+          <p:nvPr/>
+        </p:nvSpPr>
+        <p:spPr>
+          <a:xfrm>
+            <a:off x="502920" y="2971800"/>
+            <a:ext cx="384048" cy="384048"/>
+          </a:xfrm>
+          <a:prstGeom prst="rect">
+            <a:avLst/>
+          </a:prstGeom>
+          <a:noFill/>
+          <a:ln/>
+        </p:spPr>
+        <p:txBody>
+          <a:bodyPr wrap="square" lIns="0" tIns="0" rIns="0" bIns="0" rtlCol="0" anchor="ctr"/>
+          <a:lstStyle/>
+          <a:p>
+            <a:pPr algn="ctr" indent="0" marL="0">
+              <a:buNone/>
+            </a:pPr>
+            <a:r>
+              <a:rPr lang="en-US" sz="1500" b="1" dirty="0">
+                <a:solidFill>
+                  <a:srgbClr val="0E1726"/>
+                </a:solidFill>
+                <a:latin typeface="Arial" pitchFamily="34" charset="0"/>
+                <a:ea typeface="Arial" pitchFamily="34" charset="-122"/>
+                <a:cs typeface="Arial" pitchFamily="34" charset="-120"/>
+              </a:rPr>
+              <a:t>1</a:t>
+            </a:r>
+            <a:endParaRPr lang="en-US" sz="1500" dirty="0"/>
+          </a:p>
+        </p:txBody>
+      </p:sp>
+      <p:sp>
+        <p:nvSpPr>
+          <p:cNvPr id="11" name="Text 8"/>
+          <p:cNvSpPr/>
+          <p:nvPr/>
+        </p:nvSpPr>
+        <p:spPr>
+          <a:xfrm>
+            <a:off x="1051560" y="2971800"/>
+            <a:ext cx="7589520" cy="402336"/>
+          </a:xfrm>
+          <a:prstGeom prst="rect">
+            <a:avLst/>
+          </a:prstGeom>
+          <a:noFill/>
+          <a:ln/>
+        </p:spPr>
+        <p:txBody>
+          <a:bodyPr wrap="square" lIns="0" tIns="0" rIns="0" bIns="0" rtlCol="0" anchor="ctr">
+            <a:normAutofit/>
+          </a:bodyPr>
+          <a:lstStyle/>
+          <a:p>
+            <a:pPr indent="0" marL="0">
+              <a:buNone/>
+            </a:pPr>
+            <a:r>
+              <a:rPr lang="en-US" sz="1350" dirty="0">
+                <a:solidFill>
+                  <a:srgbClr val="1F2937"/>
+                </a:solidFill>
+                <a:latin typeface="Calibri" pitchFamily="34" charset="0"/>
+                <a:ea typeface="Calibri" pitchFamily="34" charset="-122"/>
+                <a:cs typeface="Calibri" pitchFamily="34" charset="-120"/>
+              </a:rPr>
+              <a:t>Find an injectable parameter, bypass auth</a:t>
+            </a:r>
+            <a:endParaRPr lang="en-US" sz="1350" dirty="0"/>
+          </a:p>
+        </p:txBody>
+      </p:sp>
+      <p:sp>
+        <p:nvSpPr>
+          <p:cNvPr id="12" name="Shape 9"/>
+          <p:cNvSpPr/>
+          <p:nvPr/>
+        </p:nvSpPr>
+        <p:spPr>
+          <a:xfrm>
+            <a:off x="502920" y="3447288"/>
+            <a:ext cx="384048" cy="384048"/>
+          </a:xfrm>
+          <a:prstGeom prst="ellipse">
+            <a:avLst/>
+          </a:prstGeom>
+          <a:solidFill>
+            <a:srgbClr val="E35205"/>
+          </a:solidFill>
+          <a:ln/>
+        </p:spPr>
+      </p:sp>
+      <p:sp>
+        <p:nvSpPr>
+          <p:cNvPr id="13" name="Text 10"/>
+          <p:cNvSpPr/>
+          <p:nvPr/>
+        </p:nvSpPr>
+        <p:spPr>
+          <a:xfrm>
+            <a:off x="502920" y="3447288"/>
+            <a:ext cx="384048" cy="384048"/>
+          </a:xfrm>
+          <a:prstGeom prst="rect">
+            <a:avLst/>
+          </a:prstGeom>
+          <a:noFill/>
+          <a:ln/>
+        </p:spPr>
+        <p:txBody>
+          <a:bodyPr wrap="square" lIns="0" tIns="0" rIns="0" bIns="0" rtlCol="0" anchor="ctr"/>
+          <a:lstStyle/>
+          <a:p>
+            <a:pPr algn="ctr" indent="0" marL="0">
+              <a:buNone/>
+            </a:pPr>
+            <a:r>
+              <a:rPr lang="en-US" sz="1500" b="1" dirty="0">
+                <a:solidFill>
+                  <a:srgbClr val="0E1726"/>
+                </a:solidFill>
+                <a:latin typeface="Arial" pitchFamily="34" charset="0"/>
+                <a:ea typeface="Arial" pitchFamily="34" charset="-122"/>
+                <a:cs typeface="Arial" pitchFamily="34" charset="-120"/>
+              </a:rPr>
+              <a:t>2</a:t>
+            </a:r>
+            <a:endParaRPr lang="en-US" sz="1500" dirty="0"/>
+          </a:p>
+        </p:txBody>
+      </p:sp>
+      <p:sp>
+        <p:nvSpPr>
+          <p:cNvPr id="14" name="Text 11"/>
+          <p:cNvSpPr/>
+          <p:nvPr/>
+        </p:nvSpPr>
+        <p:spPr>
+          <a:xfrm>
+            <a:off x="1051560" y="3447288"/>
+            <a:ext cx="7589520" cy="402336"/>
+          </a:xfrm>
+          <a:prstGeom prst="rect">
+            <a:avLst/>
+          </a:prstGeom>
+          <a:noFill/>
+          <a:ln/>
+        </p:spPr>
+        <p:txBody>
+          <a:bodyPr wrap="square" lIns="0" tIns="0" rIns="0" bIns="0" rtlCol="0" anchor="ctr">
+            <a:normAutofit/>
+          </a:bodyPr>
+          <a:lstStyle/>
+          <a:p>
+            <a:pPr indent="0" marL="0">
+              <a:buNone/>
+            </a:pPr>
+            <a:r>
+              <a:rPr lang="en-US" sz="1350" dirty="0">
+                <a:solidFill>
+                  <a:srgbClr val="1F2937"/>
+                </a:solidFill>
+                <a:latin typeface="Calibri" pitchFamily="34" charset="0"/>
+                <a:ea typeface="Calibri" pitchFamily="34" charset="-122"/>
+                <a:cs typeface="Calibri" pitchFamily="34" charset="-120"/>
+              </a:rPr>
+              <a:t>Extract data (UNION dump)</a:t>
+            </a:r>
+            <a:endParaRPr lang="en-US" sz="1350" dirty="0"/>
+          </a:p>
+        </p:txBody>
+      </p:sp>
+      <p:sp>
+        <p:nvSpPr>
+          <p:cNvPr id="15" name="Shape 12"/>
+          <p:cNvSpPr/>
+          <p:nvPr/>
+        </p:nvSpPr>
+        <p:spPr>
+          <a:xfrm>
+            <a:off x="502920" y="3922776"/>
+            <a:ext cx="384048" cy="384048"/>
+          </a:xfrm>
+          <a:prstGeom prst="ellipse">
+            <a:avLst/>
+          </a:prstGeom>
+          <a:solidFill>
+            <a:srgbClr val="E35205"/>
+          </a:solidFill>
+          <a:ln/>
+        </p:spPr>
+      </p:sp>
+      <p:sp>
+        <p:nvSpPr>
+          <p:cNvPr id="16" name="Text 13"/>
+          <p:cNvSpPr/>
+          <p:nvPr/>
+        </p:nvSpPr>
+        <p:spPr>
+          <a:xfrm>
+            <a:off x="502920" y="3922776"/>
+            <a:ext cx="384048" cy="384048"/>
+          </a:xfrm>
+          <a:prstGeom prst="rect">
+            <a:avLst/>
+          </a:prstGeom>
+          <a:noFill/>
+          <a:ln/>
+        </p:spPr>
+        <p:txBody>
+          <a:bodyPr wrap="square" lIns="0" tIns="0" rIns="0" bIns="0" rtlCol="0" anchor="ctr"/>
+          <a:lstStyle/>
+          <a:p>
+            <a:pPr algn="ctr" indent="0" marL="0">
+              <a:buNone/>
+            </a:pPr>
+            <a:r>
+              <a:rPr lang="en-US" sz="1500" b="1" dirty="0">
+                <a:solidFill>
+                  <a:srgbClr val="0E1726"/>
+                </a:solidFill>
+                <a:latin typeface="Arial" pitchFamily="34" charset="0"/>
+                <a:ea typeface="Arial" pitchFamily="34" charset="-122"/>
+                <a:cs typeface="Arial" pitchFamily="34" charset="-120"/>
+              </a:rPr>
+              <a:t>3</a:t>
+            </a:r>
+            <a:endParaRPr lang="en-US" sz="1500" dirty="0"/>
+          </a:p>
+        </p:txBody>
+      </p:sp>
+      <p:sp>
+        <p:nvSpPr>
+          <p:cNvPr id="17" name="Text 14"/>
+          <p:cNvSpPr/>
+          <p:nvPr/>
+        </p:nvSpPr>
+        <p:spPr>
+          <a:xfrm>
+            <a:off x="1051560" y="3922776"/>
+            <a:ext cx="7589520" cy="402336"/>
+          </a:xfrm>
+          <a:prstGeom prst="rect">
+            <a:avLst/>
+          </a:prstGeom>
+          <a:noFill/>
+          <a:ln/>
+        </p:spPr>
+        <p:txBody>
+          <a:bodyPr wrap="square" lIns="0" tIns="0" rIns="0" bIns="0" rtlCol="0" anchor="ctr">
+            <a:normAutofit/>
+          </a:bodyPr>
+          <a:lstStyle/>
+          <a:p>
+            <a:pPr indent="0" marL="0">
+              <a:buNone/>
+            </a:pPr>
+            <a:r>
+              <a:rPr lang="en-US" sz="1350" dirty="0">
+                <a:solidFill>
+                  <a:srgbClr val="1F2937"/>
+                </a:solidFill>
+                <a:latin typeface="Calibri" pitchFamily="34" charset="0"/>
+                <a:ea typeface="Calibri" pitchFamily="34" charset="-122"/>
+                <a:cs typeface="Calibri" pitchFamily="34" charset="-120"/>
+              </a:rPr>
+              <a:t>Achieve command injection</a:t>
+            </a:r>
+            <a:endParaRPr lang="en-US" sz="1350" dirty="0"/>
+          </a:p>
+        </p:txBody>
+      </p:sp>
+      <p:sp>
+        <p:nvSpPr>
+          <p:cNvPr id="18" name="Text 15"/>
+          <p:cNvSpPr/>
+          <p:nvPr/>
+        </p:nvSpPr>
+        <p:spPr>
+          <a:xfrm>
+            <a:off x="457200" y="4800600"/>
+            <a:ext cx="6949440" cy="274320"/>
+          </a:xfrm>
+          <a:prstGeom prst="rect">
+            <a:avLst/>
+          </a:prstGeom>
+          <a:noFill/>
+          <a:ln/>
+        </p:spPr>
+        <p:txBody>
+          <a:bodyPr wrap="square" lIns="0" tIns="0" rIns="0" bIns="0" rtlCol="0" anchor="ctr"/>
+          <a:lstStyle/>
+          <a:p>
+            <a:pPr indent="0" marL="0">
+              <a:buNone/>
+            </a:pPr>
+            <a:r>
+              <a:rPr lang="en-US" sz="900" dirty="0">
+                <a:solidFill>
+                  <a:srgbClr val="64748B"/>
+                </a:solidFill>
+                <a:latin typeface="Calibri" pitchFamily="34" charset="0"/>
+                <a:ea typeface="Calibri" pitchFamily="34" charset="-122"/>
+                <a:cs typeface="Calibri" pitchFamily="34" charset="-120"/>
+              </a:rPr>
+              <a:t>Software Security · Week 4</a:t>
+            </a:r>
+            <a:endParaRPr lang="en-US" sz="900" dirty="0"/>
           </a:p>
         </p:txBody>
       </p:sp>
       <p:pic>
         <p:nvPicPr>
-          <p:cNvPr id="4" name="Image 0" descr="/Users/pop7/Library/CloudStorage/OneDrive-MonsterConnectCo.,Ltd/Lecture/KOSEN69 - software-security/slides/pptx/assets/logo-small.png">    </p:cNvPr>
+          <p:cNvPr id="19" name="Image 1" descr="/private/tmp/claude-501/-Users-pop7-Library-CloudStorage-OneDrive-MonsterConnectCo--Ltd-Lecture-KOSEN69---software-security/e6d6556f-17de-403d-a9a0-cf2f846149b4/scratchpad/pptx2/src/slides/pptx/assets/logo-small.png">    </p:cNvPr>
+          <p:cNvPicPr>
+            <a:picLocks noChangeAspect="1"/>
+          </p:cNvPicPr>
+          <p:nvPr/>
+        </p:nvPicPr>
+        <p:blipFill>
+          <a:blip r:embed="rId2"/>
+          <a:stretch>
+            <a:fillRect/>
+          </a:stretch>
+        </p:blipFill>
+        <p:spPr>
+          <a:xfrm>
+            <a:off x="7882128" y="4700016"/>
+            <a:ext cx="768096" cy="356616"/>
+          </a:xfrm>
+          <a:prstGeom prst="rect">
+            <a:avLst/>
+          </a:prstGeom>
+        </p:spPr>
+      </p:pic>
+    </p:spTree>
+  </p:cSld>
+  <p:clrMapOvr>
+    <a:masterClrMapping/>
+  </p:clrMapOvr>
+</p:sld>
+</file>
+
+<file path=ppt/slides/slide25.xml><?xml version="1.0" encoding="utf-8"?>
+<p:sld xmlns:a="http://schemas.openxmlformats.org/drawingml/2006/main" xmlns:r="http://schemas.openxmlformats.org/officeDocument/2006/relationships" xmlns:p="http://schemas.openxmlformats.org/presentationml/2006/main">
+  <p:cSld name="Slide 25">
+    <p:bg>
+      <p:bgPr>
+        <a:solidFill>
+          <a:srgbClr val="FFFFFF"/>
+        </a:solidFill>
+      </p:bgPr>
+    </p:bg>
+    <p:spTree>
+      <p:nvGrpSpPr>
+        <p:cNvPr id="1" name=""/>
+        <p:cNvGrpSpPr/>
+        <p:nvPr/>
+      </p:nvGrpSpPr>
+      <p:grpSpPr>
+        <a:xfrm>
+          <a:off x="0" y="0"/>
+          <a:ext cx="0" cy="0"/>
+          <a:chOff x="0" y="0"/>
+          <a:chExt cx="0" cy="0"/>
+        </a:xfrm>
+      </p:grpSpPr>
+      <p:sp>
+        <p:nvSpPr>
+          <p:cNvPr id="2" name="Shape 0"/>
+          <p:cNvSpPr/>
+          <p:nvPr/>
+        </p:nvSpPr>
+        <p:spPr>
+          <a:xfrm>
+            <a:off x="457200" y="384048"/>
+            <a:ext cx="530352" cy="530352"/>
+          </a:xfrm>
+          <a:prstGeom prst="ellipse">
+            <a:avLst/>
+          </a:prstGeom>
+          <a:solidFill>
+            <a:srgbClr val="E35205"/>
+          </a:solidFill>
+          <a:ln/>
+          <a:effectLst>
+            <a:outerShdw sx="100000" sy="100000" kx="0" ky="0" algn="bl" rotWithShape="0" blurRad="76200" dist="25400" dir="5400000">
+              <a:srgbClr val="000000">
+                <a:alpha val="12000"/>
+              </a:srgbClr>
+            </a:outerShdw>
+          </a:effectLst>
+        </p:spPr>
+      </p:sp>
+      <p:pic>
+        <p:nvPicPr>
+          <p:cNvPr id="3" name="Image 0" descr="preencoded.png">    </p:cNvPr>
+          <p:cNvPicPr>
+            <a:picLocks noChangeAspect="1"/>
+          </p:cNvPicPr>
+          <p:nvPr/>
+        </p:nvPicPr>
+        <p:blipFill>
+          <a:blip r:embed="rId1"/>
+          <a:stretch>
+            <a:fillRect/>
+          </a:stretch>
+        </p:blipFill>
+        <p:spPr>
+          <a:xfrm>
+            <a:off x="594360" y="521208"/>
+            <a:ext cx="256032" cy="256032"/>
+          </a:xfrm>
+          <a:prstGeom prst="rect">
+            <a:avLst/>
+          </a:prstGeom>
+        </p:spPr>
+      </p:pic>
+      <p:sp>
+        <p:nvSpPr>
+          <p:cNvPr id="4" name="Text 1"/>
+          <p:cNvSpPr/>
+          <p:nvPr/>
+        </p:nvSpPr>
+        <p:spPr>
+          <a:xfrm>
+            <a:off x="1143000" y="329184"/>
+            <a:ext cx="7498080" cy="603504"/>
+          </a:xfrm>
+          <a:prstGeom prst="rect">
+            <a:avLst/>
+          </a:prstGeom>
+          <a:noFill/>
+          <a:ln/>
+        </p:spPr>
+        <p:txBody>
+          <a:bodyPr wrap="square" lIns="0" tIns="0" rIns="0" bIns="0" rtlCol="0" anchor="ctr"/>
+          <a:lstStyle/>
+          <a:p>
+            <a:pPr indent="0" marL="0">
+              <a:buNone/>
+            </a:pPr>
+            <a:r>
+              <a:rPr lang="en-US" sz="2600" b="1" dirty="0">
+                <a:solidFill>
+                  <a:srgbClr val="1F2937"/>
+                </a:solidFill>
+                <a:latin typeface="Arial" pitchFamily="34" charset="0"/>
+                <a:ea typeface="Arial" pitchFamily="34" charset="-122"/>
+                <a:cs typeface="Arial" pitchFamily="34" charset="-120"/>
+              </a:rPr>
+              <a:t>Lab steps (cont.)</a:t>
+            </a:r>
+            <a:endParaRPr lang="en-US" sz="2600" dirty="0"/>
+          </a:p>
+        </p:txBody>
+      </p:sp>
+      <p:sp>
+        <p:nvSpPr>
+          <p:cNvPr id="5" name="Shape 2"/>
+          <p:cNvSpPr/>
+          <p:nvPr/>
+        </p:nvSpPr>
+        <p:spPr>
+          <a:xfrm>
+            <a:off x="502920" y="1325880"/>
+            <a:ext cx="384048" cy="384048"/>
+          </a:xfrm>
+          <a:prstGeom prst="ellipse">
+            <a:avLst/>
+          </a:prstGeom>
+          <a:solidFill>
+            <a:srgbClr val="E35205"/>
+          </a:solidFill>
+          <a:ln/>
+        </p:spPr>
+      </p:sp>
+      <p:sp>
+        <p:nvSpPr>
+          <p:cNvPr id="6" name="Text 3"/>
+          <p:cNvSpPr/>
+          <p:nvPr/>
+        </p:nvSpPr>
+        <p:spPr>
+          <a:xfrm>
+            <a:off x="502920" y="1325880"/>
+            <a:ext cx="384048" cy="384048"/>
+          </a:xfrm>
+          <a:prstGeom prst="rect">
+            <a:avLst/>
+          </a:prstGeom>
+          <a:noFill/>
+          <a:ln/>
+        </p:spPr>
+        <p:txBody>
+          <a:bodyPr wrap="square" lIns="0" tIns="0" rIns="0" bIns="0" rtlCol="0" anchor="ctr"/>
+          <a:lstStyle/>
+          <a:p>
+            <a:pPr algn="ctr" indent="0" marL="0">
+              <a:buNone/>
+            </a:pPr>
+            <a:r>
+              <a:rPr lang="en-US" sz="1500" b="1" dirty="0">
+                <a:solidFill>
+                  <a:srgbClr val="0E1726"/>
+                </a:solidFill>
+                <a:latin typeface="Arial" pitchFamily="34" charset="0"/>
+                <a:ea typeface="Arial" pitchFamily="34" charset="-122"/>
+                <a:cs typeface="Arial" pitchFamily="34" charset="-120"/>
+              </a:rPr>
+              <a:t>4</a:t>
+            </a:r>
+            <a:endParaRPr lang="en-US" sz="1500" dirty="0"/>
+          </a:p>
+        </p:txBody>
+      </p:sp>
+      <p:sp>
+        <p:nvSpPr>
+          <p:cNvPr id="7" name="Text 4"/>
+          <p:cNvSpPr/>
+          <p:nvPr/>
+        </p:nvSpPr>
+        <p:spPr>
+          <a:xfrm>
+            <a:off x="1051560" y="1325880"/>
+            <a:ext cx="7589520" cy="402336"/>
+          </a:xfrm>
+          <a:prstGeom prst="rect">
+            <a:avLst/>
+          </a:prstGeom>
+          <a:noFill/>
+          <a:ln/>
+        </p:spPr>
+        <p:txBody>
+          <a:bodyPr wrap="square" lIns="0" tIns="0" rIns="0" bIns="0" rtlCol="0" anchor="ctr">
+            <a:normAutofit/>
+          </a:bodyPr>
+          <a:lstStyle/>
+          <a:p>
+            <a:pPr indent="0" marL="0">
+              <a:buNone/>
+            </a:pPr>
+            <a:r>
+              <a:rPr lang="en-US" sz="1350" dirty="0">
+                <a:solidFill>
+                  <a:srgbClr val="1F2937"/>
+                </a:solidFill>
+                <a:latin typeface="Calibri" pitchFamily="34" charset="0"/>
+                <a:ea typeface="Calibri" pitchFamily="34" charset="-122"/>
+                <a:cs typeface="Calibri" pitchFamily="34" charset="-120"/>
+              </a:rPr>
+              <a:t>Probe the upload endpoint — document the missing control</a:t>
+            </a:r>
+            <a:endParaRPr lang="en-US" sz="1350" dirty="0"/>
+          </a:p>
+        </p:txBody>
+      </p:sp>
+      <p:sp>
+        <p:nvSpPr>
+          <p:cNvPr id="8" name="Shape 5"/>
+          <p:cNvSpPr/>
+          <p:nvPr/>
+        </p:nvSpPr>
+        <p:spPr>
+          <a:xfrm>
+            <a:off x="502920" y="1801368"/>
+            <a:ext cx="384048" cy="384048"/>
+          </a:xfrm>
+          <a:prstGeom prst="ellipse">
+            <a:avLst/>
+          </a:prstGeom>
+          <a:solidFill>
+            <a:srgbClr val="E35205"/>
+          </a:solidFill>
+          <a:ln/>
+        </p:spPr>
+      </p:sp>
+      <p:sp>
+        <p:nvSpPr>
+          <p:cNvPr id="9" name="Text 6"/>
+          <p:cNvSpPr/>
+          <p:nvPr/>
+        </p:nvSpPr>
+        <p:spPr>
+          <a:xfrm>
+            <a:off x="502920" y="1801368"/>
+            <a:ext cx="384048" cy="384048"/>
+          </a:xfrm>
+          <a:prstGeom prst="rect">
+            <a:avLst/>
+          </a:prstGeom>
+          <a:noFill/>
+          <a:ln/>
+        </p:spPr>
+        <p:txBody>
+          <a:bodyPr wrap="square" lIns="0" tIns="0" rIns="0" bIns="0" rtlCol="0" anchor="ctr"/>
+          <a:lstStyle/>
+          <a:p>
+            <a:pPr algn="ctr" indent="0" marL="0">
+              <a:buNone/>
+            </a:pPr>
+            <a:r>
+              <a:rPr lang="en-US" sz="1500" b="1" dirty="0">
+                <a:solidFill>
+                  <a:srgbClr val="0E1726"/>
+                </a:solidFill>
+                <a:latin typeface="Arial" pitchFamily="34" charset="0"/>
+                <a:ea typeface="Arial" pitchFamily="34" charset="-122"/>
+                <a:cs typeface="Arial" pitchFamily="34" charset="-120"/>
+              </a:rPr>
+              <a:t>5</a:t>
+            </a:r>
+            <a:endParaRPr lang="en-US" sz="1500" dirty="0"/>
+          </a:p>
+        </p:txBody>
+      </p:sp>
+      <p:sp>
+        <p:nvSpPr>
+          <p:cNvPr id="10" name="Text 7"/>
+          <p:cNvSpPr/>
+          <p:nvPr/>
+        </p:nvSpPr>
+        <p:spPr>
+          <a:xfrm>
+            <a:off x="1051560" y="1801368"/>
+            <a:ext cx="7589520" cy="402336"/>
+          </a:xfrm>
+          <a:prstGeom prst="rect">
+            <a:avLst/>
+          </a:prstGeom>
+          <a:noFill/>
+          <a:ln/>
+        </p:spPr>
+        <p:txBody>
+          <a:bodyPr wrap="square" lIns="0" tIns="0" rIns="0" bIns="0" rtlCol="0" anchor="ctr">
+            <a:normAutofit/>
+          </a:bodyPr>
+          <a:lstStyle/>
+          <a:p>
+            <a:pPr indent="0" marL="0">
+              <a:buNone/>
+            </a:pPr>
+            <a:r>
+              <a:rPr lang="en-US" sz="1350" dirty="0">
+                <a:solidFill>
+                  <a:srgbClr val="1F2937"/>
+                </a:solidFill>
+                <a:latin typeface="Calibri" pitchFamily="34" charset="0"/>
+                <a:ea typeface="Calibri" pitchFamily="34" charset="-122"/>
+                <a:cs typeface="Calibri" pitchFamily="34" charset="-120"/>
+              </a:rPr>
+              <a:t>Rewrite the endpoints safely &amp; re-test</a:t>
+            </a:r>
+            <a:endParaRPr lang="en-US" sz="1350" dirty="0"/>
+          </a:p>
+        </p:txBody>
+      </p:sp>
+      <p:sp>
+        <p:nvSpPr>
+          <p:cNvPr id="11" name="Text 8"/>
+          <p:cNvSpPr/>
+          <p:nvPr/>
+        </p:nvSpPr>
+        <p:spPr>
+          <a:xfrm>
+            <a:off x="457200" y="4800600"/>
+            <a:ext cx="6949440" cy="274320"/>
+          </a:xfrm>
+          <a:prstGeom prst="rect">
+            <a:avLst/>
+          </a:prstGeom>
+          <a:noFill/>
+          <a:ln/>
+        </p:spPr>
+        <p:txBody>
+          <a:bodyPr wrap="square" lIns="0" tIns="0" rIns="0" bIns="0" rtlCol="0" anchor="ctr"/>
+          <a:lstStyle/>
+          <a:p>
+            <a:pPr indent="0" marL="0">
+              <a:buNone/>
+            </a:pPr>
+            <a:r>
+              <a:rPr lang="en-US" sz="900" dirty="0">
+                <a:solidFill>
+                  <a:srgbClr val="64748B"/>
+                </a:solidFill>
+                <a:latin typeface="Calibri" pitchFamily="34" charset="0"/>
+                <a:ea typeface="Calibri" pitchFamily="34" charset="-122"/>
+                <a:cs typeface="Calibri" pitchFamily="34" charset="-120"/>
+              </a:rPr>
+              <a:t>Software Security · Week 4</a:t>
+            </a:r>
+            <a:endParaRPr lang="en-US" sz="900" dirty="0"/>
+          </a:p>
+        </p:txBody>
+      </p:sp>
+      <p:pic>
+        <p:nvPicPr>
+          <p:cNvPr id="12" name="Image 1" descr="/private/tmp/claude-501/-Users-pop7-Library-CloudStorage-OneDrive-MonsterConnectCo--Ltd-Lecture-KOSEN69---software-security/e6d6556f-17de-403d-a9a0-cf2f846149b4/scratchpad/pptx2/src/slides/pptx/assets/logo-small.png">    </p:cNvPr>
+          <p:cNvPicPr>
+            <a:picLocks noChangeAspect="1"/>
+          </p:cNvPicPr>
+          <p:nvPr/>
+        </p:nvPicPr>
+        <p:blipFill>
+          <a:blip r:embed="rId2"/>
+          <a:stretch>
+            <a:fillRect/>
+          </a:stretch>
+        </p:blipFill>
+        <p:spPr>
+          <a:xfrm>
+            <a:off x="7882128" y="4700016"/>
+            <a:ext cx="768096" cy="356616"/>
+          </a:xfrm>
+          <a:prstGeom prst="rect">
+            <a:avLst/>
+          </a:prstGeom>
+        </p:spPr>
+      </p:pic>
+    </p:spTree>
+  </p:cSld>
+  <p:clrMapOvr>
+    <a:masterClrMapping/>
+  </p:clrMapOvr>
+</p:sld>
+</file>
+
+<file path=ppt/slides/slide26.xml><?xml version="1.0" encoding="utf-8"?>
+<p:sld xmlns:a="http://schemas.openxmlformats.org/drawingml/2006/main" xmlns:r="http://schemas.openxmlformats.org/officeDocument/2006/relationships" xmlns:p="http://schemas.openxmlformats.org/presentationml/2006/main">
+  <p:cSld name="Slide 26">
+    <p:bg>
+      <p:bgPr>
+        <a:solidFill>
+          <a:srgbClr val="FFFFFF"/>
+        </a:solidFill>
+      </p:bgPr>
+    </p:bg>
+    <p:spTree>
+      <p:nvGrpSpPr>
+        <p:cNvPr id="1" name=""/>
+        <p:cNvGrpSpPr/>
+        <p:nvPr/>
+      </p:nvGrpSpPr>
+      <p:grpSpPr>
+        <a:xfrm>
+          <a:off x="0" y="0"/>
+          <a:ext cx="0" cy="0"/>
+          <a:chOff x="0" y="0"/>
+          <a:chExt cx="0" cy="0"/>
+        </a:xfrm>
+      </p:grpSpPr>
+      <p:sp>
+        <p:nvSpPr>
+          <p:cNvPr id="2" name="Shape 0"/>
+          <p:cNvSpPr/>
+          <p:nvPr/>
+        </p:nvSpPr>
+        <p:spPr>
+          <a:xfrm>
+            <a:off x="457200" y="384048"/>
+            <a:ext cx="530352" cy="530352"/>
+          </a:xfrm>
+          <a:prstGeom prst="ellipse">
+            <a:avLst/>
+          </a:prstGeom>
+          <a:solidFill>
+            <a:srgbClr val="E35205"/>
+          </a:solidFill>
+          <a:ln/>
+          <a:effectLst>
+            <a:outerShdw sx="100000" sy="100000" kx="0" ky="0" algn="bl" rotWithShape="0" blurRad="76200" dist="25400" dir="5400000">
+              <a:srgbClr val="000000">
+                <a:alpha val="12000"/>
+              </a:srgbClr>
+            </a:outerShdw>
+          </a:effectLst>
+        </p:spPr>
+      </p:sp>
+      <p:pic>
+        <p:nvPicPr>
+          <p:cNvPr id="3" name="Image 0" descr="preencoded.png">    </p:cNvPr>
+          <p:cNvPicPr>
+            <a:picLocks noChangeAspect="1"/>
+          </p:cNvPicPr>
+          <p:nvPr/>
+        </p:nvPicPr>
+        <p:blipFill>
+          <a:blip r:embed="rId1"/>
+          <a:stretch>
+            <a:fillRect/>
+          </a:stretch>
+        </p:blipFill>
+        <p:spPr>
+          <a:xfrm>
+            <a:off x="594360" y="521208"/>
+            <a:ext cx="256032" cy="256032"/>
+          </a:xfrm>
+          <a:prstGeom prst="rect">
+            <a:avLst/>
+          </a:prstGeom>
+        </p:spPr>
+      </p:pic>
+      <p:sp>
+        <p:nvSpPr>
+          <p:cNvPr id="4" name="Text 1"/>
+          <p:cNvSpPr/>
+          <p:nvPr/>
+        </p:nvSpPr>
+        <p:spPr>
+          <a:xfrm>
+            <a:off x="1143000" y="329184"/>
+            <a:ext cx="7498080" cy="603504"/>
+          </a:xfrm>
+          <a:prstGeom prst="rect">
+            <a:avLst/>
+          </a:prstGeom>
+          <a:noFill/>
+          <a:ln/>
+        </p:spPr>
+        <p:txBody>
+          <a:bodyPr wrap="square" lIns="0" tIns="0" rIns="0" bIns="0" rtlCol="0" anchor="ctr"/>
+          <a:lstStyle/>
+          <a:p>
+            <a:pPr indent="0" marL="0">
+              <a:buNone/>
+            </a:pPr>
+            <a:r>
+              <a:rPr lang="en-US" sz="2600" b="1" dirty="0">
+                <a:solidFill>
+                  <a:srgbClr val="1F2937"/>
+                </a:solidFill>
+                <a:latin typeface="Arial" pitchFamily="34" charset="0"/>
+                <a:ea typeface="Arial" pitchFamily="34" charset="-122"/>
+                <a:cs typeface="Arial" pitchFamily="34" charset="-120"/>
+              </a:rPr>
+              <a:t>Deliverable</a:t>
+            </a:r>
+            <a:endParaRPr lang="en-US" sz="2600" dirty="0"/>
+          </a:p>
+        </p:txBody>
+      </p:sp>
+      <p:sp>
+        <p:nvSpPr>
+          <p:cNvPr id="5" name="Shape 2"/>
+          <p:cNvSpPr/>
+          <p:nvPr/>
+        </p:nvSpPr>
+        <p:spPr>
+          <a:xfrm>
+            <a:off x="457200" y="1325880"/>
+            <a:ext cx="8229600" cy="1517904"/>
+          </a:xfrm>
+          <a:prstGeom prst="roundRect">
+            <a:avLst>
+              <a:gd name="adj" fmla="val 4819"/>
+            </a:avLst>
+          </a:prstGeom>
+          <a:solidFill>
+            <a:srgbClr val="F1F5F9"/>
+          </a:solidFill>
+          <a:ln/>
+          <a:effectLst>
+            <a:outerShdw sx="100000" sy="100000" kx="0" ky="0" algn="bl" rotWithShape="0" blurRad="76200" dist="25400" dir="5400000">
+              <a:srgbClr val="000000">
+                <a:alpha val="12000"/>
+              </a:srgbClr>
+            </a:outerShdw>
+          </a:effectLst>
+        </p:spPr>
+      </p:sp>
+      <p:sp>
+        <p:nvSpPr>
+          <p:cNvPr id="6" name="Text 3"/>
+          <p:cNvSpPr/>
+          <p:nvPr/>
+        </p:nvSpPr>
+        <p:spPr>
+          <a:xfrm>
+            <a:off x="731520" y="1435608"/>
+            <a:ext cx="7680960" cy="1298448"/>
+          </a:xfrm>
+          <a:prstGeom prst="rect">
+            <a:avLst/>
+          </a:prstGeom>
+          <a:noFill/>
+          <a:ln/>
+        </p:spPr>
+        <p:txBody>
+          <a:bodyPr wrap="square" lIns="0" tIns="0" rIns="0" bIns="0" rtlCol="0" anchor="t">
+            <a:normAutofit/>
+          </a:bodyPr>
+          <a:lstStyle/>
+          <a:p>
+            <a:pPr marL="342900" indent="-342900">
+              <a:spcAft>
+                <a:spcPts val="600"/>
+              </a:spcAft>
+              <a:buSzPct val="100000"/>
+              <a:buChar char="•"/>
+            </a:pPr>
+            <a:r>
+              <a:rPr lang="en-US" sz="1400" dirty="0">
+                <a:solidFill>
+                  <a:srgbClr val="1F2937"/>
+                </a:solidFill>
+                <a:latin typeface="Calibri" pitchFamily="34" charset="0"/>
+                <a:ea typeface="Calibri" pitchFamily="34" charset="-122"/>
+                <a:cs typeface="Calibri" pitchFamily="34" charset="-120"/>
+              </a:rPr>
+              <a:t>Findings: each injection point + payload + impact (CWE-mapped)</a:t>
+            </a:r>
+            <a:endParaRPr lang="en-US" sz="1400" dirty="0"/>
+          </a:p>
+          <a:p>
+            <a:pPr marL="342900" indent="-342900">
+              <a:spcAft>
+                <a:spcPts val="600"/>
+              </a:spcAft>
+              <a:buSzPct val="100000"/>
+              <a:buChar char="•"/>
+            </a:pPr>
+            <a:r>
+              <a:rPr lang="en-US" sz="1400" dirty="0">
+                <a:solidFill>
+                  <a:srgbClr val="1F2937"/>
+                </a:solidFill>
+                <a:latin typeface="Calibri" pitchFamily="34" charset="0"/>
+                <a:ea typeface="Calibri" pitchFamily="34" charset="-122"/>
+                <a:cs typeface="Calibri" pitchFamily="34" charset="-120"/>
+              </a:rPr>
+              <a:t>The fixed code (prepared statements / validation)</a:t>
+            </a:r>
+            <a:endParaRPr lang="en-US" sz="1400" dirty="0"/>
+          </a:p>
+          <a:p>
+            <a:pPr marL="342900" indent="-342900">
+              <a:spcAft>
+                <a:spcPts val="600"/>
+              </a:spcAft>
+              <a:buSzPct val="100000"/>
+              <a:buChar char="•"/>
+            </a:pPr>
+            <a:r>
+              <a:rPr lang="en-US" sz="1400" dirty="0">
+                <a:solidFill>
+                  <a:srgbClr val="1F2937"/>
+                </a:solidFill>
+                <a:latin typeface="Calibri" pitchFamily="34" charset="0"/>
+                <a:ea typeface="Calibri" pitchFamily="34" charset="-122"/>
+                <a:cs typeface="Calibri" pitchFamily="34" charset="-120"/>
+              </a:rPr>
+              <a:t>Proof the payload no longer works</a:t>
+            </a:r>
+            <a:endParaRPr lang="en-US" sz="1400" dirty="0"/>
+          </a:p>
+          <a:p>
+            <a:pPr marL="342900" indent="-342900">
+              <a:spcAft>
+                <a:spcPts val="600"/>
+              </a:spcAft>
+              <a:buSzPct val="100000"/>
+              <a:buChar char="•"/>
+            </a:pPr>
+            <a:r>
+              <a:rPr lang="en-US" sz="1400" dirty="0">
+                <a:solidFill>
+                  <a:srgbClr val="1F2937"/>
+                </a:solidFill>
+                <a:latin typeface="Calibri" pitchFamily="34" charset="0"/>
+                <a:ea typeface="Calibri" pitchFamily="34" charset="-122"/>
+                <a:cs typeface="Calibri" pitchFamily="34" charset="-120"/>
+              </a:rPr>
+              <a:t>+ Audit the AI / EiPE / Prompt Problem (see worksheet)</a:t>
+            </a:r>
+            <a:endParaRPr lang="en-US" sz="1400" dirty="0"/>
+          </a:p>
+        </p:txBody>
+      </p:sp>
+      <p:sp>
+        <p:nvSpPr>
+          <p:cNvPr id="7" name="Text 4"/>
+          <p:cNvSpPr/>
+          <p:nvPr/>
+        </p:nvSpPr>
+        <p:spPr>
+          <a:xfrm>
+            <a:off x="457200" y="4800600"/>
+            <a:ext cx="6949440" cy="274320"/>
+          </a:xfrm>
+          <a:prstGeom prst="rect">
+            <a:avLst/>
+          </a:prstGeom>
+          <a:noFill/>
+          <a:ln/>
+        </p:spPr>
+        <p:txBody>
+          <a:bodyPr wrap="square" lIns="0" tIns="0" rIns="0" bIns="0" rtlCol="0" anchor="ctr"/>
+          <a:lstStyle/>
+          <a:p>
+            <a:pPr indent="0" marL="0">
+              <a:buNone/>
+            </a:pPr>
+            <a:r>
+              <a:rPr lang="en-US" sz="900" dirty="0">
+                <a:solidFill>
+                  <a:srgbClr val="64748B"/>
+                </a:solidFill>
+                <a:latin typeface="Calibri" pitchFamily="34" charset="0"/>
+                <a:ea typeface="Calibri" pitchFamily="34" charset="-122"/>
+                <a:cs typeface="Calibri" pitchFamily="34" charset="-120"/>
+              </a:rPr>
+              <a:t>Software Security · Week 4</a:t>
+            </a:r>
+            <a:endParaRPr lang="en-US" sz="900" dirty="0"/>
+          </a:p>
+        </p:txBody>
+      </p:sp>
+      <p:pic>
+        <p:nvPicPr>
+          <p:cNvPr id="8" name="Image 1" descr="/private/tmp/claude-501/-Users-pop7-Library-CloudStorage-OneDrive-MonsterConnectCo--Ltd-Lecture-KOSEN69---software-security/e6d6556f-17de-403d-a9a0-cf2f846149b4/scratchpad/pptx2/src/slides/pptx/assets/logo-small.png">    </p:cNvPr>
+          <p:cNvPicPr>
+            <a:picLocks noChangeAspect="1"/>
+          </p:cNvPicPr>
+          <p:nvPr/>
+        </p:nvPicPr>
+        <p:blipFill>
+          <a:blip r:embed="rId2"/>
+          <a:stretch>
+            <a:fillRect/>
+          </a:stretch>
+        </p:blipFill>
+        <p:spPr>
+          <a:xfrm>
+            <a:off x="7882128" y="4700016"/>
+            <a:ext cx="768096" cy="356616"/>
+          </a:xfrm>
+          <a:prstGeom prst="rect">
+            <a:avLst/>
+          </a:prstGeom>
+        </p:spPr>
+      </p:pic>
+    </p:spTree>
+  </p:cSld>
+  <p:clrMapOvr>
+    <a:masterClrMapping/>
+  </p:clrMapOvr>
+</p:sld>
+</file>
+
+<file path=ppt/slides/slide27.xml><?xml version="1.0" encoding="utf-8"?>
+<p:sld xmlns:a="http://schemas.openxmlformats.org/drawingml/2006/main" xmlns:r="http://schemas.openxmlformats.org/officeDocument/2006/relationships" xmlns:p="http://schemas.openxmlformats.org/presentationml/2006/main">
+  <p:cSld name="Slide 27">
+    <p:bg>
+      <p:bgPr>
+        <a:solidFill>
+          <a:srgbClr val="FFFFFF"/>
+        </a:solidFill>
+      </p:bgPr>
+    </p:bg>
+    <p:spTree>
+      <p:nvGrpSpPr>
+        <p:cNvPr id="1" name=""/>
+        <p:cNvGrpSpPr/>
+        <p:nvPr/>
+      </p:nvGrpSpPr>
+      <p:grpSpPr>
+        <a:xfrm>
+          <a:off x="0" y="0"/>
+          <a:ext cx="0" cy="0"/>
+          <a:chOff x="0" y="0"/>
+          <a:chExt cx="0" cy="0"/>
+        </a:xfrm>
+      </p:grpSpPr>
+      <p:sp>
+        <p:nvSpPr>
+          <p:cNvPr id="2" name="Shape 0"/>
+          <p:cNvSpPr/>
+          <p:nvPr/>
+        </p:nvSpPr>
+        <p:spPr>
+          <a:xfrm>
+            <a:off x="457200" y="384048"/>
+            <a:ext cx="530352" cy="530352"/>
+          </a:xfrm>
+          <a:prstGeom prst="ellipse">
+            <a:avLst/>
+          </a:prstGeom>
+          <a:solidFill>
+            <a:srgbClr val="E35205"/>
+          </a:solidFill>
+          <a:ln/>
+          <a:effectLst>
+            <a:outerShdw sx="100000" sy="100000" kx="0" ky="0" algn="bl" rotWithShape="0" blurRad="76200" dist="25400" dir="5400000">
+              <a:srgbClr val="000000">
+                <a:alpha val="12000"/>
+              </a:srgbClr>
+            </a:outerShdw>
+          </a:effectLst>
+        </p:spPr>
+      </p:sp>
+      <p:pic>
+        <p:nvPicPr>
+          <p:cNvPr id="3" name="Image 0" descr="preencoded.png">    </p:cNvPr>
+          <p:cNvPicPr>
+            <a:picLocks noChangeAspect="1"/>
+          </p:cNvPicPr>
+          <p:nvPr/>
+        </p:nvPicPr>
+        <p:blipFill>
+          <a:blip r:embed="rId1"/>
+          <a:stretch>
+            <a:fillRect/>
+          </a:stretch>
+        </p:blipFill>
+        <p:spPr>
+          <a:xfrm>
+            <a:off x="594360" y="521208"/>
+            <a:ext cx="256032" cy="256032"/>
+          </a:xfrm>
+          <a:prstGeom prst="rect">
+            <a:avLst/>
+          </a:prstGeom>
+        </p:spPr>
+      </p:pic>
+      <p:sp>
+        <p:nvSpPr>
+          <p:cNvPr id="4" name="Text 1"/>
+          <p:cNvSpPr/>
+          <p:nvPr/>
+        </p:nvSpPr>
+        <p:spPr>
+          <a:xfrm>
+            <a:off x="1143000" y="329184"/>
+            <a:ext cx="7498080" cy="603504"/>
+          </a:xfrm>
+          <a:prstGeom prst="rect">
+            <a:avLst/>
+          </a:prstGeom>
+          <a:noFill/>
+          <a:ln/>
+        </p:spPr>
+        <p:txBody>
+          <a:bodyPr wrap="square" lIns="0" tIns="0" rIns="0" bIns="0" rtlCol="0" anchor="ctr"/>
+          <a:lstStyle/>
+          <a:p>
+            <a:pPr indent="0" marL="0">
+              <a:buNone/>
+            </a:pPr>
+            <a:r>
+              <a:rPr lang="en-US" sz="2600" b="1" dirty="0">
+                <a:solidFill>
+                  <a:srgbClr val="1F2937"/>
+                </a:solidFill>
+                <a:latin typeface="Arial" pitchFamily="34" charset="0"/>
+                <a:ea typeface="Arial" pitchFamily="34" charset="-122"/>
+                <a:cs typeface="Arial" pitchFamily="34" charset="-120"/>
+              </a:rPr>
+              <a:t>Key takeaways</a:t>
+            </a:r>
+            <a:endParaRPr lang="en-US" sz="2600" dirty="0"/>
+          </a:p>
+        </p:txBody>
+      </p:sp>
+      <p:sp>
+        <p:nvSpPr>
+          <p:cNvPr id="5" name="Shape 2"/>
+          <p:cNvSpPr/>
+          <p:nvPr/>
+        </p:nvSpPr>
+        <p:spPr>
+          <a:xfrm>
+            <a:off x="457200" y="1325880"/>
+            <a:ext cx="8229600" cy="1207008"/>
+          </a:xfrm>
+          <a:prstGeom prst="roundRect">
+            <a:avLst>
+              <a:gd name="adj" fmla="val 6061"/>
+            </a:avLst>
+          </a:prstGeom>
+          <a:solidFill>
+            <a:srgbClr val="F1F5F9"/>
+          </a:solidFill>
+          <a:ln/>
+          <a:effectLst>
+            <a:outerShdw sx="100000" sy="100000" kx="0" ky="0" algn="bl" rotWithShape="0" blurRad="76200" dist="25400" dir="5400000">
+              <a:srgbClr val="000000">
+                <a:alpha val="12000"/>
+              </a:srgbClr>
+            </a:outerShdw>
+          </a:effectLst>
+        </p:spPr>
+      </p:sp>
+      <p:sp>
+        <p:nvSpPr>
+          <p:cNvPr id="6" name="Text 3"/>
+          <p:cNvSpPr/>
+          <p:nvPr/>
+        </p:nvSpPr>
+        <p:spPr>
+          <a:xfrm>
+            <a:off x="731520" y="1435608"/>
+            <a:ext cx="7680960" cy="987552"/>
+          </a:xfrm>
+          <a:prstGeom prst="rect">
+            <a:avLst/>
+          </a:prstGeom>
+          <a:noFill/>
+          <a:ln/>
+        </p:spPr>
+        <p:txBody>
+          <a:bodyPr wrap="square" lIns="0" tIns="0" rIns="0" bIns="0" rtlCol="0" anchor="t">
+            <a:normAutofit/>
+          </a:bodyPr>
+          <a:lstStyle/>
+          <a:p>
+            <a:pPr marL="342900" indent="-342900">
+              <a:spcAft>
+                <a:spcPts val="600"/>
+              </a:spcAft>
+              <a:buSzPct val="100000"/>
+              <a:buChar char="•"/>
+            </a:pPr>
+            <a:r>
+              <a:rPr lang="en-US" sz="1400" dirty="0">
+                <a:solidFill>
+                  <a:srgbClr val="1F2937"/>
+                </a:solidFill>
+                <a:latin typeface="Calibri" pitchFamily="34" charset="0"/>
+                <a:ea typeface="Calibri" pitchFamily="34" charset="-122"/>
+                <a:cs typeface="Calibri" pitchFamily="34" charset="-120"/>
+              </a:rPr>
+              <a:t>Never build interpreter strings from untrusted input</a:t>
+            </a:r>
+            <a:endParaRPr lang="en-US" sz="1400" dirty="0"/>
+          </a:p>
+          <a:p>
+            <a:pPr marL="342900" indent="-342900">
+              <a:spcAft>
+                <a:spcPts val="600"/>
+              </a:spcAft>
+              <a:buSzPct val="100000"/>
+              <a:buChar char="•"/>
+            </a:pPr>
+            <a:r>
+              <a:rPr lang="en-US" sz="1400" dirty="0">
+                <a:solidFill>
+                  <a:srgbClr val="1F2937"/>
+                </a:solidFill>
+                <a:latin typeface="Calibri" pitchFamily="34" charset="0"/>
+                <a:ea typeface="Calibri" pitchFamily="34" charset="-122"/>
+                <a:cs typeface="Calibri" pitchFamily="34" charset="-120"/>
+              </a:rPr>
+              <a:t>Parameterize first; validate as defense-in-depth</a:t>
+            </a:r>
+            <a:endParaRPr lang="en-US" sz="1400" dirty="0"/>
+          </a:p>
+          <a:p>
+            <a:pPr marL="342900" indent="-342900">
+              <a:spcAft>
+                <a:spcPts val="600"/>
+              </a:spcAft>
+              <a:buSzPct val="100000"/>
+              <a:buChar char="•"/>
+            </a:pPr>
+            <a:r>
+              <a:rPr lang="en-US" sz="1400" dirty="0">
+                <a:solidFill>
+                  <a:srgbClr val="1F2937"/>
+                </a:solidFill>
+                <a:latin typeface="Calibri" pitchFamily="34" charset="0"/>
+                <a:ea typeface="Calibri" pitchFamily="34" charset="-122"/>
+                <a:cs typeface="Calibri" pitchFamily="34" charset="-120"/>
+              </a:rPr>
+              <a:t>Injection = data treated as code</a:t>
+            </a:r>
+            <a:endParaRPr lang="en-US" sz="1400" dirty="0"/>
+          </a:p>
+        </p:txBody>
+      </p:sp>
+      <p:sp>
+        <p:nvSpPr>
+          <p:cNvPr id="7" name="Text 4"/>
+          <p:cNvSpPr/>
+          <p:nvPr/>
+        </p:nvSpPr>
+        <p:spPr>
+          <a:xfrm>
+            <a:off x="457200" y="4800600"/>
+            <a:ext cx="6949440" cy="274320"/>
+          </a:xfrm>
+          <a:prstGeom prst="rect">
+            <a:avLst/>
+          </a:prstGeom>
+          <a:noFill/>
+          <a:ln/>
+        </p:spPr>
+        <p:txBody>
+          <a:bodyPr wrap="square" lIns="0" tIns="0" rIns="0" bIns="0" rtlCol="0" anchor="ctr"/>
+          <a:lstStyle/>
+          <a:p>
+            <a:pPr indent="0" marL="0">
+              <a:buNone/>
+            </a:pPr>
+            <a:r>
+              <a:rPr lang="en-US" sz="900" dirty="0">
+                <a:solidFill>
+                  <a:srgbClr val="64748B"/>
+                </a:solidFill>
+                <a:latin typeface="Calibri" pitchFamily="34" charset="0"/>
+                <a:ea typeface="Calibri" pitchFamily="34" charset="-122"/>
+                <a:cs typeface="Calibri" pitchFamily="34" charset="-120"/>
+              </a:rPr>
+              <a:t>Software Security · Week 4</a:t>
+            </a:r>
+            <a:endParaRPr lang="en-US" sz="900" dirty="0"/>
+          </a:p>
+        </p:txBody>
+      </p:sp>
+      <p:pic>
+        <p:nvPicPr>
+          <p:cNvPr id="8" name="Image 1" descr="/private/tmp/claude-501/-Users-pop7-Library-CloudStorage-OneDrive-MonsterConnectCo--Ltd-Lecture-KOSEN69---software-security/e6d6556f-17de-403d-a9a0-cf2f846149b4/scratchpad/pptx2/src/slides/pptx/assets/logo-small.png">    </p:cNvPr>
+          <p:cNvPicPr>
+            <a:picLocks noChangeAspect="1"/>
+          </p:cNvPicPr>
+          <p:nvPr/>
+        </p:nvPicPr>
+        <p:blipFill>
+          <a:blip r:embed="rId2"/>
+          <a:stretch>
+            <a:fillRect/>
+          </a:stretch>
+        </p:blipFill>
+        <p:spPr>
+          <a:xfrm>
+            <a:off x="7882128" y="4700016"/>
+            <a:ext cx="768096" cy="356616"/>
+          </a:xfrm>
+          <a:prstGeom prst="rect">
+            <a:avLst/>
+          </a:prstGeom>
+        </p:spPr>
+      </p:pic>
+    </p:spTree>
+  </p:cSld>
+  <p:clrMapOvr>
+    <a:masterClrMapping/>
+  </p:clrMapOvr>
+</p:sld>
+</file>
+
+<file path=ppt/slides/slide28.xml><?xml version="1.0" encoding="utf-8"?>
+<p:sld xmlns:a="http://schemas.openxmlformats.org/drawingml/2006/main" xmlns:r="http://schemas.openxmlformats.org/officeDocument/2006/relationships" xmlns:p="http://schemas.openxmlformats.org/presentationml/2006/main">
+  <p:cSld name="Slide 28">
+    <p:bg>
+      <p:bgPr>
+        <a:solidFill>
+          <a:srgbClr val="FFFFFF"/>
+        </a:solidFill>
+      </p:bgPr>
+    </p:bg>
+    <p:spTree>
+      <p:nvGrpSpPr>
+        <p:cNvPr id="1" name=""/>
+        <p:cNvGrpSpPr/>
+        <p:nvPr/>
+      </p:nvGrpSpPr>
+      <p:grpSpPr>
+        <a:xfrm>
+          <a:off x="0" y="0"/>
+          <a:ext cx="0" cy="0"/>
+          <a:chOff x="0" y="0"/>
+          <a:chExt cx="0" cy="0"/>
+        </a:xfrm>
+      </p:grpSpPr>
+      <p:sp>
+        <p:nvSpPr>
+          <p:cNvPr id="2" name="Text 0"/>
+          <p:cNvSpPr/>
+          <p:nvPr/>
+        </p:nvSpPr>
+        <p:spPr>
+          <a:xfrm>
+            <a:off x="640080" y="1737360"/>
+            <a:ext cx="7863840" cy="1097280"/>
+          </a:xfrm>
+          <a:prstGeom prst="rect">
+            <a:avLst/>
+          </a:prstGeom>
+          <a:noFill/>
+          <a:ln/>
+        </p:spPr>
+        <p:txBody>
+          <a:bodyPr wrap="square" lIns="0" tIns="0" rIns="0" bIns="0" rtlCol="0" anchor="ctr"/>
+          <a:lstStyle/>
+          <a:p>
+            <a:pPr indent="0" marL="0">
+              <a:buNone/>
+            </a:pPr>
+            <a:r>
+              <a:rPr lang="en-US" sz="4600" b="1" dirty="0">
+                <a:solidFill>
+                  <a:srgbClr val="1F2937"/>
+                </a:solidFill>
+                <a:latin typeface="Arial" pitchFamily="34" charset="0"/>
+                <a:ea typeface="Arial" pitchFamily="34" charset="-122"/>
+                <a:cs typeface="Arial" pitchFamily="34" charset="-120"/>
+              </a:rPr>
+              <a:t>Questions?</a:t>
+            </a:r>
+            <a:endParaRPr lang="en-US" sz="4600" dirty="0"/>
+          </a:p>
+        </p:txBody>
+      </p:sp>
+      <p:sp>
+        <p:nvSpPr>
+          <p:cNvPr id="3" name="Text 1"/>
+          <p:cNvSpPr/>
+          <p:nvPr/>
+        </p:nvSpPr>
+        <p:spPr>
+          <a:xfrm>
+            <a:off x="658368" y="2834640"/>
+            <a:ext cx="7863840" cy="731520"/>
+          </a:xfrm>
+          <a:prstGeom prst="rect">
+            <a:avLst/>
+          </a:prstGeom>
+          <a:noFill/>
+          <a:ln/>
+        </p:spPr>
+        <p:txBody>
+          <a:bodyPr wrap="square" lIns="0" tIns="0" rIns="0" bIns="0" rtlCol="0" anchor="ctr"/>
+          <a:lstStyle/>
+          <a:p>
+            <a:pPr indent="0" marL="0">
+              <a:buNone/>
+            </a:pPr>
+            <a:r>
+              <a:rPr lang="en-US" sz="1800" dirty="0">
+                <a:solidFill>
+                  <a:srgbClr val="E35205"/>
+                </a:solidFill>
+                <a:latin typeface="Calibri" pitchFamily="34" charset="0"/>
+                <a:ea typeface="Calibri" pitchFamily="34" charset="-122"/>
+                <a:cs typeface="Calibri" pitchFamily="34" charset="-120"/>
+              </a:rPr>
+              <a:t>Next week: XSS &amp; client-side risks</a:t>
+            </a:r>
+            <a:endParaRPr lang="en-US" sz="1800" dirty="0"/>
+          </a:p>
+        </p:txBody>
+      </p:sp>
+      <p:pic>
+        <p:nvPicPr>
+          <p:cNvPr id="4" name="Image 0" descr="/private/tmp/claude-501/-Users-pop7-Library-CloudStorage-OneDrive-MonsterConnectCo--Ltd-Lecture-KOSEN69---software-security/e6d6556f-17de-403d-a9a0-cf2f846149b4/scratchpad/pptx2/src/slides/pptx/assets/logo-small.png">    </p:cNvPr>
           <p:cNvPicPr>
             <a:picLocks noChangeAspect="1"/>
           </p:cNvPicPr>
@@ -8905,7 +10610,7 @@
       </p:sp>
       <p:pic>
         <p:nvPicPr>
-          <p:cNvPr id="8" name="Image 1" descr="/Users/pop7/Library/CloudStorage/OneDrive-MonsterConnectCo.,Ltd/Lecture/KOSEN69 - software-security/slides/pptx/assets/logo-small.png">    </p:cNvPr>
+          <p:cNvPr id="8" name="Image 1" descr="/private/tmp/claude-501/-Users-pop7-Library-CloudStorage-OneDrive-MonsterConnectCo--Ltd-Lecture-KOSEN69---software-security/e6d6556f-17de-403d-a9a0-cf2f846149b4/scratchpad/pptx2/src/slides/pptx/assets/logo-small.png">    </p:cNvPr>
           <p:cNvPicPr>
             <a:picLocks noChangeAspect="1"/>
           </p:cNvPicPr>
@@ -9269,7 +10974,7 @@
       </p:sp>
       <p:pic>
         <p:nvPicPr>
-          <p:cNvPr id="10" name="Image 1" descr="/Users/pop7/Library/CloudStorage/OneDrive-MonsterConnectCo.,Ltd/Lecture/KOSEN69 - software-security/slides/pptx/assets/logo-small.png">    </p:cNvPr>
+          <p:cNvPr id="10" name="Image 1" descr="/private/tmp/claude-501/-Users-pop7-Library-CloudStorage-OneDrive-MonsterConnectCo--Ltd-Lecture-KOSEN69---software-security/e6d6556f-17de-403d-a9a0-cf2f846149b4/scratchpad/pptx2/src/slides/pptx/assets/logo-small.png">    </p:cNvPr>
           <p:cNvPicPr>
             <a:picLocks noChangeAspect="1"/>
           </p:cNvPicPr>
@@ -9655,7 +11360,7 @@
       </p:sp>
       <p:pic>
         <p:nvPicPr>
-          <p:cNvPr id="10" name="Image 1" descr="/Users/pop7/Library/CloudStorage/OneDrive-MonsterConnectCo.,Ltd/Lecture/KOSEN69 - software-security/slides/pptx/assets/logo-small.png">    </p:cNvPr>
+          <p:cNvPr id="10" name="Image 1" descr="/private/tmp/claude-501/-Users-pop7-Library-CloudStorage-OneDrive-MonsterConnectCo--Ltd-Lecture-KOSEN69---software-security/e6d6556f-17de-403d-a9a0-cf2f846149b4/scratchpad/pptx2/src/slides/pptx/assets/logo-small.png">    </p:cNvPr>
           <p:cNvPicPr>
             <a:picLocks noChangeAspect="1"/>
           </p:cNvPicPr>
@@ -9898,7 +11603,7 @@
       </p:sp>
       <p:pic>
         <p:nvPicPr>
-          <p:cNvPr id="7" name="Image 1" descr="/Users/pop7/Library/CloudStorage/OneDrive-MonsterConnectCo.,Ltd/Lecture/KOSEN69 - software-security/slides/pptx/assets/logo-small.png">    </p:cNvPr>
+          <p:cNvPr id="7" name="Image 1" descr="/private/tmp/claude-501/-Users-pop7-Library-CloudStorage-OneDrive-MonsterConnectCo--Ltd-Lecture-KOSEN69---software-security/e6d6556f-17de-403d-a9a0-cf2f846149b4/scratchpad/pptx2/src/slides/pptx/assets/logo-small.png">    </p:cNvPr>
           <p:cNvPicPr>
             <a:picLocks noChangeAspect="1"/>
           </p:cNvPicPr>
@@ -10355,7 +12060,7 @@
       </p:sp>
       <p:pic>
         <p:nvPicPr>
-          <p:cNvPr id="13" name="Image 1" descr="/Users/pop7/Library/CloudStorage/OneDrive-MonsterConnectCo.,Ltd/Lecture/KOSEN69 - software-security/slides/pptx/assets/logo-small.png">    </p:cNvPr>
+          <p:cNvPr id="13" name="Image 1" descr="/private/tmp/claude-501/-Users-pop7-Library-CloudStorage-OneDrive-MonsterConnectCo--Ltd-Lecture-KOSEN69---software-security/e6d6556f-17de-403d-a9a0-cf2f846149b4/scratchpad/pptx2/src/slides/pptx/assets/logo-small.png">    </p:cNvPr>
           <p:cNvPicPr>
             <a:picLocks noChangeAspect="1"/>
           </p:cNvPicPr>
@@ -10614,7 +12319,7 @@
       </p:sp>
       <p:pic>
         <p:nvPicPr>
-          <p:cNvPr id="8" name="Image 1" descr="/Users/pop7/Library/CloudStorage/OneDrive-MonsterConnectCo.,Ltd/Lecture/KOSEN69 - software-security/slides/pptx/assets/logo-small.png">    </p:cNvPr>
+          <p:cNvPr id="8" name="Image 1" descr="/private/tmp/claude-501/-Users-pop7-Library-CloudStorage-OneDrive-MonsterConnectCo--Ltd-Lecture-KOSEN69---software-security/e6d6556f-17de-403d-a9a0-cf2f846149b4/scratchpad/pptx2/src/slides/pptx/assets/logo-small.png">    </p:cNvPr>
           <p:cNvPicPr>
             <a:picLocks noChangeAspect="1"/>
           </p:cNvPicPr>
@@ -10752,7 +12457,7 @@
                 <a:ea typeface="Arial" pitchFamily="34" charset="-122"/>
                 <a:cs typeface="Arial" pitchFamily="34" charset="-120"/>
               </a:rPr>
-              <a:t>Real-world impact</a:t>
+              <a:t>The fix: parameterize — data stays data</a:t>
             </a:r>
             <a:endParaRPr lang="en-US" sz="2600" dirty="0"/>
           </a:p>
@@ -10767,11 +12472,136 @@
         <p:spPr>
           <a:xfrm>
             <a:off x="457200" y="1325880"/>
-            <a:ext cx="8229600" cy="1719072"/>
+            <a:ext cx="8229600" cy="1371600"/>
           </a:xfrm>
           <a:prstGeom prst="roundRect">
             <a:avLst>
-              <a:gd name="adj" fmla="val 4255"/>
+              <a:gd name="adj" fmla="val 4000"/>
+            </a:avLst>
+          </a:prstGeom>
+          <a:solidFill>
+            <a:srgbClr val="0A1020"/>
+          </a:solidFill>
+          <a:ln w="12700">
+            <a:solidFill>
+              <a:srgbClr val="E8EDF3"/>
+            </a:solidFill>
+            <a:prstDash val="solid"/>
+          </a:ln>
+        </p:spPr>
+      </p:sp>
+      <p:sp>
+        <p:nvSpPr>
+          <p:cNvPr id="6" name="Text 3"/>
+          <p:cNvSpPr/>
+          <p:nvPr/>
+        </p:nvSpPr>
+        <p:spPr>
+          <a:xfrm>
+            <a:off x="640080" y="1399032"/>
+            <a:ext cx="7863840" cy="1225296"/>
+          </a:xfrm>
+          <a:prstGeom prst="rect">
+            <a:avLst/>
+          </a:prstGeom>
+          <a:noFill/>
+          <a:ln/>
+        </p:spPr>
+        <p:txBody>
+          <a:bodyPr wrap="square" lIns="0" tIns="0" rIns="0" bIns="0" rtlCol="0" anchor="t">
+            <a:normAutofit/>
+          </a:bodyPr>
+          <a:lstStyle/>
+          <a:p>
+            <a:pPr indent="0" marL="0">
+              <a:buNone/>
+            </a:pPr>
+            <a:r>
+              <a:rPr lang="en-US" sz="1150" dirty="0">
+                <a:solidFill>
+                  <a:srgbClr val="9FE7D6"/>
+                </a:solidFill>
+                <a:latin typeface="Courier New" pitchFamily="34" charset="0"/>
+                <a:ea typeface="Courier New" pitchFamily="34" charset="-122"/>
+                <a:cs typeface="Courier New" pitchFamily="34" charset="-120"/>
+              </a:rPr>
+              <a:t># concatenation: DB gets ONE finished string, decides grammar AFTER</a:t>
+            </a:r>
+            <a:endParaRPr lang="en-US" sz="1150" dirty="0"/>
+          </a:p>
+          <a:p>
+            <a:pPr indent="0" marL="0">
+              <a:buNone/>
+            </a:pPr>
+            <a:r>
+              <a:rPr lang="en-US" sz="1150" dirty="0">
+                <a:solidFill>
+                  <a:srgbClr val="9FE7D6"/>
+                </a:solidFill>
+                <a:latin typeface="Courier New" pitchFamily="34" charset="0"/>
+                <a:ea typeface="Courier New" pitchFamily="34" charset="-122"/>
+                <a:cs typeface="Courier New" pitchFamily="34" charset="-120"/>
+              </a:rPr>
+              <a:t>"...WHERE username = '" + user + "'"     # user = alice'--  -&gt;  ' breaks out, code</a:t>
+            </a:r>
+            <a:endParaRPr lang="en-US" sz="1150" dirty="0"/>
+          </a:p>
+          <a:p>
+            <a:pPr indent="0" marL="0">
+              <a:buNone/>
+            </a:pPr>
+            <a:endParaRPr lang="en-US" sz="1150" dirty="0"/>
+          </a:p>
+          <a:p>
+            <a:pPr indent="0" marL="0">
+              <a:buNone/>
+            </a:pPr>
+            <a:r>
+              <a:rPr lang="en-US" sz="1150" dirty="0">
+                <a:solidFill>
+                  <a:srgbClr val="9FE7D6"/>
+                </a:solidFill>
+                <a:latin typeface="Courier New" pitchFamily="34" charset="0"/>
+                <a:ea typeface="Courier New" pitchFamily="34" charset="-122"/>
+                <a:cs typeface="Courier New" pitchFamily="34" charset="-120"/>
+              </a:rPr>
+              <a:t># parameterized: structure parsed and LOCKED first, value bound AFTER</a:t>
+            </a:r>
+            <a:endParaRPr lang="en-US" sz="1150" dirty="0"/>
+          </a:p>
+          <a:p>
+            <a:pPr indent="0" marL="0">
+              <a:buNone/>
+            </a:pPr>
+            <a:r>
+              <a:rPr lang="en-US" sz="1150" dirty="0">
+                <a:solidFill>
+                  <a:srgbClr val="9FE7D6"/>
+                </a:solidFill>
+                <a:latin typeface="Courier New" pitchFamily="34" charset="0"/>
+                <a:ea typeface="Courier New" pitchFamily="34" charset="-122"/>
+                <a:cs typeface="Courier New" pitchFamily="34" charset="-120"/>
+              </a:rPr>
+              <a:t>db.execute("...WHERE username = ? AND password = ?", (user, pw))</a:t>
+            </a:r>
+            <a:endParaRPr lang="en-US" sz="1150" dirty="0"/>
+          </a:p>
+        </p:txBody>
+      </p:sp>
+      <p:sp>
+        <p:nvSpPr>
+          <p:cNvPr id="7" name="Shape 4"/>
+          <p:cNvSpPr/>
+          <p:nvPr/>
+        </p:nvSpPr>
+        <p:spPr>
+          <a:xfrm>
+            <a:off x="457200" y="2862072"/>
+            <a:ext cx="8229600" cy="1207008"/>
+          </a:xfrm>
+          <a:prstGeom prst="roundRect">
+            <a:avLst>
+              <a:gd name="adj" fmla="val 6061"/>
             </a:avLst>
           </a:prstGeom>
           <a:solidFill>
@@ -10789,14 +12619,14 @@
       </p:sp>
       <p:sp>
         <p:nvSpPr>
-          <p:cNvPr id="6" name="Text 3"/>
-          <p:cNvSpPr/>
-          <p:nvPr/>
-        </p:nvSpPr>
-        <p:spPr>
-          <a:xfrm>
-            <a:off x="731520" y="1435608"/>
-            <a:ext cx="7680960" cy="1499616"/>
+          <p:cNvPr id="8" name="Text 5"/>
+          <p:cNvSpPr/>
+          <p:nvPr/>
+        </p:nvSpPr>
+        <p:spPr>
+          <a:xfrm>
+            <a:off x="731520" y="2971800"/>
+            <a:ext cx="7680960" cy="987552"/>
           </a:xfrm>
           <a:prstGeom prst="rect">
             <a:avLst/>
@@ -10826,7 +12656,7 @@
                 <a:ea typeface="Calibri" pitchFamily="34" charset="-122"/>
                 <a:cs typeface="Calibri" pitchFamily="34" charset="-120"/>
               </a:rPr>
-              <a:t>Equifax (2017): unvalidated HTTP header → Struts RCE (CVE-2017-5638); 147M people, ~$700M settlement</a:t>
+              <a:t>? locks the query structure before the input ever arrives</a:t>
             </a:r>
             <a:endParaRPr lang="en-US" sz="1400" dirty="0"/>
           </a:p>
@@ -10847,7 +12677,7 @@
                 <a:ea typeface="Calibri" pitchFamily="34" charset="-122"/>
                 <a:cs typeface="Calibri" pitchFamily="34" charset="-120"/>
               </a:rPr>
-              <a:t>Heartland (2008): SQLi into payment systems → 130M+ cards</a:t>
+              <a:t>alice'-- is then bound as a value — it can no longer become SQL grammar</a:t>
             </a:r>
             <a:endParaRPr lang="en-US" sz="1400" dirty="0"/>
           </a:p>
@@ -10868,66 +12698,45 @@
                 <a:ea typeface="Calibri" pitchFamily="34" charset="-122"/>
                 <a:cs typeface="Calibri" pitchFamily="34" charset="-120"/>
               </a:rPr>
-              <a:t>Bulgaria: data on almost all adults leaked via SQLi</a:t>
+              <a:t>Escaping quotes patches symptoms; this is the actual fix for SQLi</a:t>
             </a:r>
             <a:endParaRPr lang="en-US" sz="1400" dirty="0"/>
           </a:p>
-          <a:p>
-            <a:pPr marL="342900" indent="-342900">
-              <a:spcAft>
-                <a:spcPts val="600"/>
-              </a:spcAft>
-              <a:buSzPct val="100000"/>
-              <a:buChar char="•"/>
-            </a:pPr>
-            <a:r>
-              <a:rPr lang="en-US" sz="1400" dirty="0">
-                <a:solidFill>
-                  <a:srgbClr val="1F2937"/>
+        </p:txBody>
+      </p:sp>
+      <p:sp>
+        <p:nvSpPr>
+          <p:cNvPr id="9" name="Text 6"/>
+          <p:cNvSpPr/>
+          <p:nvPr/>
+        </p:nvSpPr>
+        <p:spPr>
+          <a:xfrm>
+            <a:off x="457200" y="4800600"/>
+            <a:ext cx="6949440" cy="274320"/>
+          </a:xfrm>
+          <a:prstGeom prst="rect">
+            <a:avLst/>
+          </a:prstGeom>
+          <a:noFill/>
+          <a:ln/>
+        </p:spPr>
+        <p:txBody>
+          <a:bodyPr wrap="square" lIns="0" tIns="0" rIns="0" bIns="0" rtlCol="0" anchor="ctr"/>
+          <a:lstStyle/>
+          <a:p>
+            <a:pPr indent="0" marL="0">
+              <a:buNone/>
+            </a:pPr>
+            <a:r>
+              <a:rPr lang="en-US" sz="900" dirty="0">
+                <a:solidFill>
+                  <a:srgbClr val="64748B"/>
                 </a:solidFill>
                 <a:latin typeface="Calibri" pitchFamily="34" charset="0"/>
                 <a:ea typeface="Calibri" pitchFamily="34" charset="-122"/>
                 <a:cs typeface="Calibri" pitchFamily="34" charset="-120"/>
               </a:rPr>
-              <a:t>Impact: data leak/modification, full DB control, DoS, reputation</a:t>
-            </a:r>
-            <a:endParaRPr lang="en-US" sz="1400" dirty="0"/>
-          </a:p>
-        </p:txBody>
-      </p:sp>
-      <p:sp>
-        <p:nvSpPr>
-          <p:cNvPr id="7" name="Text 4"/>
-          <p:cNvSpPr/>
-          <p:nvPr/>
-        </p:nvSpPr>
-        <p:spPr>
-          <a:xfrm>
-            <a:off x="457200" y="4800600"/>
-            <a:ext cx="6949440" cy="274320"/>
-          </a:xfrm>
-          <a:prstGeom prst="rect">
-            <a:avLst/>
-          </a:prstGeom>
-          <a:noFill/>
-          <a:ln/>
-        </p:spPr>
-        <p:txBody>
-          <a:bodyPr wrap="square" lIns="0" tIns="0" rIns="0" bIns="0" rtlCol="0" anchor="ctr"/>
-          <a:lstStyle/>
-          <a:p>
-            <a:pPr indent="0" marL="0">
-              <a:buNone/>
-            </a:pPr>
-            <a:r>
-              <a:rPr lang="en-US" sz="900" dirty="0">
-                <a:solidFill>
-                  <a:srgbClr val="64748B"/>
-                </a:solidFill>
-                <a:latin typeface="Calibri" pitchFamily="34" charset="0"/>
-                <a:ea typeface="Calibri" pitchFamily="34" charset="-122"/>
-                <a:cs typeface="Calibri" pitchFamily="34" charset="-120"/>
-              </a:rPr>
               <a:t>Software Security · Week 4</a:t>
             </a:r>
             <a:endParaRPr lang="en-US" sz="900" dirty="0"/>
@@ -10936,7 +12745,7 @@
       </p:sp>
       <p:pic>
         <p:nvPicPr>
-          <p:cNvPr id="8" name="Image 1" descr="/Users/pop7/Library/CloudStorage/OneDrive-MonsterConnectCo.,Ltd/Lecture/KOSEN69 - software-security/slides/pptx/assets/logo-small.png">    </p:cNvPr>
+          <p:cNvPr id="10" name="Image 1" descr="/private/tmp/claude-501/-Users-pop7-Library-CloudStorage-OneDrive-MonsterConnectCo--Ltd-Lecture-KOSEN69---software-security/e6d6556f-17de-403d-a9a0-cf2f846149b4/scratchpad/pptx2/src/slides/pptx/assets/logo-small.png">    </p:cNvPr>
           <p:cNvPicPr>
             <a:picLocks noChangeAspect="1"/>
           </p:cNvPicPr>
